--- a/assets/lessons/lectures/astronomy/dark-matter-2018.pptx
+++ b/assets/lessons/lectures/astronomy/dark-matter-2018.pptx
@@ -31912,7 +31912,7 @@
                 <a:sym typeface="Calibri"/>
                 <a:hlinkClick r:id="rId3"/>
               </a:rPr>
-              <a:t>http://boojum.as.arizona.edu/~jill/NS102_2004/Lectures/SystemFiles/ToolBrowser/Tutorial_15/orbital_velocity_mass_and_r.swf</a:t>
+              <a:t>https://phet.colorado.edu/en/simulations/gravity-and-orbits</a:t>
             </a:r>
             <a:endParaRPr b="0" i="0" sz="3200" u="none" cap="none" strike="noStrike">
               <a:solidFill>

--- a/assets/lessons/lectures/astronomy/dark-matter-2018.pptx
+++ b/assets/lessons/lectures/astronomy/dark-matter-2018.pptx
@@ -21081,30 +21081,6 @@
       </p:sp>
       <p:sp>
         <p:nvSpPr>
-          <p:cNvPr id="168" name="DSPIRA 1"/>
-          <p:cNvSpPr>
-            <a:spLocks noGrp="1"/>
-          </p:cNvSpPr>
-          <p:nvPr/>
-        </p:nvSpPr>
-        <p:spPr>
-          <a:xfrm>
-            <a:off x="0" y="0"/>
-            <a:ext cx="9144000" cy="342900"/>
-          </a:xfrm>
-          <a:prstGeom prst="rect">
-            <a:avLst/>
-          </a:prstGeom>
-          <a:solidFill>
-            <a:srgbClr val="FFFFFF"/>
-          </a:solidFill>
-          <a:ln w="0">
-            <a:noFill/>
-          </a:ln>
-        </p:spPr>
-      </p:sp>
-      <p:sp>
-        <p:nvSpPr>
           <p:cNvPr id="169" name="DSPIRA 2"/>
           <p:cNvSpPr>
             <a:spLocks noGrp="1"/>
@@ -21126,57 +21102,6 @@
             <a:noFill/>
           </a:ln>
         </p:spPr>
-      </p:sp>
-      <p:sp>
-        <p:nvSpPr>
-          <p:cNvPr id="170" name="DSPIRA 3"/>
-          <p:cNvSpPr>
-            <a:spLocks noGrp="1"/>
-          </p:cNvSpPr>
-          <p:nvPr/>
-        </p:nvSpPr>
-        <p:spPr>
-          <a:xfrm>
-            <a:off x="228600" y="76200"/>
-            <a:ext cx="4762500" cy="228600"/>
-          </a:xfrm>
-          <a:prstGeom prst="rect">
-            <a:avLst/>
-          </a:prstGeom>
-          <a:noFill/>
-          <a:ln w="0">
-            <a:noFill/>
-          </a:ln>
-        </p:spPr>
-        <p:txBody>
-          <a:bodyPr>
-            <a:noAutofit/>
-          </a:bodyPr>
-          <a:lstStyle/>
-          <a:p>
-            <a:pPr>
-              <a:defRPr sz="1200" b="1">
-                <a:solidFill>
-                  <a:srgbClr val="002855"/>
-                </a:solidFill>
-                <a:latin typeface="Arial"/>
-                <a:ea typeface="Arial"/>
-                <a:cs typeface="Arial"/>
-              </a:defRPr>
-            </a:pPr>
-            <a:r>
-              <a:rPr sz="1200" b="1">
-                <a:solidFill>
-                  <a:srgbClr val="002855"/>
-                </a:solidFill>
-                <a:latin typeface="Arial"/>
-                <a:ea typeface="Arial"/>
-                <a:cs typeface="Arial"/>
-              </a:rPr>
-              <a:t>WVU DSPIRA</a:t>
-            </a:r>
-          </a:p>
-        </p:txBody>
       </p:sp>
       <p:sp>
         <p:nvSpPr>
@@ -21276,6 +21201,156 @@
                 <a:cs typeface="Arial"/>
               </a:rPr>
               <a:t>1 of 29</a:t>
+            </a:r>
+          </a:p>
+        </p:txBody>
+      </p:sp>
+      <p:sp>
+        <p:nvSpPr>
+          <p:cNvPr id="173" name="WVU DSPIRA navy band"/>
+          <p:cNvSpPr>
+            <a:spLocks noGrp="1"/>
+          </p:cNvSpPr>
+          <p:nvPr/>
+        </p:nvSpPr>
+        <p:spPr>
+          <a:xfrm>
+            <a:off x="0" y="0"/>
+            <a:ext cx="9144000" cy="323850"/>
+          </a:xfrm>
+          <a:prstGeom prst="rect">
+            <a:avLst/>
+          </a:prstGeom>
+          <a:solidFill>
+            <a:srgbClr val="002855"/>
+          </a:solidFill>
+          <a:ln w="0">
+            <a:noFill/>
+          </a:ln>
+        </p:spPr>
+      </p:sp>
+      <p:sp>
+        <p:nvSpPr>
+          <p:cNvPr id="174" name="WVU DSPIRA gold rule"/>
+          <p:cNvSpPr>
+            <a:spLocks noGrp="1"/>
+          </p:cNvSpPr>
+          <p:nvPr/>
+        </p:nvSpPr>
+        <p:spPr>
+          <a:xfrm>
+            <a:off x="0" y="323850"/>
+            <a:ext cx="9144000" cy="19050"/>
+          </a:xfrm>
+          <a:prstGeom prst="rect">
+            <a:avLst/>
+          </a:prstGeom>
+          <a:solidFill>
+            <a:srgbClr val="EEAA00"/>
+          </a:solidFill>
+          <a:ln w="0">
+            <a:noFill/>
+          </a:ln>
+        </p:spPr>
+      </p:sp>
+      <p:sp>
+        <p:nvSpPr>
+          <p:cNvPr id="175" name="WVU DSPIRA name"/>
+          <p:cNvSpPr>
+            <a:spLocks noGrp="1"/>
+          </p:cNvSpPr>
+          <p:nvPr/>
+        </p:nvSpPr>
+        <p:spPr>
+          <a:xfrm>
+            <a:off x="228600" y="19050"/>
+            <a:ext cx="2857500" cy="257175"/>
+          </a:xfrm>
+          <a:prstGeom prst="rect">
+            <a:avLst/>
+          </a:prstGeom>
+          <a:noFill/>
+          <a:ln w="0">
+            <a:noFill/>
+          </a:ln>
+        </p:spPr>
+        <p:txBody>
+          <a:bodyPr>
+            <a:noAutofit/>
+          </a:bodyPr>
+          <a:lstStyle/>
+          <a:p>
+            <a:pPr>
+              <a:defRPr sz="1600" b="1">
+                <a:solidFill>
+                  <a:srgbClr val="FFFFFF"/>
+                </a:solidFill>
+                <a:latin typeface="Arial"/>
+                <a:ea typeface="Arial"/>
+                <a:cs typeface="Arial"/>
+              </a:defRPr>
+            </a:pPr>
+            <a:r>
+              <a:rPr sz="1600" b="1">
+                <a:solidFill>
+                  <a:srgbClr val="FFFFFF"/>
+                </a:solidFill>
+                <a:latin typeface="Arial"/>
+                <a:ea typeface="Arial"/>
+                <a:cs typeface="Arial"/>
+              </a:rPr>
+              <a:t>WVU DSPIRA</a:t>
+            </a:r>
+          </a:p>
+        </p:txBody>
+      </p:sp>
+      <p:sp>
+        <p:nvSpPr>
+          <p:cNvPr id="176" name="WVU DSPIRA university"/>
+          <p:cNvSpPr>
+            <a:spLocks noGrp="1"/>
+          </p:cNvSpPr>
+          <p:nvPr/>
+        </p:nvSpPr>
+        <p:spPr>
+          <a:xfrm>
+            <a:off x="6286500" y="114300"/>
+            <a:ext cx="2628900" cy="171450"/>
+          </a:xfrm>
+          <a:prstGeom prst="rect">
+            <a:avLst/>
+          </a:prstGeom>
+          <a:noFill/>
+          <a:ln w="0">
+            <a:noFill/>
+          </a:ln>
+        </p:spPr>
+        <p:txBody>
+          <a:bodyPr>
+            <a:noAutofit/>
+          </a:bodyPr>
+          <a:lstStyle/>
+          <a:p>
+            <a:pPr algn="r">
+              <a:defRPr sz="900">
+                <a:solidFill>
+                  <a:srgbClr val="FFFFFF"/>
+                </a:solidFill>
+                <a:latin typeface="Arial"/>
+                <a:ea typeface="Arial"/>
+                <a:cs typeface="Arial"/>
+              </a:defRPr>
+            </a:pPr>
+            <a:r>
+              <a:rPr sz="900">
+                <a:solidFill>
+                  <a:srgbClr val="FFFFFF"/>
+                </a:solidFill>
+                <a:latin typeface="Arial"/>
+                <a:ea typeface="Arial"/>
+                <a:cs typeface="Arial"/>
+              </a:rPr>
+              <a:t>WEST VIRGINIA UNIVERSITY</a:t>
             </a:r>
           </a:p>
         </p:txBody>
@@ -21429,30 +21504,6 @@
       </p:sp>
       <p:sp>
         <p:nvSpPr>
-          <p:cNvPr id="235" name="DSPIRA 1"/>
-          <p:cNvSpPr>
-            <a:spLocks noGrp="1"/>
-          </p:cNvSpPr>
-          <p:nvPr/>
-        </p:nvSpPr>
-        <p:spPr>
-          <a:xfrm>
-            <a:off x="0" y="0"/>
-            <a:ext cx="9144000" cy="342900"/>
-          </a:xfrm>
-          <a:prstGeom prst="rect">
-            <a:avLst/>
-          </a:prstGeom>
-          <a:solidFill>
-            <a:srgbClr val="FFFFFF"/>
-          </a:solidFill>
-          <a:ln w="0">
-            <a:noFill/>
-          </a:ln>
-        </p:spPr>
-      </p:sp>
-      <p:sp>
-        <p:nvSpPr>
           <p:cNvPr id="236" name="DSPIRA 2"/>
           <p:cNvSpPr>
             <a:spLocks noGrp="1"/>
@@ -21474,57 +21525,6 @@
             <a:noFill/>
           </a:ln>
         </p:spPr>
-      </p:sp>
-      <p:sp>
-        <p:nvSpPr>
-          <p:cNvPr id="237" name="DSPIRA 3"/>
-          <p:cNvSpPr>
-            <a:spLocks noGrp="1"/>
-          </p:cNvSpPr>
-          <p:nvPr/>
-        </p:nvSpPr>
-        <p:spPr>
-          <a:xfrm>
-            <a:off x="228600" y="76200"/>
-            <a:ext cx="4762500" cy="228600"/>
-          </a:xfrm>
-          <a:prstGeom prst="rect">
-            <a:avLst/>
-          </a:prstGeom>
-          <a:noFill/>
-          <a:ln w="0">
-            <a:noFill/>
-          </a:ln>
-        </p:spPr>
-        <p:txBody>
-          <a:bodyPr>
-            <a:noAutofit/>
-          </a:bodyPr>
-          <a:lstStyle/>
-          <a:p>
-            <a:pPr>
-              <a:defRPr sz="1200" b="1">
-                <a:solidFill>
-                  <a:srgbClr val="002855"/>
-                </a:solidFill>
-                <a:latin typeface="Arial"/>
-                <a:ea typeface="Arial"/>
-                <a:cs typeface="Arial"/>
-              </a:defRPr>
-            </a:pPr>
-            <a:r>
-              <a:rPr sz="1200" b="1">
-                <a:solidFill>
-                  <a:srgbClr val="002855"/>
-                </a:solidFill>
-                <a:latin typeface="Arial"/>
-                <a:ea typeface="Arial"/>
-                <a:cs typeface="Arial"/>
-              </a:rPr>
-              <a:t>WVU DSPIRA</a:t>
-            </a:r>
-          </a:p>
-        </p:txBody>
       </p:sp>
       <p:sp>
         <p:nvSpPr>
@@ -21624,6 +21624,156 @@
                 <a:cs typeface="Arial"/>
               </a:rPr>
               <a:t>Supplemental</a:t>
+            </a:r>
+          </a:p>
+        </p:txBody>
+      </p:sp>
+      <p:sp>
+        <p:nvSpPr>
+          <p:cNvPr id="240" name="WVU DSPIRA navy band"/>
+          <p:cNvSpPr>
+            <a:spLocks noGrp="1"/>
+          </p:cNvSpPr>
+          <p:nvPr/>
+        </p:nvSpPr>
+        <p:spPr>
+          <a:xfrm>
+            <a:off x="0" y="0"/>
+            <a:ext cx="9144000" cy="323850"/>
+          </a:xfrm>
+          <a:prstGeom prst="rect">
+            <a:avLst/>
+          </a:prstGeom>
+          <a:solidFill>
+            <a:srgbClr val="002855"/>
+          </a:solidFill>
+          <a:ln w="0">
+            <a:noFill/>
+          </a:ln>
+        </p:spPr>
+      </p:sp>
+      <p:sp>
+        <p:nvSpPr>
+          <p:cNvPr id="241" name="WVU DSPIRA gold rule"/>
+          <p:cNvSpPr>
+            <a:spLocks noGrp="1"/>
+          </p:cNvSpPr>
+          <p:nvPr/>
+        </p:nvSpPr>
+        <p:spPr>
+          <a:xfrm>
+            <a:off x="0" y="323850"/>
+            <a:ext cx="9144000" cy="19050"/>
+          </a:xfrm>
+          <a:prstGeom prst="rect">
+            <a:avLst/>
+          </a:prstGeom>
+          <a:solidFill>
+            <a:srgbClr val="EEAA00"/>
+          </a:solidFill>
+          <a:ln w="0">
+            <a:noFill/>
+          </a:ln>
+        </p:spPr>
+      </p:sp>
+      <p:sp>
+        <p:nvSpPr>
+          <p:cNvPr id="242" name="WVU DSPIRA name"/>
+          <p:cNvSpPr>
+            <a:spLocks noGrp="1"/>
+          </p:cNvSpPr>
+          <p:nvPr/>
+        </p:nvSpPr>
+        <p:spPr>
+          <a:xfrm>
+            <a:off x="228600" y="19050"/>
+            <a:ext cx="2857500" cy="257175"/>
+          </a:xfrm>
+          <a:prstGeom prst="rect">
+            <a:avLst/>
+          </a:prstGeom>
+          <a:noFill/>
+          <a:ln w="0">
+            <a:noFill/>
+          </a:ln>
+        </p:spPr>
+        <p:txBody>
+          <a:bodyPr>
+            <a:noAutofit/>
+          </a:bodyPr>
+          <a:lstStyle/>
+          <a:p>
+            <a:pPr>
+              <a:defRPr sz="1600" b="1">
+                <a:solidFill>
+                  <a:srgbClr val="FFFFFF"/>
+                </a:solidFill>
+                <a:latin typeface="Arial"/>
+                <a:ea typeface="Arial"/>
+                <a:cs typeface="Arial"/>
+              </a:defRPr>
+            </a:pPr>
+            <a:r>
+              <a:rPr sz="1600" b="1">
+                <a:solidFill>
+                  <a:srgbClr val="FFFFFF"/>
+                </a:solidFill>
+                <a:latin typeface="Arial"/>
+                <a:ea typeface="Arial"/>
+                <a:cs typeface="Arial"/>
+              </a:rPr>
+              <a:t>WVU DSPIRA</a:t>
+            </a:r>
+          </a:p>
+        </p:txBody>
+      </p:sp>
+      <p:sp>
+        <p:nvSpPr>
+          <p:cNvPr id="243" name="WVU DSPIRA university"/>
+          <p:cNvSpPr>
+            <a:spLocks noGrp="1"/>
+          </p:cNvSpPr>
+          <p:nvPr/>
+        </p:nvSpPr>
+        <p:spPr>
+          <a:xfrm>
+            <a:off x="6286500" y="114300"/>
+            <a:ext cx="2628900" cy="171450"/>
+          </a:xfrm>
+          <a:prstGeom prst="rect">
+            <a:avLst/>
+          </a:prstGeom>
+          <a:noFill/>
+          <a:ln w="0">
+            <a:noFill/>
+          </a:ln>
+        </p:spPr>
+        <p:txBody>
+          <a:bodyPr>
+            <a:noAutofit/>
+          </a:bodyPr>
+          <a:lstStyle/>
+          <a:p>
+            <a:pPr algn="r">
+              <a:defRPr sz="900">
+                <a:solidFill>
+                  <a:srgbClr val="FFFFFF"/>
+                </a:solidFill>
+                <a:latin typeface="Arial"/>
+                <a:ea typeface="Arial"/>
+                <a:cs typeface="Arial"/>
+              </a:defRPr>
+            </a:pPr>
+            <a:r>
+              <a:rPr sz="900">
+                <a:solidFill>
+                  <a:srgbClr val="FFFFFF"/>
+                </a:solidFill>
+                <a:latin typeface="Arial"/>
+                <a:ea typeface="Arial"/>
+                <a:cs typeface="Arial"/>
+              </a:rPr>
+              <a:t>WEST VIRGINIA UNIVERSITY</a:t>
             </a:r>
           </a:p>
         </p:txBody>
@@ -21957,30 +22107,6 @@
       </p:sp>
       <p:sp>
         <p:nvSpPr>
-          <p:cNvPr id="243" name="DSPIRA 1"/>
-          <p:cNvSpPr>
-            <a:spLocks noGrp="1"/>
-          </p:cNvSpPr>
-          <p:nvPr/>
-        </p:nvSpPr>
-        <p:spPr>
-          <a:xfrm>
-            <a:off x="0" y="0"/>
-            <a:ext cx="9144000" cy="342900"/>
-          </a:xfrm>
-          <a:prstGeom prst="rect">
-            <a:avLst/>
-          </a:prstGeom>
-          <a:solidFill>
-            <a:srgbClr val="FFFFFF"/>
-          </a:solidFill>
-          <a:ln w="0">
-            <a:noFill/>
-          </a:ln>
-        </p:spPr>
-      </p:sp>
-      <p:sp>
-        <p:nvSpPr>
           <p:cNvPr id="244" name="DSPIRA 2"/>
           <p:cNvSpPr>
             <a:spLocks noGrp="1"/>
@@ -22002,57 +22128,6 @@
             <a:noFill/>
           </a:ln>
         </p:spPr>
-      </p:sp>
-      <p:sp>
-        <p:nvSpPr>
-          <p:cNvPr id="245" name="DSPIRA 3"/>
-          <p:cNvSpPr>
-            <a:spLocks noGrp="1"/>
-          </p:cNvSpPr>
-          <p:nvPr/>
-        </p:nvSpPr>
-        <p:spPr>
-          <a:xfrm>
-            <a:off x="228600" y="76200"/>
-            <a:ext cx="4762500" cy="228600"/>
-          </a:xfrm>
-          <a:prstGeom prst="rect">
-            <a:avLst/>
-          </a:prstGeom>
-          <a:noFill/>
-          <a:ln w="0">
-            <a:noFill/>
-          </a:ln>
-        </p:spPr>
-        <p:txBody>
-          <a:bodyPr>
-            <a:noAutofit/>
-          </a:bodyPr>
-          <a:lstStyle/>
-          <a:p>
-            <a:pPr>
-              <a:defRPr sz="1200" b="1">
-                <a:solidFill>
-                  <a:srgbClr val="002855"/>
-                </a:solidFill>
-                <a:latin typeface="Arial"/>
-                <a:ea typeface="Arial"/>
-                <a:cs typeface="Arial"/>
-              </a:defRPr>
-            </a:pPr>
-            <a:r>
-              <a:rPr sz="1200" b="1">
-                <a:solidFill>
-                  <a:srgbClr val="002855"/>
-                </a:solidFill>
-                <a:latin typeface="Arial"/>
-                <a:ea typeface="Arial"/>
-                <a:cs typeface="Arial"/>
-              </a:rPr>
-              <a:t>WVU DSPIRA</a:t>
-            </a:r>
-          </a:p>
-        </p:txBody>
       </p:sp>
       <p:sp>
         <p:nvSpPr>
@@ -22152,6 +22227,156 @@
                 <a:cs typeface="Arial"/>
               </a:rPr>
               <a:t>10 of 29</a:t>
+            </a:r>
+          </a:p>
+        </p:txBody>
+      </p:sp>
+      <p:sp>
+        <p:nvSpPr>
+          <p:cNvPr id="248" name="WVU DSPIRA navy band"/>
+          <p:cNvSpPr>
+            <a:spLocks noGrp="1"/>
+          </p:cNvSpPr>
+          <p:nvPr/>
+        </p:nvSpPr>
+        <p:spPr>
+          <a:xfrm>
+            <a:off x="0" y="0"/>
+            <a:ext cx="9144000" cy="323850"/>
+          </a:xfrm>
+          <a:prstGeom prst="rect">
+            <a:avLst/>
+          </a:prstGeom>
+          <a:solidFill>
+            <a:srgbClr val="002855"/>
+          </a:solidFill>
+          <a:ln w="0">
+            <a:noFill/>
+          </a:ln>
+        </p:spPr>
+      </p:sp>
+      <p:sp>
+        <p:nvSpPr>
+          <p:cNvPr id="249" name="WVU DSPIRA gold rule"/>
+          <p:cNvSpPr>
+            <a:spLocks noGrp="1"/>
+          </p:cNvSpPr>
+          <p:nvPr/>
+        </p:nvSpPr>
+        <p:spPr>
+          <a:xfrm>
+            <a:off x="0" y="323850"/>
+            <a:ext cx="9144000" cy="19050"/>
+          </a:xfrm>
+          <a:prstGeom prst="rect">
+            <a:avLst/>
+          </a:prstGeom>
+          <a:solidFill>
+            <a:srgbClr val="EEAA00"/>
+          </a:solidFill>
+          <a:ln w="0">
+            <a:noFill/>
+          </a:ln>
+        </p:spPr>
+      </p:sp>
+      <p:sp>
+        <p:nvSpPr>
+          <p:cNvPr id="250" name="WVU DSPIRA name"/>
+          <p:cNvSpPr>
+            <a:spLocks noGrp="1"/>
+          </p:cNvSpPr>
+          <p:nvPr/>
+        </p:nvSpPr>
+        <p:spPr>
+          <a:xfrm>
+            <a:off x="228600" y="19050"/>
+            <a:ext cx="2857500" cy="257175"/>
+          </a:xfrm>
+          <a:prstGeom prst="rect">
+            <a:avLst/>
+          </a:prstGeom>
+          <a:noFill/>
+          <a:ln w="0">
+            <a:noFill/>
+          </a:ln>
+        </p:spPr>
+        <p:txBody>
+          <a:bodyPr>
+            <a:noAutofit/>
+          </a:bodyPr>
+          <a:lstStyle/>
+          <a:p>
+            <a:pPr>
+              <a:defRPr sz="1600" b="1">
+                <a:solidFill>
+                  <a:srgbClr val="FFFFFF"/>
+                </a:solidFill>
+                <a:latin typeface="Arial"/>
+                <a:ea typeface="Arial"/>
+                <a:cs typeface="Arial"/>
+              </a:defRPr>
+            </a:pPr>
+            <a:r>
+              <a:rPr sz="1600" b="1">
+                <a:solidFill>
+                  <a:srgbClr val="FFFFFF"/>
+                </a:solidFill>
+                <a:latin typeface="Arial"/>
+                <a:ea typeface="Arial"/>
+                <a:cs typeface="Arial"/>
+              </a:rPr>
+              <a:t>WVU DSPIRA</a:t>
+            </a:r>
+          </a:p>
+        </p:txBody>
+      </p:sp>
+      <p:sp>
+        <p:nvSpPr>
+          <p:cNvPr id="251" name="WVU DSPIRA university"/>
+          <p:cNvSpPr>
+            <a:spLocks noGrp="1"/>
+          </p:cNvSpPr>
+          <p:nvPr/>
+        </p:nvSpPr>
+        <p:spPr>
+          <a:xfrm>
+            <a:off x="6286500" y="114300"/>
+            <a:ext cx="2628900" cy="171450"/>
+          </a:xfrm>
+          <a:prstGeom prst="rect">
+            <a:avLst/>
+          </a:prstGeom>
+          <a:noFill/>
+          <a:ln w="0">
+            <a:noFill/>
+          </a:ln>
+        </p:spPr>
+        <p:txBody>
+          <a:bodyPr>
+            <a:noAutofit/>
+          </a:bodyPr>
+          <a:lstStyle/>
+          <a:p>
+            <a:pPr algn="r">
+              <a:defRPr sz="900">
+                <a:solidFill>
+                  <a:srgbClr val="FFFFFF"/>
+                </a:solidFill>
+                <a:latin typeface="Arial"/>
+                <a:ea typeface="Arial"/>
+                <a:cs typeface="Arial"/>
+              </a:defRPr>
+            </a:pPr>
+            <a:r>
+              <a:rPr sz="900">
+                <a:solidFill>
+                  <a:srgbClr val="FFFFFF"/>
+                </a:solidFill>
+                <a:latin typeface="Arial"/>
+                <a:ea typeface="Arial"/>
+                <a:cs typeface="Arial"/>
+              </a:rPr>
+              <a:t>WEST VIRGINIA UNIVERSITY</a:t>
             </a:r>
           </a:p>
         </p:txBody>
@@ -22473,30 +22698,6 @@
       </p:sp>
       <p:sp>
         <p:nvSpPr>
-          <p:cNvPr id="251" name="DSPIRA 1"/>
-          <p:cNvSpPr>
-            <a:spLocks noGrp="1"/>
-          </p:cNvSpPr>
-          <p:nvPr/>
-        </p:nvSpPr>
-        <p:spPr>
-          <a:xfrm>
-            <a:off x="0" y="0"/>
-            <a:ext cx="9144000" cy="342900"/>
-          </a:xfrm>
-          <a:prstGeom prst="rect">
-            <a:avLst/>
-          </a:prstGeom>
-          <a:solidFill>
-            <a:srgbClr val="FFFFFF"/>
-          </a:solidFill>
-          <a:ln w="0">
-            <a:noFill/>
-          </a:ln>
-        </p:spPr>
-      </p:sp>
-      <p:sp>
-        <p:nvSpPr>
           <p:cNvPr id="252" name="DSPIRA 2"/>
           <p:cNvSpPr>
             <a:spLocks noGrp="1"/>
@@ -22518,57 +22719,6 @@
             <a:noFill/>
           </a:ln>
         </p:spPr>
-      </p:sp>
-      <p:sp>
-        <p:nvSpPr>
-          <p:cNvPr id="253" name="DSPIRA 3"/>
-          <p:cNvSpPr>
-            <a:spLocks noGrp="1"/>
-          </p:cNvSpPr>
-          <p:nvPr/>
-        </p:nvSpPr>
-        <p:spPr>
-          <a:xfrm>
-            <a:off x="228600" y="76200"/>
-            <a:ext cx="4762500" cy="228600"/>
-          </a:xfrm>
-          <a:prstGeom prst="rect">
-            <a:avLst/>
-          </a:prstGeom>
-          <a:noFill/>
-          <a:ln w="0">
-            <a:noFill/>
-          </a:ln>
-        </p:spPr>
-        <p:txBody>
-          <a:bodyPr>
-            <a:noAutofit/>
-          </a:bodyPr>
-          <a:lstStyle/>
-          <a:p>
-            <a:pPr>
-              <a:defRPr sz="1200" b="1">
-                <a:solidFill>
-                  <a:srgbClr val="002855"/>
-                </a:solidFill>
-                <a:latin typeface="Arial"/>
-                <a:ea typeface="Arial"/>
-                <a:cs typeface="Arial"/>
-              </a:defRPr>
-            </a:pPr>
-            <a:r>
-              <a:rPr sz="1200" b="1">
-                <a:solidFill>
-                  <a:srgbClr val="002855"/>
-                </a:solidFill>
-                <a:latin typeface="Arial"/>
-                <a:ea typeface="Arial"/>
-                <a:cs typeface="Arial"/>
-              </a:rPr>
-              <a:t>WVU DSPIRA</a:t>
-            </a:r>
-          </a:p>
-        </p:txBody>
       </p:sp>
       <p:sp>
         <p:nvSpPr>
@@ -22668,6 +22818,156 @@
                 <a:cs typeface="Arial"/>
               </a:rPr>
               <a:t>11 of 29</a:t>
+            </a:r>
+          </a:p>
+        </p:txBody>
+      </p:sp>
+      <p:sp>
+        <p:nvSpPr>
+          <p:cNvPr id="256" name="WVU DSPIRA navy band"/>
+          <p:cNvSpPr>
+            <a:spLocks noGrp="1"/>
+          </p:cNvSpPr>
+          <p:nvPr/>
+        </p:nvSpPr>
+        <p:spPr>
+          <a:xfrm>
+            <a:off x="0" y="0"/>
+            <a:ext cx="9144000" cy="323850"/>
+          </a:xfrm>
+          <a:prstGeom prst="rect">
+            <a:avLst/>
+          </a:prstGeom>
+          <a:solidFill>
+            <a:srgbClr val="002855"/>
+          </a:solidFill>
+          <a:ln w="0">
+            <a:noFill/>
+          </a:ln>
+        </p:spPr>
+      </p:sp>
+      <p:sp>
+        <p:nvSpPr>
+          <p:cNvPr id="257" name="WVU DSPIRA gold rule"/>
+          <p:cNvSpPr>
+            <a:spLocks noGrp="1"/>
+          </p:cNvSpPr>
+          <p:nvPr/>
+        </p:nvSpPr>
+        <p:spPr>
+          <a:xfrm>
+            <a:off x="0" y="323850"/>
+            <a:ext cx="9144000" cy="19050"/>
+          </a:xfrm>
+          <a:prstGeom prst="rect">
+            <a:avLst/>
+          </a:prstGeom>
+          <a:solidFill>
+            <a:srgbClr val="EEAA00"/>
+          </a:solidFill>
+          <a:ln w="0">
+            <a:noFill/>
+          </a:ln>
+        </p:spPr>
+      </p:sp>
+      <p:sp>
+        <p:nvSpPr>
+          <p:cNvPr id="258" name="WVU DSPIRA name"/>
+          <p:cNvSpPr>
+            <a:spLocks noGrp="1"/>
+          </p:cNvSpPr>
+          <p:nvPr/>
+        </p:nvSpPr>
+        <p:spPr>
+          <a:xfrm>
+            <a:off x="228600" y="19050"/>
+            <a:ext cx="2857500" cy="257175"/>
+          </a:xfrm>
+          <a:prstGeom prst="rect">
+            <a:avLst/>
+          </a:prstGeom>
+          <a:noFill/>
+          <a:ln w="0">
+            <a:noFill/>
+          </a:ln>
+        </p:spPr>
+        <p:txBody>
+          <a:bodyPr>
+            <a:noAutofit/>
+          </a:bodyPr>
+          <a:lstStyle/>
+          <a:p>
+            <a:pPr>
+              <a:defRPr sz="1600" b="1">
+                <a:solidFill>
+                  <a:srgbClr val="FFFFFF"/>
+                </a:solidFill>
+                <a:latin typeface="Arial"/>
+                <a:ea typeface="Arial"/>
+                <a:cs typeface="Arial"/>
+              </a:defRPr>
+            </a:pPr>
+            <a:r>
+              <a:rPr sz="1600" b="1">
+                <a:solidFill>
+                  <a:srgbClr val="FFFFFF"/>
+                </a:solidFill>
+                <a:latin typeface="Arial"/>
+                <a:ea typeface="Arial"/>
+                <a:cs typeface="Arial"/>
+              </a:rPr>
+              <a:t>WVU DSPIRA</a:t>
+            </a:r>
+          </a:p>
+        </p:txBody>
+      </p:sp>
+      <p:sp>
+        <p:nvSpPr>
+          <p:cNvPr id="259" name="WVU DSPIRA university"/>
+          <p:cNvSpPr>
+            <a:spLocks noGrp="1"/>
+          </p:cNvSpPr>
+          <p:nvPr/>
+        </p:nvSpPr>
+        <p:spPr>
+          <a:xfrm>
+            <a:off x="6286500" y="114300"/>
+            <a:ext cx="2628900" cy="171450"/>
+          </a:xfrm>
+          <a:prstGeom prst="rect">
+            <a:avLst/>
+          </a:prstGeom>
+          <a:noFill/>
+          <a:ln w="0">
+            <a:noFill/>
+          </a:ln>
+        </p:spPr>
+        <p:txBody>
+          <a:bodyPr>
+            <a:noAutofit/>
+          </a:bodyPr>
+          <a:lstStyle/>
+          <a:p>
+            <a:pPr algn="r">
+              <a:defRPr sz="900">
+                <a:solidFill>
+                  <a:srgbClr val="FFFFFF"/>
+                </a:solidFill>
+                <a:latin typeface="Arial"/>
+                <a:ea typeface="Arial"/>
+                <a:cs typeface="Arial"/>
+              </a:defRPr>
+            </a:pPr>
+            <a:r>
+              <a:rPr sz="900">
+                <a:solidFill>
+                  <a:srgbClr val="FFFFFF"/>
+                </a:solidFill>
+                <a:latin typeface="Arial"/>
+                <a:ea typeface="Arial"/>
+                <a:cs typeface="Arial"/>
+              </a:rPr>
+              <a:t>WEST VIRGINIA UNIVERSITY</a:t>
             </a:r>
           </a:p>
         </p:txBody>
@@ -22955,30 +23255,6 @@
       </p:pic>
       <p:sp>
         <p:nvSpPr>
-          <p:cNvPr id="259" name="DSPIRA 1"/>
-          <p:cNvSpPr>
-            <a:spLocks noGrp="1"/>
-          </p:cNvSpPr>
-          <p:nvPr/>
-        </p:nvSpPr>
-        <p:spPr>
-          <a:xfrm>
-            <a:off x="0" y="0"/>
-            <a:ext cx="9144000" cy="342900"/>
-          </a:xfrm>
-          <a:prstGeom prst="rect">
-            <a:avLst/>
-          </a:prstGeom>
-          <a:solidFill>
-            <a:srgbClr val="FFFFFF"/>
-          </a:solidFill>
-          <a:ln w="0">
-            <a:noFill/>
-          </a:ln>
-        </p:spPr>
-      </p:sp>
-      <p:sp>
-        <p:nvSpPr>
           <p:cNvPr id="260" name="DSPIRA 2"/>
           <p:cNvSpPr>
             <a:spLocks noGrp="1"/>
@@ -23000,57 +23276,6 @@
             <a:noFill/>
           </a:ln>
         </p:spPr>
-      </p:sp>
-      <p:sp>
-        <p:nvSpPr>
-          <p:cNvPr id="261" name="DSPIRA 3"/>
-          <p:cNvSpPr>
-            <a:spLocks noGrp="1"/>
-          </p:cNvSpPr>
-          <p:nvPr/>
-        </p:nvSpPr>
-        <p:spPr>
-          <a:xfrm>
-            <a:off x="228600" y="76200"/>
-            <a:ext cx="4762500" cy="228600"/>
-          </a:xfrm>
-          <a:prstGeom prst="rect">
-            <a:avLst/>
-          </a:prstGeom>
-          <a:noFill/>
-          <a:ln w="0">
-            <a:noFill/>
-          </a:ln>
-        </p:spPr>
-        <p:txBody>
-          <a:bodyPr>
-            <a:noAutofit/>
-          </a:bodyPr>
-          <a:lstStyle/>
-          <a:p>
-            <a:pPr>
-              <a:defRPr sz="1200" b="1">
-                <a:solidFill>
-                  <a:srgbClr val="002855"/>
-                </a:solidFill>
-                <a:latin typeface="Arial"/>
-                <a:ea typeface="Arial"/>
-                <a:cs typeface="Arial"/>
-              </a:defRPr>
-            </a:pPr>
-            <a:r>
-              <a:rPr sz="1200" b="1">
-                <a:solidFill>
-                  <a:srgbClr val="002855"/>
-                </a:solidFill>
-                <a:latin typeface="Arial"/>
-                <a:ea typeface="Arial"/>
-                <a:cs typeface="Arial"/>
-              </a:rPr>
-              <a:t>WVU DSPIRA</a:t>
-            </a:r>
-          </a:p>
-        </p:txBody>
       </p:sp>
       <p:sp>
         <p:nvSpPr>
@@ -23150,6 +23375,156 @@
                 <a:cs typeface="Arial"/>
               </a:rPr>
               <a:t>12 of 29</a:t>
+            </a:r>
+          </a:p>
+        </p:txBody>
+      </p:sp>
+      <p:sp>
+        <p:nvSpPr>
+          <p:cNvPr id="264" name="WVU DSPIRA navy band"/>
+          <p:cNvSpPr>
+            <a:spLocks noGrp="1"/>
+          </p:cNvSpPr>
+          <p:nvPr/>
+        </p:nvSpPr>
+        <p:spPr>
+          <a:xfrm>
+            <a:off x="0" y="0"/>
+            <a:ext cx="9144000" cy="323850"/>
+          </a:xfrm>
+          <a:prstGeom prst="rect">
+            <a:avLst/>
+          </a:prstGeom>
+          <a:solidFill>
+            <a:srgbClr val="002855"/>
+          </a:solidFill>
+          <a:ln w="0">
+            <a:noFill/>
+          </a:ln>
+        </p:spPr>
+      </p:sp>
+      <p:sp>
+        <p:nvSpPr>
+          <p:cNvPr id="265" name="WVU DSPIRA gold rule"/>
+          <p:cNvSpPr>
+            <a:spLocks noGrp="1"/>
+          </p:cNvSpPr>
+          <p:nvPr/>
+        </p:nvSpPr>
+        <p:spPr>
+          <a:xfrm>
+            <a:off x="0" y="323850"/>
+            <a:ext cx="9144000" cy="19050"/>
+          </a:xfrm>
+          <a:prstGeom prst="rect">
+            <a:avLst/>
+          </a:prstGeom>
+          <a:solidFill>
+            <a:srgbClr val="EEAA00"/>
+          </a:solidFill>
+          <a:ln w="0">
+            <a:noFill/>
+          </a:ln>
+        </p:spPr>
+      </p:sp>
+      <p:sp>
+        <p:nvSpPr>
+          <p:cNvPr id="266" name="WVU DSPIRA name"/>
+          <p:cNvSpPr>
+            <a:spLocks noGrp="1"/>
+          </p:cNvSpPr>
+          <p:nvPr/>
+        </p:nvSpPr>
+        <p:spPr>
+          <a:xfrm>
+            <a:off x="228600" y="19050"/>
+            <a:ext cx="2857500" cy="257175"/>
+          </a:xfrm>
+          <a:prstGeom prst="rect">
+            <a:avLst/>
+          </a:prstGeom>
+          <a:noFill/>
+          <a:ln w="0">
+            <a:noFill/>
+          </a:ln>
+        </p:spPr>
+        <p:txBody>
+          <a:bodyPr>
+            <a:noAutofit/>
+          </a:bodyPr>
+          <a:lstStyle/>
+          <a:p>
+            <a:pPr>
+              <a:defRPr sz="1600" b="1">
+                <a:solidFill>
+                  <a:srgbClr val="FFFFFF"/>
+                </a:solidFill>
+                <a:latin typeface="Arial"/>
+                <a:ea typeface="Arial"/>
+                <a:cs typeface="Arial"/>
+              </a:defRPr>
+            </a:pPr>
+            <a:r>
+              <a:rPr sz="1600" b="1">
+                <a:solidFill>
+                  <a:srgbClr val="FFFFFF"/>
+                </a:solidFill>
+                <a:latin typeface="Arial"/>
+                <a:ea typeface="Arial"/>
+                <a:cs typeface="Arial"/>
+              </a:rPr>
+              <a:t>WVU DSPIRA</a:t>
+            </a:r>
+          </a:p>
+        </p:txBody>
+      </p:sp>
+      <p:sp>
+        <p:nvSpPr>
+          <p:cNvPr id="267" name="WVU DSPIRA university"/>
+          <p:cNvSpPr>
+            <a:spLocks noGrp="1"/>
+          </p:cNvSpPr>
+          <p:nvPr/>
+        </p:nvSpPr>
+        <p:spPr>
+          <a:xfrm>
+            <a:off x="6286500" y="114300"/>
+            <a:ext cx="2628900" cy="171450"/>
+          </a:xfrm>
+          <a:prstGeom prst="rect">
+            <a:avLst/>
+          </a:prstGeom>
+          <a:noFill/>
+          <a:ln w="0">
+            <a:noFill/>
+          </a:ln>
+        </p:spPr>
+        <p:txBody>
+          <a:bodyPr>
+            <a:noAutofit/>
+          </a:bodyPr>
+          <a:lstStyle/>
+          <a:p>
+            <a:pPr algn="r">
+              <a:defRPr sz="900">
+                <a:solidFill>
+                  <a:srgbClr val="FFFFFF"/>
+                </a:solidFill>
+                <a:latin typeface="Arial"/>
+                <a:ea typeface="Arial"/>
+                <a:cs typeface="Arial"/>
+              </a:defRPr>
+            </a:pPr>
+            <a:r>
+              <a:rPr sz="900">
+                <a:solidFill>
+                  <a:srgbClr val="FFFFFF"/>
+                </a:solidFill>
+                <a:latin typeface="Arial"/>
+                <a:ea typeface="Arial"/>
+                <a:cs typeface="Arial"/>
+              </a:rPr>
+              <a:t>WEST VIRGINIA UNIVERSITY</a:t>
             </a:r>
           </a:p>
         </p:txBody>
@@ -23477,30 +23852,6 @@
       </p:sp>
       <p:sp>
         <p:nvSpPr>
-          <p:cNvPr id="267" name="DSPIRA 1"/>
-          <p:cNvSpPr>
-            <a:spLocks noGrp="1"/>
-          </p:cNvSpPr>
-          <p:nvPr/>
-        </p:nvSpPr>
-        <p:spPr>
-          <a:xfrm>
-            <a:off x="0" y="0"/>
-            <a:ext cx="9144000" cy="342900"/>
-          </a:xfrm>
-          <a:prstGeom prst="rect">
-            <a:avLst/>
-          </a:prstGeom>
-          <a:solidFill>
-            <a:srgbClr val="FFFFFF"/>
-          </a:solidFill>
-          <a:ln w="0">
-            <a:noFill/>
-          </a:ln>
-        </p:spPr>
-      </p:sp>
-      <p:sp>
-        <p:nvSpPr>
           <p:cNvPr id="268" name="DSPIRA 2"/>
           <p:cNvSpPr>
             <a:spLocks noGrp="1"/>
@@ -23522,57 +23873,6 @@
             <a:noFill/>
           </a:ln>
         </p:spPr>
-      </p:sp>
-      <p:sp>
-        <p:nvSpPr>
-          <p:cNvPr id="269" name="DSPIRA 3"/>
-          <p:cNvSpPr>
-            <a:spLocks noGrp="1"/>
-          </p:cNvSpPr>
-          <p:nvPr/>
-        </p:nvSpPr>
-        <p:spPr>
-          <a:xfrm>
-            <a:off x="228600" y="76200"/>
-            <a:ext cx="4762500" cy="228600"/>
-          </a:xfrm>
-          <a:prstGeom prst="rect">
-            <a:avLst/>
-          </a:prstGeom>
-          <a:noFill/>
-          <a:ln w="0">
-            <a:noFill/>
-          </a:ln>
-        </p:spPr>
-        <p:txBody>
-          <a:bodyPr>
-            <a:noAutofit/>
-          </a:bodyPr>
-          <a:lstStyle/>
-          <a:p>
-            <a:pPr>
-              <a:defRPr sz="1200" b="1">
-                <a:solidFill>
-                  <a:srgbClr val="002855"/>
-                </a:solidFill>
-                <a:latin typeface="Arial"/>
-                <a:ea typeface="Arial"/>
-                <a:cs typeface="Arial"/>
-              </a:defRPr>
-            </a:pPr>
-            <a:r>
-              <a:rPr sz="1200" b="1">
-                <a:solidFill>
-                  <a:srgbClr val="002855"/>
-                </a:solidFill>
-                <a:latin typeface="Arial"/>
-                <a:ea typeface="Arial"/>
-                <a:cs typeface="Arial"/>
-              </a:rPr>
-              <a:t>WVU DSPIRA</a:t>
-            </a:r>
-          </a:p>
-        </p:txBody>
       </p:sp>
       <p:sp>
         <p:nvSpPr>
@@ -23672,6 +23972,156 @@
                 <a:cs typeface="Arial"/>
               </a:rPr>
               <a:t>13 of 29</a:t>
+            </a:r>
+          </a:p>
+        </p:txBody>
+      </p:sp>
+      <p:sp>
+        <p:nvSpPr>
+          <p:cNvPr id="272" name="WVU DSPIRA navy band"/>
+          <p:cNvSpPr>
+            <a:spLocks noGrp="1"/>
+          </p:cNvSpPr>
+          <p:nvPr/>
+        </p:nvSpPr>
+        <p:spPr>
+          <a:xfrm>
+            <a:off x="0" y="0"/>
+            <a:ext cx="9144000" cy="323850"/>
+          </a:xfrm>
+          <a:prstGeom prst="rect">
+            <a:avLst/>
+          </a:prstGeom>
+          <a:solidFill>
+            <a:srgbClr val="002855"/>
+          </a:solidFill>
+          <a:ln w="0">
+            <a:noFill/>
+          </a:ln>
+        </p:spPr>
+      </p:sp>
+      <p:sp>
+        <p:nvSpPr>
+          <p:cNvPr id="273" name="WVU DSPIRA gold rule"/>
+          <p:cNvSpPr>
+            <a:spLocks noGrp="1"/>
+          </p:cNvSpPr>
+          <p:nvPr/>
+        </p:nvSpPr>
+        <p:spPr>
+          <a:xfrm>
+            <a:off x="0" y="323850"/>
+            <a:ext cx="9144000" cy="19050"/>
+          </a:xfrm>
+          <a:prstGeom prst="rect">
+            <a:avLst/>
+          </a:prstGeom>
+          <a:solidFill>
+            <a:srgbClr val="EEAA00"/>
+          </a:solidFill>
+          <a:ln w="0">
+            <a:noFill/>
+          </a:ln>
+        </p:spPr>
+      </p:sp>
+      <p:sp>
+        <p:nvSpPr>
+          <p:cNvPr id="274" name="WVU DSPIRA name"/>
+          <p:cNvSpPr>
+            <a:spLocks noGrp="1"/>
+          </p:cNvSpPr>
+          <p:nvPr/>
+        </p:nvSpPr>
+        <p:spPr>
+          <a:xfrm>
+            <a:off x="228600" y="19050"/>
+            <a:ext cx="2857500" cy="257175"/>
+          </a:xfrm>
+          <a:prstGeom prst="rect">
+            <a:avLst/>
+          </a:prstGeom>
+          <a:noFill/>
+          <a:ln w="0">
+            <a:noFill/>
+          </a:ln>
+        </p:spPr>
+        <p:txBody>
+          <a:bodyPr>
+            <a:noAutofit/>
+          </a:bodyPr>
+          <a:lstStyle/>
+          <a:p>
+            <a:pPr>
+              <a:defRPr sz="1600" b="1">
+                <a:solidFill>
+                  <a:srgbClr val="FFFFFF"/>
+                </a:solidFill>
+                <a:latin typeface="Arial"/>
+                <a:ea typeface="Arial"/>
+                <a:cs typeface="Arial"/>
+              </a:defRPr>
+            </a:pPr>
+            <a:r>
+              <a:rPr sz="1600" b="1">
+                <a:solidFill>
+                  <a:srgbClr val="FFFFFF"/>
+                </a:solidFill>
+                <a:latin typeface="Arial"/>
+                <a:ea typeface="Arial"/>
+                <a:cs typeface="Arial"/>
+              </a:rPr>
+              <a:t>WVU DSPIRA</a:t>
+            </a:r>
+          </a:p>
+        </p:txBody>
+      </p:sp>
+      <p:sp>
+        <p:nvSpPr>
+          <p:cNvPr id="275" name="WVU DSPIRA university"/>
+          <p:cNvSpPr>
+            <a:spLocks noGrp="1"/>
+          </p:cNvSpPr>
+          <p:nvPr/>
+        </p:nvSpPr>
+        <p:spPr>
+          <a:xfrm>
+            <a:off x="6286500" y="114300"/>
+            <a:ext cx="2628900" cy="171450"/>
+          </a:xfrm>
+          <a:prstGeom prst="rect">
+            <a:avLst/>
+          </a:prstGeom>
+          <a:noFill/>
+          <a:ln w="0">
+            <a:noFill/>
+          </a:ln>
+        </p:spPr>
+        <p:txBody>
+          <a:bodyPr>
+            <a:noAutofit/>
+          </a:bodyPr>
+          <a:lstStyle/>
+          <a:p>
+            <a:pPr algn="r">
+              <a:defRPr sz="900">
+                <a:solidFill>
+                  <a:srgbClr val="FFFFFF"/>
+                </a:solidFill>
+                <a:latin typeface="Arial"/>
+                <a:ea typeface="Arial"/>
+                <a:cs typeface="Arial"/>
+              </a:defRPr>
+            </a:pPr>
+            <a:r>
+              <a:rPr sz="900">
+                <a:solidFill>
+                  <a:srgbClr val="FFFFFF"/>
+                </a:solidFill>
+                <a:latin typeface="Arial"/>
+                <a:ea typeface="Arial"/>
+                <a:cs typeface="Arial"/>
+              </a:rPr>
+              <a:t>WEST VIRGINIA UNIVERSITY</a:t>
             </a:r>
           </a:p>
         </p:txBody>
@@ -23935,30 +24385,6 @@
       </p:pic>
       <p:sp>
         <p:nvSpPr>
-          <p:cNvPr id="274" name="DSPIRA 1"/>
-          <p:cNvSpPr>
-            <a:spLocks noGrp="1"/>
-          </p:cNvSpPr>
-          <p:nvPr/>
-        </p:nvSpPr>
-        <p:spPr>
-          <a:xfrm>
-            <a:off x="0" y="0"/>
-            <a:ext cx="9144000" cy="342900"/>
-          </a:xfrm>
-          <a:prstGeom prst="rect">
-            <a:avLst/>
-          </a:prstGeom>
-          <a:solidFill>
-            <a:srgbClr val="FFFFFF"/>
-          </a:solidFill>
-          <a:ln w="0">
-            <a:noFill/>
-          </a:ln>
-        </p:spPr>
-      </p:sp>
-      <p:sp>
-        <p:nvSpPr>
           <p:cNvPr id="275" name="DSPIRA 2"/>
           <p:cNvSpPr>
             <a:spLocks noGrp="1"/>
@@ -23980,57 +24406,6 @@
             <a:noFill/>
           </a:ln>
         </p:spPr>
-      </p:sp>
-      <p:sp>
-        <p:nvSpPr>
-          <p:cNvPr id="276" name="DSPIRA 3"/>
-          <p:cNvSpPr>
-            <a:spLocks noGrp="1"/>
-          </p:cNvSpPr>
-          <p:nvPr/>
-        </p:nvSpPr>
-        <p:spPr>
-          <a:xfrm>
-            <a:off x="228600" y="76200"/>
-            <a:ext cx="4762500" cy="228600"/>
-          </a:xfrm>
-          <a:prstGeom prst="rect">
-            <a:avLst/>
-          </a:prstGeom>
-          <a:noFill/>
-          <a:ln w="0">
-            <a:noFill/>
-          </a:ln>
-        </p:spPr>
-        <p:txBody>
-          <a:bodyPr>
-            <a:noAutofit/>
-          </a:bodyPr>
-          <a:lstStyle/>
-          <a:p>
-            <a:pPr>
-              <a:defRPr sz="1200" b="1">
-                <a:solidFill>
-                  <a:srgbClr val="002855"/>
-                </a:solidFill>
-                <a:latin typeface="Arial"/>
-                <a:ea typeface="Arial"/>
-                <a:cs typeface="Arial"/>
-              </a:defRPr>
-            </a:pPr>
-            <a:r>
-              <a:rPr sz="1200" b="1">
-                <a:solidFill>
-                  <a:srgbClr val="002855"/>
-                </a:solidFill>
-                <a:latin typeface="Arial"/>
-                <a:ea typeface="Arial"/>
-                <a:cs typeface="Arial"/>
-              </a:rPr>
-              <a:t>WVU DSPIRA</a:t>
-            </a:r>
-          </a:p>
-        </p:txBody>
       </p:sp>
       <p:sp>
         <p:nvSpPr>
@@ -24130,6 +24505,156 @@
                 <a:cs typeface="Arial"/>
               </a:rPr>
               <a:t>14 of 29</a:t>
+            </a:r>
+          </a:p>
+        </p:txBody>
+      </p:sp>
+      <p:sp>
+        <p:nvSpPr>
+          <p:cNvPr id="279" name="WVU DSPIRA navy band"/>
+          <p:cNvSpPr>
+            <a:spLocks noGrp="1"/>
+          </p:cNvSpPr>
+          <p:nvPr/>
+        </p:nvSpPr>
+        <p:spPr>
+          <a:xfrm>
+            <a:off x="0" y="0"/>
+            <a:ext cx="9144000" cy="323850"/>
+          </a:xfrm>
+          <a:prstGeom prst="rect">
+            <a:avLst/>
+          </a:prstGeom>
+          <a:solidFill>
+            <a:srgbClr val="002855"/>
+          </a:solidFill>
+          <a:ln w="0">
+            <a:noFill/>
+          </a:ln>
+        </p:spPr>
+      </p:sp>
+      <p:sp>
+        <p:nvSpPr>
+          <p:cNvPr id="280" name="WVU DSPIRA gold rule"/>
+          <p:cNvSpPr>
+            <a:spLocks noGrp="1"/>
+          </p:cNvSpPr>
+          <p:nvPr/>
+        </p:nvSpPr>
+        <p:spPr>
+          <a:xfrm>
+            <a:off x="0" y="323850"/>
+            <a:ext cx="9144000" cy="19050"/>
+          </a:xfrm>
+          <a:prstGeom prst="rect">
+            <a:avLst/>
+          </a:prstGeom>
+          <a:solidFill>
+            <a:srgbClr val="EEAA00"/>
+          </a:solidFill>
+          <a:ln w="0">
+            <a:noFill/>
+          </a:ln>
+        </p:spPr>
+      </p:sp>
+      <p:sp>
+        <p:nvSpPr>
+          <p:cNvPr id="281" name="WVU DSPIRA name"/>
+          <p:cNvSpPr>
+            <a:spLocks noGrp="1"/>
+          </p:cNvSpPr>
+          <p:nvPr/>
+        </p:nvSpPr>
+        <p:spPr>
+          <a:xfrm>
+            <a:off x="228600" y="19050"/>
+            <a:ext cx="2857500" cy="257175"/>
+          </a:xfrm>
+          <a:prstGeom prst="rect">
+            <a:avLst/>
+          </a:prstGeom>
+          <a:noFill/>
+          <a:ln w="0">
+            <a:noFill/>
+          </a:ln>
+        </p:spPr>
+        <p:txBody>
+          <a:bodyPr>
+            <a:noAutofit/>
+          </a:bodyPr>
+          <a:lstStyle/>
+          <a:p>
+            <a:pPr>
+              <a:defRPr sz="1600" b="1">
+                <a:solidFill>
+                  <a:srgbClr val="FFFFFF"/>
+                </a:solidFill>
+                <a:latin typeface="Arial"/>
+                <a:ea typeface="Arial"/>
+                <a:cs typeface="Arial"/>
+              </a:defRPr>
+            </a:pPr>
+            <a:r>
+              <a:rPr sz="1600" b="1">
+                <a:solidFill>
+                  <a:srgbClr val="FFFFFF"/>
+                </a:solidFill>
+                <a:latin typeface="Arial"/>
+                <a:ea typeface="Arial"/>
+                <a:cs typeface="Arial"/>
+              </a:rPr>
+              <a:t>WVU DSPIRA</a:t>
+            </a:r>
+          </a:p>
+        </p:txBody>
+      </p:sp>
+      <p:sp>
+        <p:nvSpPr>
+          <p:cNvPr id="282" name="WVU DSPIRA university"/>
+          <p:cNvSpPr>
+            <a:spLocks noGrp="1"/>
+          </p:cNvSpPr>
+          <p:nvPr/>
+        </p:nvSpPr>
+        <p:spPr>
+          <a:xfrm>
+            <a:off x="6286500" y="114300"/>
+            <a:ext cx="2628900" cy="171450"/>
+          </a:xfrm>
+          <a:prstGeom prst="rect">
+            <a:avLst/>
+          </a:prstGeom>
+          <a:noFill/>
+          <a:ln w="0">
+            <a:noFill/>
+          </a:ln>
+        </p:spPr>
+        <p:txBody>
+          <a:bodyPr>
+            <a:noAutofit/>
+          </a:bodyPr>
+          <a:lstStyle/>
+          <a:p>
+            <a:pPr algn="r">
+              <a:defRPr sz="900">
+                <a:solidFill>
+                  <a:srgbClr val="FFFFFF"/>
+                </a:solidFill>
+                <a:latin typeface="Arial"/>
+                <a:ea typeface="Arial"/>
+                <a:cs typeface="Arial"/>
+              </a:defRPr>
+            </a:pPr>
+            <a:r>
+              <a:rPr sz="900">
+                <a:solidFill>
+                  <a:srgbClr val="FFFFFF"/>
+                </a:solidFill>
+                <a:latin typeface="Arial"/>
+                <a:ea typeface="Arial"/>
+                <a:cs typeface="Arial"/>
+              </a:rPr>
+              <a:t>WEST VIRGINIA UNIVERSITY</a:t>
             </a:r>
           </a:p>
         </p:txBody>
@@ -24310,30 +24835,6 @@
       </p:pic>
       <p:sp>
         <p:nvSpPr>
-          <p:cNvPr id="281" name="DSPIRA 1"/>
-          <p:cNvSpPr>
-            <a:spLocks noGrp="1"/>
-          </p:cNvSpPr>
-          <p:nvPr/>
-        </p:nvSpPr>
-        <p:spPr>
-          <a:xfrm>
-            <a:off x="0" y="0"/>
-            <a:ext cx="9144000" cy="342900"/>
-          </a:xfrm>
-          <a:prstGeom prst="rect">
-            <a:avLst/>
-          </a:prstGeom>
-          <a:solidFill>
-            <a:srgbClr val="FFFFFF"/>
-          </a:solidFill>
-          <a:ln w="0">
-            <a:noFill/>
-          </a:ln>
-        </p:spPr>
-      </p:sp>
-      <p:sp>
-        <p:nvSpPr>
           <p:cNvPr id="282" name="DSPIRA 2"/>
           <p:cNvSpPr>
             <a:spLocks noGrp="1"/>
@@ -24355,57 +24856,6 @@
             <a:noFill/>
           </a:ln>
         </p:spPr>
-      </p:sp>
-      <p:sp>
-        <p:nvSpPr>
-          <p:cNvPr id="283" name="DSPIRA 3"/>
-          <p:cNvSpPr>
-            <a:spLocks noGrp="1"/>
-          </p:cNvSpPr>
-          <p:nvPr/>
-        </p:nvSpPr>
-        <p:spPr>
-          <a:xfrm>
-            <a:off x="228600" y="76200"/>
-            <a:ext cx="4762500" cy="228600"/>
-          </a:xfrm>
-          <a:prstGeom prst="rect">
-            <a:avLst/>
-          </a:prstGeom>
-          <a:noFill/>
-          <a:ln w="0">
-            <a:noFill/>
-          </a:ln>
-        </p:spPr>
-        <p:txBody>
-          <a:bodyPr>
-            <a:noAutofit/>
-          </a:bodyPr>
-          <a:lstStyle/>
-          <a:p>
-            <a:pPr>
-              <a:defRPr sz="1200" b="1">
-                <a:solidFill>
-                  <a:srgbClr val="002855"/>
-                </a:solidFill>
-                <a:latin typeface="Arial"/>
-                <a:ea typeface="Arial"/>
-                <a:cs typeface="Arial"/>
-              </a:defRPr>
-            </a:pPr>
-            <a:r>
-              <a:rPr sz="1200" b="1">
-                <a:solidFill>
-                  <a:srgbClr val="002855"/>
-                </a:solidFill>
-                <a:latin typeface="Arial"/>
-                <a:ea typeface="Arial"/>
-                <a:cs typeface="Arial"/>
-              </a:rPr>
-              <a:t>WVU DSPIRA</a:t>
-            </a:r>
-          </a:p>
-        </p:txBody>
       </p:sp>
       <p:sp>
         <p:nvSpPr>
@@ -24505,6 +24955,156 @@
                 <a:cs typeface="Arial"/>
               </a:rPr>
               <a:t>15 of 29</a:t>
+            </a:r>
+          </a:p>
+        </p:txBody>
+      </p:sp>
+      <p:sp>
+        <p:nvSpPr>
+          <p:cNvPr id="286" name="WVU DSPIRA navy band"/>
+          <p:cNvSpPr>
+            <a:spLocks noGrp="1"/>
+          </p:cNvSpPr>
+          <p:nvPr/>
+        </p:nvSpPr>
+        <p:spPr>
+          <a:xfrm>
+            <a:off x="0" y="0"/>
+            <a:ext cx="9144000" cy="323850"/>
+          </a:xfrm>
+          <a:prstGeom prst="rect">
+            <a:avLst/>
+          </a:prstGeom>
+          <a:solidFill>
+            <a:srgbClr val="002855"/>
+          </a:solidFill>
+          <a:ln w="0">
+            <a:noFill/>
+          </a:ln>
+        </p:spPr>
+      </p:sp>
+      <p:sp>
+        <p:nvSpPr>
+          <p:cNvPr id="287" name="WVU DSPIRA gold rule"/>
+          <p:cNvSpPr>
+            <a:spLocks noGrp="1"/>
+          </p:cNvSpPr>
+          <p:nvPr/>
+        </p:nvSpPr>
+        <p:spPr>
+          <a:xfrm>
+            <a:off x="0" y="323850"/>
+            <a:ext cx="9144000" cy="19050"/>
+          </a:xfrm>
+          <a:prstGeom prst="rect">
+            <a:avLst/>
+          </a:prstGeom>
+          <a:solidFill>
+            <a:srgbClr val="EEAA00"/>
+          </a:solidFill>
+          <a:ln w="0">
+            <a:noFill/>
+          </a:ln>
+        </p:spPr>
+      </p:sp>
+      <p:sp>
+        <p:nvSpPr>
+          <p:cNvPr id="288" name="WVU DSPIRA name"/>
+          <p:cNvSpPr>
+            <a:spLocks noGrp="1"/>
+          </p:cNvSpPr>
+          <p:nvPr/>
+        </p:nvSpPr>
+        <p:spPr>
+          <a:xfrm>
+            <a:off x="228600" y="19050"/>
+            <a:ext cx="2857500" cy="257175"/>
+          </a:xfrm>
+          <a:prstGeom prst="rect">
+            <a:avLst/>
+          </a:prstGeom>
+          <a:noFill/>
+          <a:ln w="0">
+            <a:noFill/>
+          </a:ln>
+        </p:spPr>
+        <p:txBody>
+          <a:bodyPr>
+            <a:noAutofit/>
+          </a:bodyPr>
+          <a:lstStyle/>
+          <a:p>
+            <a:pPr>
+              <a:defRPr sz="1600" b="1">
+                <a:solidFill>
+                  <a:srgbClr val="FFFFFF"/>
+                </a:solidFill>
+                <a:latin typeface="Arial"/>
+                <a:ea typeface="Arial"/>
+                <a:cs typeface="Arial"/>
+              </a:defRPr>
+            </a:pPr>
+            <a:r>
+              <a:rPr sz="1600" b="1">
+                <a:solidFill>
+                  <a:srgbClr val="FFFFFF"/>
+                </a:solidFill>
+                <a:latin typeface="Arial"/>
+                <a:ea typeface="Arial"/>
+                <a:cs typeface="Arial"/>
+              </a:rPr>
+              <a:t>WVU DSPIRA</a:t>
+            </a:r>
+          </a:p>
+        </p:txBody>
+      </p:sp>
+      <p:sp>
+        <p:nvSpPr>
+          <p:cNvPr id="289" name="WVU DSPIRA university"/>
+          <p:cNvSpPr>
+            <a:spLocks noGrp="1"/>
+          </p:cNvSpPr>
+          <p:nvPr/>
+        </p:nvSpPr>
+        <p:spPr>
+          <a:xfrm>
+            <a:off x="6286500" y="114300"/>
+            <a:ext cx="2628900" cy="171450"/>
+          </a:xfrm>
+          <a:prstGeom prst="rect">
+            <a:avLst/>
+          </a:prstGeom>
+          <a:noFill/>
+          <a:ln w="0">
+            <a:noFill/>
+          </a:ln>
+        </p:spPr>
+        <p:txBody>
+          <a:bodyPr>
+            <a:noAutofit/>
+          </a:bodyPr>
+          <a:lstStyle/>
+          <a:p>
+            <a:pPr algn="r">
+              <a:defRPr sz="900">
+                <a:solidFill>
+                  <a:srgbClr val="FFFFFF"/>
+                </a:solidFill>
+                <a:latin typeface="Arial"/>
+                <a:ea typeface="Arial"/>
+                <a:cs typeface="Arial"/>
+              </a:defRPr>
+            </a:pPr>
+            <a:r>
+              <a:rPr sz="900">
+                <a:solidFill>
+                  <a:srgbClr val="FFFFFF"/>
+                </a:solidFill>
+                <a:latin typeface="Arial"/>
+                <a:ea typeface="Arial"/>
+                <a:cs typeface="Arial"/>
+              </a:rPr>
+              <a:t>WEST VIRGINIA UNIVERSITY</a:t>
             </a:r>
           </a:p>
         </p:txBody>
@@ -24712,30 +25312,6 @@
       </p:pic>
       <p:sp>
         <p:nvSpPr>
-          <p:cNvPr id="288" name="DSPIRA 1"/>
-          <p:cNvSpPr>
-            <a:spLocks noGrp="1"/>
-          </p:cNvSpPr>
-          <p:nvPr/>
-        </p:nvSpPr>
-        <p:spPr>
-          <a:xfrm>
-            <a:off x="0" y="0"/>
-            <a:ext cx="9144000" cy="342900"/>
-          </a:xfrm>
-          <a:prstGeom prst="rect">
-            <a:avLst/>
-          </a:prstGeom>
-          <a:solidFill>
-            <a:srgbClr val="FFFFFF"/>
-          </a:solidFill>
-          <a:ln w="0">
-            <a:noFill/>
-          </a:ln>
-        </p:spPr>
-      </p:sp>
-      <p:sp>
-        <p:nvSpPr>
           <p:cNvPr id="289" name="DSPIRA 2"/>
           <p:cNvSpPr>
             <a:spLocks noGrp="1"/>
@@ -24757,57 +25333,6 @@
             <a:noFill/>
           </a:ln>
         </p:spPr>
-      </p:sp>
-      <p:sp>
-        <p:nvSpPr>
-          <p:cNvPr id="290" name="DSPIRA 3"/>
-          <p:cNvSpPr>
-            <a:spLocks noGrp="1"/>
-          </p:cNvSpPr>
-          <p:nvPr/>
-        </p:nvSpPr>
-        <p:spPr>
-          <a:xfrm>
-            <a:off x="228600" y="76200"/>
-            <a:ext cx="4762500" cy="228600"/>
-          </a:xfrm>
-          <a:prstGeom prst="rect">
-            <a:avLst/>
-          </a:prstGeom>
-          <a:noFill/>
-          <a:ln w="0">
-            <a:noFill/>
-          </a:ln>
-        </p:spPr>
-        <p:txBody>
-          <a:bodyPr>
-            <a:noAutofit/>
-          </a:bodyPr>
-          <a:lstStyle/>
-          <a:p>
-            <a:pPr>
-              <a:defRPr sz="1200" b="1">
-                <a:solidFill>
-                  <a:srgbClr val="002855"/>
-                </a:solidFill>
-                <a:latin typeface="Arial"/>
-                <a:ea typeface="Arial"/>
-                <a:cs typeface="Arial"/>
-              </a:defRPr>
-            </a:pPr>
-            <a:r>
-              <a:rPr sz="1200" b="1">
-                <a:solidFill>
-                  <a:srgbClr val="002855"/>
-                </a:solidFill>
-                <a:latin typeface="Arial"/>
-                <a:ea typeface="Arial"/>
-                <a:cs typeface="Arial"/>
-              </a:rPr>
-              <a:t>WVU DSPIRA</a:t>
-            </a:r>
-          </a:p>
-        </p:txBody>
       </p:sp>
       <p:sp>
         <p:nvSpPr>
@@ -24907,6 +25432,156 @@
                 <a:cs typeface="Arial"/>
               </a:rPr>
               <a:t>16 of 29</a:t>
+            </a:r>
+          </a:p>
+        </p:txBody>
+      </p:sp>
+      <p:sp>
+        <p:nvSpPr>
+          <p:cNvPr id="293" name="WVU DSPIRA navy band"/>
+          <p:cNvSpPr>
+            <a:spLocks noGrp="1"/>
+          </p:cNvSpPr>
+          <p:nvPr/>
+        </p:nvSpPr>
+        <p:spPr>
+          <a:xfrm>
+            <a:off x="0" y="0"/>
+            <a:ext cx="9144000" cy="323850"/>
+          </a:xfrm>
+          <a:prstGeom prst="rect">
+            <a:avLst/>
+          </a:prstGeom>
+          <a:solidFill>
+            <a:srgbClr val="002855"/>
+          </a:solidFill>
+          <a:ln w="0">
+            <a:noFill/>
+          </a:ln>
+        </p:spPr>
+      </p:sp>
+      <p:sp>
+        <p:nvSpPr>
+          <p:cNvPr id="294" name="WVU DSPIRA gold rule"/>
+          <p:cNvSpPr>
+            <a:spLocks noGrp="1"/>
+          </p:cNvSpPr>
+          <p:nvPr/>
+        </p:nvSpPr>
+        <p:spPr>
+          <a:xfrm>
+            <a:off x="0" y="323850"/>
+            <a:ext cx="9144000" cy="19050"/>
+          </a:xfrm>
+          <a:prstGeom prst="rect">
+            <a:avLst/>
+          </a:prstGeom>
+          <a:solidFill>
+            <a:srgbClr val="EEAA00"/>
+          </a:solidFill>
+          <a:ln w="0">
+            <a:noFill/>
+          </a:ln>
+        </p:spPr>
+      </p:sp>
+      <p:sp>
+        <p:nvSpPr>
+          <p:cNvPr id="295" name="WVU DSPIRA name"/>
+          <p:cNvSpPr>
+            <a:spLocks noGrp="1"/>
+          </p:cNvSpPr>
+          <p:nvPr/>
+        </p:nvSpPr>
+        <p:spPr>
+          <a:xfrm>
+            <a:off x="228600" y="19050"/>
+            <a:ext cx="2857500" cy="257175"/>
+          </a:xfrm>
+          <a:prstGeom prst="rect">
+            <a:avLst/>
+          </a:prstGeom>
+          <a:noFill/>
+          <a:ln w="0">
+            <a:noFill/>
+          </a:ln>
+        </p:spPr>
+        <p:txBody>
+          <a:bodyPr>
+            <a:noAutofit/>
+          </a:bodyPr>
+          <a:lstStyle/>
+          <a:p>
+            <a:pPr>
+              <a:defRPr sz="1600" b="1">
+                <a:solidFill>
+                  <a:srgbClr val="FFFFFF"/>
+                </a:solidFill>
+                <a:latin typeface="Arial"/>
+                <a:ea typeface="Arial"/>
+                <a:cs typeface="Arial"/>
+              </a:defRPr>
+            </a:pPr>
+            <a:r>
+              <a:rPr sz="1600" b="1">
+                <a:solidFill>
+                  <a:srgbClr val="FFFFFF"/>
+                </a:solidFill>
+                <a:latin typeface="Arial"/>
+                <a:ea typeface="Arial"/>
+                <a:cs typeface="Arial"/>
+              </a:rPr>
+              <a:t>WVU DSPIRA</a:t>
+            </a:r>
+          </a:p>
+        </p:txBody>
+      </p:sp>
+      <p:sp>
+        <p:nvSpPr>
+          <p:cNvPr id="296" name="WVU DSPIRA university"/>
+          <p:cNvSpPr>
+            <a:spLocks noGrp="1"/>
+          </p:cNvSpPr>
+          <p:nvPr/>
+        </p:nvSpPr>
+        <p:spPr>
+          <a:xfrm>
+            <a:off x="6286500" y="114300"/>
+            <a:ext cx="2628900" cy="171450"/>
+          </a:xfrm>
+          <a:prstGeom prst="rect">
+            <a:avLst/>
+          </a:prstGeom>
+          <a:noFill/>
+          <a:ln w="0">
+            <a:noFill/>
+          </a:ln>
+        </p:spPr>
+        <p:txBody>
+          <a:bodyPr>
+            <a:noAutofit/>
+          </a:bodyPr>
+          <a:lstStyle/>
+          <a:p>
+            <a:pPr algn="r">
+              <a:defRPr sz="900">
+                <a:solidFill>
+                  <a:srgbClr val="FFFFFF"/>
+                </a:solidFill>
+                <a:latin typeface="Arial"/>
+                <a:ea typeface="Arial"/>
+                <a:cs typeface="Arial"/>
+              </a:defRPr>
+            </a:pPr>
+            <a:r>
+              <a:rPr sz="900">
+                <a:solidFill>
+                  <a:srgbClr val="FFFFFF"/>
+                </a:solidFill>
+                <a:latin typeface="Arial"/>
+                <a:ea typeface="Arial"/>
+                <a:cs typeface="Arial"/>
+              </a:rPr>
+              <a:t>WEST VIRGINIA UNIVERSITY</a:t>
             </a:r>
           </a:p>
         </p:txBody>
@@ -25119,30 +25794,6 @@
       </p:sp>
       <p:sp>
         <p:nvSpPr>
-          <p:cNvPr id="295" name="DSPIRA 1"/>
-          <p:cNvSpPr>
-            <a:spLocks noGrp="1"/>
-          </p:cNvSpPr>
-          <p:nvPr/>
-        </p:nvSpPr>
-        <p:spPr>
-          <a:xfrm>
-            <a:off x="0" y="0"/>
-            <a:ext cx="9144000" cy="342900"/>
-          </a:xfrm>
-          <a:prstGeom prst="rect">
-            <a:avLst/>
-          </a:prstGeom>
-          <a:solidFill>
-            <a:srgbClr val="FFFFFF"/>
-          </a:solidFill>
-          <a:ln w="0">
-            <a:noFill/>
-          </a:ln>
-        </p:spPr>
-      </p:sp>
-      <p:sp>
-        <p:nvSpPr>
           <p:cNvPr id="296" name="DSPIRA 2"/>
           <p:cNvSpPr>
             <a:spLocks noGrp="1"/>
@@ -25164,57 +25815,6 @@
             <a:noFill/>
           </a:ln>
         </p:spPr>
-      </p:sp>
-      <p:sp>
-        <p:nvSpPr>
-          <p:cNvPr id="297" name="DSPIRA 3"/>
-          <p:cNvSpPr>
-            <a:spLocks noGrp="1"/>
-          </p:cNvSpPr>
-          <p:nvPr/>
-        </p:nvSpPr>
-        <p:spPr>
-          <a:xfrm>
-            <a:off x="228600" y="76200"/>
-            <a:ext cx="4762500" cy="228600"/>
-          </a:xfrm>
-          <a:prstGeom prst="rect">
-            <a:avLst/>
-          </a:prstGeom>
-          <a:noFill/>
-          <a:ln w="0">
-            <a:noFill/>
-          </a:ln>
-        </p:spPr>
-        <p:txBody>
-          <a:bodyPr>
-            <a:noAutofit/>
-          </a:bodyPr>
-          <a:lstStyle/>
-          <a:p>
-            <a:pPr>
-              <a:defRPr sz="1200" b="1">
-                <a:solidFill>
-                  <a:srgbClr val="002855"/>
-                </a:solidFill>
-                <a:latin typeface="Arial"/>
-                <a:ea typeface="Arial"/>
-                <a:cs typeface="Arial"/>
-              </a:defRPr>
-            </a:pPr>
-            <a:r>
-              <a:rPr sz="1200" b="1">
-                <a:solidFill>
-                  <a:srgbClr val="002855"/>
-                </a:solidFill>
-                <a:latin typeface="Arial"/>
-                <a:ea typeface="Arial"/>
-                <a:cs typeface="Arial"/>
-              </a:rPr>
-              <a:t>WVU DSPIRA</a:t>
-            </a:r>
-          </a:p>
-        </p:txBody>
       </p:sp>
       <p:sp>
         <p:nvSpPr>
@@ -25314,6 +25914,156 @@
                 <a:cs typeface="Arial"/>
               </a:rPr>
               <a:t>17 of 29</a:t>
+            </a:r>
+          </a:p>
+        </p:txBody>
+      </p:sp>
+      <p:sp>
+        <p:nvSpPr>
+          <p:cNvPr id="300" name="WVU DSPIRA navy band"/>
+          <p:cNvSpPr>
+            <a:spLocks noGrp="1"/>
+          </p:cNvSpPr>
+          <p:nvPr/>
+        </p:nvSpPr>
+        <p:spPr>
+          <a:xfrm>
+            <a:off x="0" y="0"/>
+            <a:ext cx="9144000" cy="323850"/>
+          </a:xfrm>
+          <a:prstGeom prst="rect">
+            <a:avLst/>
+          </a:prstGeom>
+          <a:solidFill>
+            <a:srgbClr val="002855"/>
+          </a:solidFill>
+          <a:ln w="0">
+            <a:noFill/>
+          </a:ln>
+        </p:spPr>
+      </p:sp>
+      <p:sp>
+        <p:nvSpPr>
+          <p:cNvPr id="301" name="WVU DSPIRA gold rule"/>
+          <p:cNvSpPr>
+            <a:spLocks noGrp="1"/>
+          </p:cNvSpPr>
+          <p:nvPr/>
+        </p:nvSpPr>
+        <p:spPr>
+          <a:xfrm>
+            <a:off x="0" y="323850"/>
+            <a:ext cx="9144000" cy="19050"/>
+          </a:xfrm>
+          <a:prstGeom prst="rect">
+            <a:avLst/>
+          </a:prstGeom>
+          <a:solidFill>
+            <a:srgbClr val="EEAA00"/>
+          </a:solidFill>
+          <a:ln w="0">
+            <a:noFill/>
+          </a:ln>
+        </p:spPr>
+      </p:sp>
+      <p:sp>
+        <p:nvSpPr>
+          <p:cNvPr id="302" name="WVU DSPIRA name"/>
+          <p:cNvSpPr>
+            <a:spLocks noGrp="1"/>
+          </p:cNvSpPr>
+          <p:nvPr/>
+        </p:nvSpPr>
+        <p:spPr>
+          <a:xfrm>
+            <a:off x="228600" y="19050"/>
+            <a:ext cx="2857500" cy="257175"/>
+          </a:xfrm>
+          <a:prstGeom prst="rect">
+            <a:avLst/>
+          </a:prstGeom>
+          <a:noFill/>
+          <a:ln w="0">
+            <a:noFill/>
+          </a:ln>
+        </p:spPr>
+        <p:txBody>
+          <a:bodyPr>
+            <a:noAutofit/>
+          </a:bodyPr>
+          <a:lstStyle/>
+          <a:p>
+            <a:pPr>
+              <a:defRPr sz="1600" b="1">
+                <a:solidFill>
+                  <a:srgbClr val="FFFFFF"/>
+                </a:solidFill>
+                <a:latin typeface="Arial"/>
+                <a:ea typeface="Arial"/>
+                <a:cs typeface="Arial"/>
+              </a:defRPr>
+            </a:pPr>
+            <a:r>
+              <a:rPr sz="1600" b="1">
+                <a:solidFill>
+                  <a:srgbClr val="FFFFFF"/>
+                </a:solidFill>
+                <a:latin typeface="Arial"/>
+                <a:ea typeface="Arial"/>
+                <a:cs typeface="Arial"/>
+              </a:rPr>
+              <a:t>WVU DSPIRA</a:t>
+            </a:r>
+          </a:p>
+        </p:txBody>
+      </p:sp>
+      <p:sp>
+        <p:nvSpPr>
+          <p:cNvPr id="303" name="WVU DSPIRA university"/>
+          <p:cNvSpPr>
+            <a:spLocks noGrp="1"/>
+          </p:cNvSpPr>
+          <p:nvPr/>
+        </p:nvSpPr>
+        <p:spPr>
+          <a:xfrm>
+            <a:off x="6286500" y="114300"/>
+            <a:ext cx="2628900" cy="171450"/>
+          </a:xfrm>
+          <a:prstGeom prst="rect">
+            <a:avLst/>
+          </a:prstGeom>
+          <a:noFill/>
+          <a:ln w="0">
+            <a:noFill/>
+          </a:ln>
+        </p:spPr>
+        <p:txBody>
+          <a:bodyPr>
+            <a:noAutofit/>
+          </a:bodyPr>
+          <a:lstStyle/>
+          <a:p>
+            <a:pPr algn="r">
+              <a:defRPr sz="900">
+                <a:solidFill>
+                  <a:srgbClr val="FFFFFF"/>
+                </a:solidFill>
+                <a:latin typeface="Arial"/>
+                <a:ea typeface="Arial"/>
+                <a:cs typeface="Arial"/>
+              </a:defRPr>
+            </a:pPr>
+            <a:r>
+              <a:rPr sz="900">
+                <a:solidFill>
+                  <a:srgbClr val="FFFFFF"/>
+                </a:solidFill>
+                <a:latin typeface="Arial"/>
+                <a:ea typeface="Arial"/>
+                <a:cs typeface="Arial"/>
+              </a:rPr>
+              <a:t>WEST VIRGINIA UNIVERSITY</a:t>
             </a:r>
           </a:p>
         </p:txBody>
@@ -25753,30 +26503,6 @@
       </p:sp>
       <p:sp>
         <p:nvSpPr>
-          <p:cNvPr id="306" name="DSPIRA 1"/>
-          <p:cNvSpPr>
-            <a:spLocks noGrp="1"/>
-          </p:cNvSpPr>
-          <p:nvPr/>
-        </p:nvSpPr>
-        <p:spPr>
-          <a:xfrm>
-            <a:off x="0" y="0"/>
-            <a:ext cx="9144000" cy="342900"/>
-          </a:xfrm>
-          <a:prstGeom prst="rect">
-            <a:avLst/>
-          </a:prstGeom>
-          <a:solidFill>
-            <a:srgbClr val="FFFFFF"/>
-          </a:solidFill>
-          <a:ln w="0">
-            <a:noFill/>
-          </a:ln>
-        </p:spPr>
-      </p:sp>
-      <p:sp>
-        <p:nvSpPr>
           <p:cNvPr id="307" name="DSPIRA 2"/>
           <p:cNvSpPr>
             <a:spLocks noGrp="1"/>
@@ -25798,57 +26524,6 @@
             <a:noFill/>
           </a:ln>
         </p:spPr>
-      </p:sp>
-      <p:sp>
-        <p:nvSpPr>
-          <p:cNvPr id="308" name="DSPIRA 3"/>
-          <p:cNvSpPr>
-            <a:spLocks noGrp="1"/>
-          </p:cNvSpPr>
-          <p:nvPr/>
-        </p:nvSpPr>
-        <p:spPr>
-          <a:xfrm>
-            <a:off x="228600" y="76200"/>
-            <a:ext cx="4762500" cy="228600"/>
-          </a:xfrm>
-          <a:prstGeom prst="rect">
-            <a:avLst/>
-          </a:prstGeom>
-          <a:noFill/>
-          <a:ln w="0">
-            <a:noFill/>
-          </a:ln>
-        </p:spPr>
-        <p:txBody>
-          <a:bodyPr>
-            <a:noAutofit/>
-          </a:bodyPr>
-          <a:lstStyle/>
-          <a:p>
-            <a:pPr>
-              <a:defRPr sz="1200" b="1">
-                <a:solidFill>
-                  <a:srgbClr val="002855"/>
-                </a:solidFill>
-                <a:latin typeface="Arial"/>
-                <a:ea typeface="Arial"/>
-                <a:cs typeface="Arial"/>
-              </a:defRPr>
-            </a:pPr>
-            <a:r>
-              <a:rPr sz="1200" b="1">
-                <a:solidFill>
-                  <a:srgbClr val="002855"/>
-                </a:solidFill>
-                <a:latin typeface="Arial"/>
-                <a:ea typeface="Arial"/>
-                <a:cs typeface="Arial"/>
-              </a:rPr>
-              <a:t>WVU DSPIRA</a:t>
-            </a:r>
-          </a:p>
-        </p:txBody>
       </p:sp>
       <p:sp>
         <p:nvSpPr>
@@ -25948,6 +26623,156 @@
                 <a:cs typeface="Arial"/>
               </a:rPr>
               <a:t>Supplemental</a:t>
+            </a:r>
+          </a:p>
+        </p:txBody>
+      </p:sp>
+      <p:sp>
+        <p:nvSpPr>
+          <p:cNvPr id="311" name="WVU DSPIRA navy band"/>
+          <p:cNvSpPr>
+            <a:spLocks noGrp="1"/>
+          </p:cNvSpPr>
+          <p:nvPr/>
+        </p:nvSpPr>
+        <p:spPr>
+          <a:xfrm>
+            <a:off x="0" y="0"/>
+            <a:ext cx="9144000" cy="323850"/>
+          </a:xfrm>
+          <a:prstGeom prst="rect">
+            <a:avLst/>
+          </a:prstGeom>
+          <a:solidFill>
+            <a:srgbClr val="002855"/>
+          </a:solidFill>
+          <a:ln w="0">
+            <a:noFill/>
+          </a:ln>
+        </p:spPr>
+      </p:sp>
+      <p:sp>
+        <p:nvSpPr>
+          <p:cNvPr id="312" name="WVU DSPIRA gold rule"/>
+          <p:cNvSpPr>
+            <a:spLocks noGrp="1"/>
+          </p:cNvSpPr>
+          <p:nvPr/>
+        </p:nvSpPr>
+        <p:spPr>
+          <a:xfrm>
+            <a:off x="0" y="323850"/>
+            <a:ext cx="9144000" cy="19050"/>
+          </a:xfrm>
+          <a:prstGeom prst="rect">
+            <a:avLst/>
+          </a:prstGeom>
+          <a:solidFill>
+            <a:srgbClr val="EEAA00"/>
+          </a:solidFill>
+          <a:ln w="0">
+            <a:noFill/>
+          </a:ln>
+        </p:spPr>
+      </p:sp>
+      <p:sp>
+        <p:nvSpPr>
+          <p:cNvPr id="313" name="WVU DSPIRA name"/>
+          <p:cNvSpPr>
+            <a:spLocks noGrp="1"/>
+          </p:cNvSpPr>
+          <p:nvPr/>
+        </p:nvSpPr>
+        <p:spPr>
+          <a:xfrm>
+            <a:off x="228600" y="19050"/>
+            <a:ext cx="2857500" cy="257175"/>
+          </a:xfrm>
+          <a:prstGeom prst="rect">
+            <a:avLst/>
+          </a:prstGeom>
+          <a:noFill/>
+          <a:ln w="0">
+            <a:noFill/>
+          </a:ln>
+        </p:spPr>
+        <p:txBody>
+          <a:bodyPr>
+            <a:noAutofit/>
+          </a:bodyPr>
+          <a:lstStyle/>
+          <a:p>
+            <a:pPr>
+              <a:defRPr sz="1600" b="1">
+                <a:solidFill>
+                  <a:srgbClr val="FFFFFF"/>
+                </a:solidFill>
+                <a:latin typeface="Arial"/>
+                <a:ea typeface="Arial"/>
+                <a:cs typeface="Arial"/>
+              </a:defRPr>
+            </a:pPr>
+            <a:r>
+              <a:rPr sz="1600" b="1">
+                <a:solidFill>
+                  <a:srgbClr val="FFFFFF"/>
+                </a:solidFill>
+                <a:latin typeface="Arial"/>
+                <a:ea typeface="Arial"/>
+                <a:cs typeface="Arial"/>
+              </a:rPr>
+              <a:t>WVU DSPIRA</a:t>
+            </a:r>
+          </a:p>
+        </p:txBody>
+      </p:sp>
+      <p:sp>
+        <p:nvSpPr>
+          <p:cNvPr id="314" name="WVU DSPIRA university"/>
+          <p:cNvSpPr>
+            <a:spLocks noGrp="1"/>
+          </p:cNvSpPr>
+          <p:nvPr/>
+        </p:nvSpPr>
+        <p:spPr>
+          <a:xfrm>
+            <a:off x="6286500" y="114300"/>
+            <a:ext cx="2628900" cy="171450"/>
+          </a:xfrm>
+          <a:prstGeom prst="rect">
+            <a:avLst/>
+          </a:prstGeom>
+          <a:noFill/>
+          <a:ln w="0">
+            <a:noFill/>
+          </a:ln>
+        </p:spPr>
+        <p:txBody>
+          <a:bodyPr>
+            <a:noAutofit/>
+          </a:bodyPr>
+          <a:lstStyle/>
+          <a:p>
+            <a:pPr algn="r">
+              <a:defRPr sz="900">
+                <a:solidFill>
+                  <a:srgbClr val="FFFFFF"/>
+                </a:solidFill>
+                <a:latin typeface="Arial"/>
+                <a:ea typeface="Arial"/>
+                <a:cs typeface="Arial"/>
+              </a:defRPr>
+            </a:pPr>
+            <a:r>
+              <a:rPr sz="900">
+                <a:solidFill>
+                  <a:srgbClr val="FFFFFF"/>
+                </a:solidFill>
+                <a:latin typeface="Arial"/>
+                <a:ea typeface="Arial"/>
+                <a:cs typeface="Arial"/>
+              </a:rPr>
+              <a:t>WEST VIRGINIA UNIVERSITY</a:t>
             </a:r>
           </a:p>
         </p:txBody>
@@ -26531,30 +27356,6 @@
       </p:sp>
       <p:sp>
         <p:nvSpPr>
-          <p:cNvPr id="179" name="DSPIRA 1"/>
-          <p:cNvSpPr>
-            <a:spLocks noGrp="1"/>
-          </p:cNvSpPr>
-          <p:nvPr/>
-        </p:nvSpPr>
-        <p:spPr>
-          <a:xfrm>
-            <a:off x="0" y="0"/>
-            <a:ext cx="9144000" cy="342900"/>
-          </a:xfrm>
-          <a:prstGeom prst="rect">
-            <a:avLst/>
-          </a:prstGeom>
-          <a:solidFill>
-            <a:srgbClr val="FFFFFF"/>
-          </a:solidFill>
-          <a:ln w="0">
-            <a:noFill/>
-          </a:ln>
-        </p:spPr>
-      </p:sp>
-      <p:sp>
-        <p:nvSpPr>
           <p:cNvPr id="180" name="DSPIRA 2"/>
           <p:cNvSpPr>
             <a:spLocks noGrp="1"/>
@@ -26576,57 +27377,6 @@
             <a:noFill/>
           </a:ln>
         </p:spPr>
-      </p:sp>
-      <p:sp>
-        <p:nvSpPr>
-          <p:cNvPr id="181" name="DSPIRA 3"/>
-          <p:cNvSpPr>
-            <a:spLocks noGrp="1"/>
-          </p:cNvSpPr>
-          <p:nvPr/>
-        </p:nvSpPr>
-        <p:spPr>
-          <a:xfrm>
-            <a:off x="228600" y="76200"/>
-            <a:ext cx="4762500" cy="228600"/>
-          </a:xfrm>
-          <a:prstGeom prst="rect">
-            <a:avLst/>
-          </a:prstGeom>
-          <a:noFill/>
-          <a:ln w="0">
-            <a:noFill/>
-          </a:ln>
-        </p:spPr>
-        <p:txBody>
-          <a:bodyPr>
-            <a:noAutofit/>
-          </a:bodyPr>
-          <a:lstStyle/>
-          <a:p>
-            <a:pPr>
-              <a:defRPr sz="1200" b="1">
-                <a:solidFill>
-                  <a:srgbClr val="002855"/>
-                </a:solidFill>
-                <a:latin typeface="Arial"/>
-                <a:ea typeface="Arial"/>
-                <a:cs typeface="Arial"/>
-              </a:defRPr>
-            </a:pPr>
-            <a:r>
-              <a:rPr sz="1200" b="1">
-                <a:solidFill>
-                  <a:srgbClr val="002855"/>
-                </a:solidFill>
-                <a:latin typeface="Arial"/>
-                <a:ea typeface="Arial"/>
-                <a:cs typeface="Arial"/>
-              </a:rPr>
-              <a:t>WVU DSPIRA</a:t>
-            </a:r>
-          </a:p>
-        </p:txBody>
       </p:sp>
       <p:sp>
         <p:nvSpPr>
@@ -26726,6 +27476,156 @@
                 <a:cs typeface="Arial"/>
               </a:rPr>
               <a:t>2 of 29</a:t>
+            </a:r>
+          </a:p>
+        </p:txBody>
+      </p:sp>
+      <p:sp>
+        <p:nvSpPr>
+          <p:cNvPr id="184" name="WVU DSPIRA navy band"/>
+          <p:cNvSpPr>
+            <a:spLocks noGrp="1"/>
+          </p:cNvSpPr>
+          <p:nvPr/>
+        </p:nvSpPr>
+        <p:spPr>
+          <a:xfrm>
+            <a:off x="0" y="0"/>
+            <a:ext cx="9144000" cy="323850"/>
+          </a:xfrm>
+          <a:prstGeom prst="rect">
+            <a:avLst/>
+          </a:prstGeom>
+          <a:solidFill>
+            <a:srgbClr val="002855"/>
+          </a:solidFill>
+          <a:ln w="0">
+            <a:noFill/>
+          </a:ln>
+        </p:spPr>
+      </p:sp>
+      <p:sp>
+        <p:nvSpPr>
+          <p:cNvPr id="185" name="WVU DSPIRA gold rule"/>
+          <p:cNvSpPr>
+            <a:spLocks noGrp="1"/>
+          </p:cNvSpPr>
+          <p:nvPr/>
+        </p:nvSpPr>
+        <p:spPr>
+          <a:xfrm>
+            <a:off x="0" y="323850"/>
+            <a:ext cx="9144000" cy="19050"/>
+          </a:xfrm>
+          <a:prstGeom prst="rect">
+            <a:avLst/>
+          </a:prstGeom>
+          <a:solidFill>
+            <a:srgbClr val="EEAA00"/>
+          </a:solidFill>
+          <a:ln w="0">
+            <a:noFill/>
+          </a:ln>
+        </p:spPr>
+      </p:sp>
+      <p:sp>
+        <p:nvSpPr>
+          <p:cNvPr id="186" name="WVU DSPIRA name"/>
+          <p:cNvSpPr>
+            <a:spLocks noGrp="1"/>
+          </p:cNvSpPr>
+          <p:nvPr/>
+        </p:nvSpPr>
+        <p:spPr>
+          <a:xfrm>
+            <a:off x="228600" y="19050"/>
+            <a:ext cx="2857500" cy="257175"/>
+          </a:xfrm>
+          <a:prstGeom prst="rect">
+            <a:avLst/>
+          </a:prstGeom>
+          <a:noFill/>
+          <a:ln w="0">
+            <a:noFill/>
+          </a:ln>
+        </p:spPr>
+        <p:txBody>
+          <a:bodyPr>
+            <a:noAutofit/>
+          </a:bodyPr>
+          <a:lstStyle/>
+          <a:p>
+            <a:pPr>
+              <a:defRPr sz="1600" b="1">
+                <a:solidFill>
+                  <a:srgbClr val="FFFFFF"/>
+                </a:solidFill>
+                <a:latin typeface="Arial"/>
+                <a:ea typeface="Arial"/>
+                <a:cs typeface="Arial"/>
+              </a:defRPr>
+            </a:pPr>
+            <a:r>
+              <a:rPr sz="1600" b="1">
+                <a:solidFill>
+                  <a:srgbClr val="FFFFFF"/>
+                </a:solidFill>
+                <a:latin typeface="Arial"/>
+                <a:ea typeface="Arial"/>
+                <a:cs typeface="Arial"/>
+              </a:rPr>
+              <a:t>WVU DSPIRA</a:t>
+            </a:r>
+          </a:p>
+        </p:txBody>
+      </p:sp>
+      <p:sp>
+        <p:nvSpPr>
+          <p:cNvPr id="187" name="WVU DSPIRA university"/>
+          <p:cNvSpPr>
+            <a:spLocks noGrp="1"/>
+          </p:cNvSpPr>
+          <p:nvPr/>
+        </p:nvSpPr>
+        <p:spPr>
+          <a:xfrm>
+            <a:off x="6286500" y="114300"/>
+            <a:ext cx="2628900" cy="171450"/>
+          </a:xfrm>
+          <a:prstGeom prst="rect">
+            <a:avLst/>
+          </a:prstGeom>
+          <a:noFill/>
+          <a:ln w="0">
+            <a:noFill/>
+          </a:ln>
+        </p:spPr>
+        <p:txBody>
+          <a:bodyPr>
+            <a:noAutofit/>
+          </a:bodyPr>
+          <a:lstStyle/>
+          <a:p>
+            <a:pPr algn="r">
+              <a:defRPr sz="900">
+                <a:solidFill>
+                  <a:srgbClr val="FFFFFF"/>
+                </a:solidFill>
+                <a:latin typeface="Arial"/>
+                <a:ea typeface="Arial"/>
+                <a:cs typeface="Arial"/>
+              </a:defRPr>
+            </a:pPr>
+            <a:r>
+              <a:rPr sz="900">
+                <a:solidFill>
+                  <a:srgbClr val="FFFFFF"/>
+                </a:solidFill>
+                <a:latin typeface="Arial"/>
+                <a:ea typeface="Arial"/>
+                <a:cs typeface="Arial"/>
+              </a:rPr>
+              <a:t>WEST VIRGINIA UNIVERSITY</a:t>
             </a:r>
           </a:p>
         </p:txBody>
@@ -26950,30 +27850,6 @@
       </p:sp>
       <p:sp>
         <p:nvSpPr>
-          <p:cNvPr id="312" name="DSPIRA 1"/>
-          <p:cNvSpPr>
-            <a:spLocks noGrp="1"/>
-          </p:cNvSpPr>
-          <p:nvPr/>
-        </p:nvSpPr>
-        <p:spPr>
-          <a:xfrm>
-            <a:off x="0" y="0"/>
-            <a:ext cx="9144000" cy="342900"/>
-          </a:xfrm>
-          <a:prstGeom prst="rect">
-            <a:avLst/>
-          </a:prstGeom>
-          <a:solidFill>
-            <a:srgbClr val="FFFFFF"/>
-          </a:solidFill>
-          <a:ln w="0">
-            <a:noFill/>
-          </a:ln>
-        </p:spPr>
-      </p:sp>
-      <p:sp>
-        <p:nvSpPr>
           <p:cNvPr id="313" name="DSPIRA 2"/>
           <p:cNvSpPr>
             <a:spLocks noGrp="1"/>
@@ -26995,57 +27871,6 @@
             <a:noFill/>
           </a:ln>
         </p:spPr>
-      </p:sp>
-      <p:sp>
-        <p:nvSpPr>
-          <p:cNvPr id="314" name="DSPIRA 3"/>
-          <p:cNvSpPr>
-            <a:spLocks noGrp="1"/>
-          </p:cNvSpPr>
-          <p:nvPr/>
-        </p:nvSpPr>
-        <p:spPr>
-          <a:xfrm>
-            <a:off x="228600" y="76200"/>
-            <a:ext cx="4762500" cy="228600"/>
-          </a:xfrm>
-          <a:prstGeom prst="rect">
-            <a:avLst/>
-          </a:prstGeom>
-          <a:noFill/>
-          <a:ln w="0">
-            <a:noFill/>
-          </a:ln>
-        </p:spPr>
-        <p:txBody>
-          <a:bodyPr>
-            <a:noAutofit/>
-          </a:bodyPr>
-          <a:lstStyle/>
-          <a:p>
-            <a:pPr>
-              <a:defRPr sz="1200" b="1">
-                <a:solidFill>
-                  <a:srgbClr val="002855"/>
-                </a:solidFill>
-                <a:latin typeface="Arial"/>
-                <a:ea typeface="Arial"/>
-                <a:cs typeface="Arial"/>
-              </a:defRPr>
-            </a:pPr>
-            <a:r>
-              <a:rPr sz="1200" b="1">
-                <a:solidFill>
-                  <a:srgbClr val="002855"/>
-                </a:solidFill>
-                <a:latin typeface="Arial"/>
-                <a:ea typeface="Arial"/>
-                <a:cs typeface="Arial"/>
-              </a:rPr>
-              <a:t>WVU DSPIRA</a:t>
-            </a:r>
-          </a:p>
-        </p:txBody>
       </p:sp>
       <p:sp>
         <p:nvSpPr>
@@ -27145,6 +27970,156 @@
                 <a:cs typeface="Arial"/>
               </a:rPr>
               <a:t>18 of 29</a:t>
+            </a:r>
+          </a:p>
+        </p:txBody>
+      </p:sp>
+      <p:sp>
+        <p:nvSpPr>
+          <p:cNvPr id="317" name="WVU DSPIRA navy band"/>
+          <p:cNvSpPr>
+            <a:spLocks noGrp="1"/>
+          </p:cNvSpPr>
+          <p:nvPr/>
+        </p:nvSpPr>
+        <p:spPr>
+          <a:xfrm>
+            <a:off x="0" y="0"/>
+            <a:ext cx="9144000" cy="323850"/>
+          </a:xfrm>
+          <a:prstGeom prst="rect">
+            <a:avLst/>
+          </a:prstGeom>
+          <a:solidFill>
+            <a:srgbClr val="002855"/>
+          </a:solidFill>
+          <a:ln w="0">
+            <a:noFill/>
+          </a:ln>
+        </p:spPr>
+      </p:sp>
+      <p:sp>
+        <p:nvSpPr>
+          <p:cNvPr id="318" name="WVU DSPIRA gold rule"/>
+          <p:cNvSpPr>
+            <a:spLocks noGrp="1"/>
+          </p:cNvSpPr>
+          <p:nvPr/>
+        </p:nvSpPr>
+        <p:spPr>
+          <a:xfrm>
+            <a:off x="0" y="323850"/>
+            <a:ext cx="9144000" cy="19050"/>
+          </a:xfrm>
+          <a:prstGeom prst="rect">
+            <a:avLst/>
+          </a:prstGeom>
+          <a:solidFill>
+            <a:srgbClr val="EEAA00"/>
+          </a:solidFill>
+          <a:ln w="0">
+            <a:noFill/>
+          </a:ln>
+        </p:spPr>
+      </p:sp>
+      <p:sp>
+        <p:nvSpPr>
+          <p:cNvPr id="319" name="WVU DSPIRA name"/>
+          <p:cNvSpPr>
+            <a:spLocks noGrp="1"/>
+          </p:cNvSpPr>
+          <p:nvPr/>
+        </p:nvSpPr>
+        <p:spPr>
+          <a:xfrm>
+            <a:off x="228600" y="19050"/>
+            <a:ext cx="2857500" cy="257175"/>
+          </a:xfrm>
+          <a:prstGeom prst="rect">
+            <a:avLst/>
+          </a:prstGeom>
+          <a:noFill/>
+          <a:ln w="0">
+            <a:noFill/>
+          </a:ln>
+        </p:spPr>
+        <p:txBody>
+          <a:bodyPr>
+            <a:noAutofit/>
+          </a:bodyPr>
+          <a:lstStyle/>
+          <a:p>
+            <a:pPr>
+              <a:defRPr sz="1600" b="1">
+                <a:solidFill>
+                  <a:srgbClr val="FFFFFF"/>
+                </a:solidFill>
+                <a:latin typeface="Arial"/>
+                <a:ea typeface="Arial"/>
+                <a:cs typeface="Arial"/>
+              </a:defRPr>
+            </a:pPr>
+            <a:r>
+              <a:rPr sz="1600" b="1">
+                <a:solidFill>
+                  <a:srgbClr val="FFFFFF"/>
+                </a:solidFill>
+                <a:latin typeface="Arial"/>
+                <a:ea typeface="Arial"/>
+                <a:cs typeface="Arial"/>
+              </a:rPr>
+              <a:t>WVU DSPIRA</a:t>
+            </a:r>
+          </a:p>
+        </p:txBody>
+      </p:sp>
+      <p:sp>
+        <p:nvSpPr>
+          <p:cNvPr id="320" name="WVU DSPIRA university"/>
+          <p:cNvSpPr>
+            <a:spLocks noGrp="1"/>
+          </p:cNvSpPr>
+          <p:nvPr/>
+        </p:nvSpPr>
+        <p:spPr>
+          <a:xfrm>
+            <a:off x="6286500" y="114300"/>
+            <a:ext cx="2628900" cy="171450"/>
+          </a:xfrm>
+          <a:prstGeom prst="rect">
+            <a:avLst/>
+          </a:prstGeom>
+          <a:noFill/>
+          <a:ln w="0">
+            <a:noFill/>
+          </a:ln>
+        </p:spPr>
+        <p:txBody>
+          <a:bodyPr>
+            <a:noAutofit/>
+          </a:bodyPr>
+          <a:lstStyle/>
+          <a:p>
+            <a:pPr algn="r">
+              <a:defRPr sz="900">
+                <a:solidFill>
+                  <a:srgbClr val="FFFFFF"/>
+                </a:solidFill>
+                <a:latin typeface="Arial"/>
+                <a:ea typeface="Arial"/>
+                <a:cs typeface="Arial"/>
+              </a:defRPr>
+            </a:pPr>
+            <a:r>
+              <a:rPr sz="900">
+                <a:solidFill>
+                  <a:srgbClr val="FFFFFF"/>
+                </a:solidFill>
+                <a:latin typeface="Arial"/>
+                <a:ea typeface="Arial"/>
+                <a:cs typeface="Arial"/>
+              </a:rPr>
+              <a:t>WEST VIRGINIA UNIVERSITY</a:t>
             </a:r>
           </a:p>
         </p:txBody>
@@ -27412,30 +28387,6 @@
       </p:sp>
       <p:sp>
         <p:nvSpPr>
-          <p:cNvPr id="319" name="DSPIRA 1"/>
-          <p:cNvSpPr>
-            <a:spLocks noGrp="1"/>
-          </p:cNvSpPr>
-          <p:nvPr/>
-        </p:nvSpPr>
-        <p:spPr>
-          <a:xfrm>
-            <a:off x="0" y="0"/>
-            <a:ext cx="9144000" cy="342900"/>
-          </a:xfrm>
-          <a:prstGeom prst="rect">
-            <a:avLst/>
-          </a:prstGeom>
-          <a:solidFill>
-            <a:srgbClr val="FFFFFF"/>
-          </a:solidFill>
-          <a:ln w="0">
-            <a:noFill/>
-          </a:ln>
-        </p:spPr>
-      </p:sp>
-      <p:sp>
-        <p:nvSpPr>
           <p:cNvPr id="320" name="DSPIRA 2"/>
           <p:cNvSpPr>
             <a:spLocks noGrp="1"/>
@@ -27457,57 +28408,6 @@
             <a:noFill/>
           </a:ln>
         </p:spPr>
-      </p:sp>
-      <p:sp>
-        <p:nvSpPr>
-          <p:cNvPr id="321" name="DSPIRA 3"/>
-          <p:cNvSpPr>
-            <a:spLocks noGrp="1"/>
-          </p:cNvSpPr>
-          <p:nvPr/>
-        </p:nvSpPr>
-        <p:spPr>
-          <a:xfrm>
-            <a:off x="228600" y="76200"/>
-            <a:ext cx="4762500" cy="228600"/>
-          </a:xfrm>
-          <a:prstGeom prst="rect">
-            <a:avLst/>
-          </a:prstGeom>
-          <a:noFill/>
-          <a:ln w="0">
-            <a:noFill/>
-          </a:ln>
-        </p:spPr>
-        <p:txBody>
-          <a:bodyPr>
-            <a:noAutofit/>
-          </a:bodyPr>
-          <a:lstStyle/>
-          <a:p>
-            <a:pPr>
-              <a:defRPr sz="1200" b="1">
-                <a:solidFill>
-                  <a:srgbClr val="002855"/>
-                </a:solidFill>
-                <a:latin typeface="Arial"/>
-                <a:ea typeface="Arial"/>
-                <a:cs typeface="Arial"/>
-              </a:defRPr>
-            </a:pPr>
-            <a:r>
-              <a:rPr sz="1200" b="1">
-                <a:solidFill>
-                  <a:srgbClr val="002855"/>
-                </a:solidFill>
-                <a:latin typeface="Arial"/>
-                <a:ea typeface="Arial"/>
-                <a:cs typeface="Arial"/>
-              </a:rPr>
-              <a:t>WVU DSPIRA</a:t>
-            </a:r>
-          </a:p>
-        </p:txBody>
       </p:sp>
       <p:sp>
         <p:nvSpPr>
@@ -27607,6 +28507,156 @@
                 <a:cs typeface="Arial"/>
               </a:rPr>
               <a:t>19 of 29</a:t>
+            </a:r>
+          </a:p>
+        </p:txBody>
+      </p:sp>
+      <p:sp>
+        <p:nvSpPr>
+          <p:cNvPr id="324" name="WVU DSPIRA navy band"/>
+          <p:cNvSpPr>
+            <a:spLocks noGrp="1"/>
+          </p:cNvSpPr>
+          <p:nvPr/>
+        </p:nvSpPr>
+        <p:spPr>
+          <a:xfrm>
+            <a:off x="0" y="0"/>
+            <a:ext cx="9144000" cy="323850"/>
+          </a:xfrm>
+          <a:prstGeom prst="rect">
+            <a:avLst/>
+          </a:prstGeom>
+          <a:solidFill>
+            <a:srgbClr val="002855"/>
+          </a:solidFill>
+          <a:ln w="0">
+            <a:noFill/>
+          </a:ln>
+        </p:spPr>
+      </p:sp>
+      <p:sp>
+        <p:nvSpPr>
+          <p:cNvPr id="325" name="WVU DSPIRA gold rule"/>
+          <p:cNvSpPr>
+            <a:spLocks noGrp="1"/>
+          </p:cNvSpPr>
+          <p:nvPr/>
+        </p:nvSpPr>
+        <p:spPr>
+          <a:xfrm>
+            <a:off x="0" y="323850"/>
+            <a:ext cx="9144000" cy="19050"/>
+          </a:xfrm>
+          <a:prstGeom prst="rect">
+            <a:avLst/>
+          </a:prstGeom>
+          <a:solidFill>
+            <a:srgbClr val="EEAA00"/>
+          </a:solidFill>
+          <a:ln w="0">
+            <a:noFill/>
+          </a:ln>
+        </p:spPr>
+      </p:sp>
+      <p:sp>
+        <p:nvSpPr>
+          <p:cNvPr id="326" name="WVU DSPIRA name"/>
+          <p:cNvSpPr>
+            <a:spLocks noGrp="1"/>
+          </p:cNvSpPr>
+          <p:nvPr/>
+        </p:nvSpPr>
+        <p:spPr>
+          <a:xfrm>
+            <a:off x="228600" y="19050"/>
+            <a:ext cx="2857500" cy="257175"/>
+          </a:xfrm>
+          <a:prstGeom prst="rect">
+            <a:avLst/>
+          </a:prstGeom>
+          <a:noFill/>
+          <a:ln w="0">
+            <a:noFill/>
+          </a:ln>
+        </p:spPr>
+        <p:txBody>
+          <a:bodyPr>
+            <a:noAutofit/>
+          </a:bodyPr>
+          <a:lstStyle/>
+          <a:p>
+            <a:pPr>
+              <a:defRPr sz="1600" b="1">
+                <a:solidFill>
+                  <a:srgbClr val="FFFFFF"/>
+                </a:solidFill>
+                <a:latin typeface="Arial"/>
+                <a:ea typeface="Arial"/>
+                <a:cs typeface="Arial"/>
+              </a:defRPr>
+            </a:pPr>
+            <a:r>
+              <a:rPr sz="1600" b="1">
+                <a:solidFill>
+                  <a:srgbClr val="FFFFFF"/>
+                </a:solidFill>
+                <a:latin typeface="Arial"/>
+                <a:ea typeface="Arial"/>
+                <a:cs typeface="Arial"/>
+              </a:rPr>
+              <a:t>WVU DSPIRA</a:t>
+            </a:r>
+          </a:p>
+        </p:txBody>
+      </p:sp>
+      <p:sp>
+        <p:nvSpPr>
+          <p:cNvPr id="327" name="WVU DSPIRA university"/>
+          <p:cNvSpPr>
+            <a:spLocks noGrp="1"/>
+          </p:cNvSpPr>
+          <p:nvPr/>
+        </p:nvSpPr>
+        <p:spPr>
+          <a:xfrm>
+            <a:off x="6286500" y="114300"/>
+            <a:ext cx="2628900" cy="171450"/>
+          </a:xfrm>
+          <a:prstGeom prst="rect">
+            <a:avLst/>
+          </a:prstGeom>
+          <a:noFill/>
+          <a:ln w="0">
+            <a:noFill/>
+          </a:ln>
+        </p:spPr>
+        <p:txBody>
+          <a:bodyPr>
+            <a:noAutofit/>
+          </a:bodyPr>
+          <a:lstStyle/>
+          <a:p>
+            <a:pPr algn="r">
+              <a:defRPr sz="900">
+                <a:solidFill>
+                  <a:srgbClr val="FFFFFF"/>
+                </a:solidFill>
+                <a:latin typeface="Arial"/>
+                <a:ea typeface="Arial"/>
+                <a:cs typeface="Arial"/>
+              </a:defRPr>
+            </a:pPr>
+            <a:r>
+              <a:rPr sz="900">
+                <a:solidFill>
+                  <a:srgbClr val="FFFFFF"/>
+                </a:solidFill>
+                <a:latin typeface="Arial"/>
+                <a:ea typeface="Arial"/>
+                <a:cs typeface="Arial"/>
+              </a:rPr>
+              <a:t>WEST VIRGINIA UNIVERSITY</a:t>
             </a:r>
           </a:p>
         </p:txBody>
@@ -27876,30 +28926,6 @@
       </p:sp>
       <p:sp>
         <p:nvSpPr>
-          <p:cNvPr id="328" name="DSPIRA 1"/>
-          <p:cNvSpPr>
-            <a:spLocks noGrp="1"/>
-          </p:cNvSpPr>
-          <p:nvPr/>
-        </p:nvSpPr>
-        <p:spPr>
-          <a:xfrm>
-            <a:off x="0" y="0"/>
-            <a:ext cx="9144000" cy="342900"/>
-          </a:xfrm>
-          <a:prstGeom prst="rect">
-            <a:avLst/>
-          </a:prstGeom>
-          <a:solidFill>
-            <a:srgbClr val="FFFFFF"/>
-          </a:solidFill>
-          <a:ln w="0">
-            <a:noFill/>
-          </a:ln>
-        </p:spPr>
-      </p:sp>
-      <p:sp>
-        <p:nvSpPr>
           <p:cNvPr id="329" name="DSPIRA 2"/>
           <p:cNvSpPr>
             <a:spLocks noGrp="1"/>
@@ -27921,57 +28947,6 @@
             <a:noFill/>
           </a:ln>
         </p:spPr>
-      </p:sp>
-      <p:sp>
-        <p:nvSpPr>
-          <p:cNvPr id="330" name="DSPIRA 3"/>
-          <p:cNvSpPr>
-            <a:spLocks noGrp="1"/>
-          </p:cNvSpPr>
-          <p:nvPr/>
-        </p:nvSpPr>
-        <p:spPr>
-          <a:xfrm>
-            <a:off x="228600" y="76200"/>
-            <a:ext cx="4762500" cy="228600"/>
-          </a:xfrm>
-          <a:prstGeom prst="rect">
-            <a:avLst/>
-          </a:prstGeom>
-          <a:noFill/>
-          <a:ln w="0">
-            <a:noFill/>
-          </a:ln>
-        </p:spPr>
-        <p:txBody>
-          <a:bodyPr>
-            <a:noAutofit/>
-          </a:bodyPr>
-          <a:lstStyle/>
-          <a:p>
-            <a:pPr>
-              <a:defRPr sz="1200" b="1">
-                <a:solidFill>
-                  <a:srgbClr val="002855"/>
-                </a:solidFill>
-                <a:latin typeface="Arial"/>
-                <a:ea typeface="Arial"/>
-                <a:cs typeface="Arial"/>
-              </a:defRPr>
-            </a:pPr>
-            <a:r>
-              <a:rPr sz="1200" b="1">
-                <a:solidFill>
-                  <a:srgbClr val="002855"/>
-                </a:solidFill>
-                <a:latin typeface="Arial"/>
-                <a:ea typeface="Arial"/>
-                <a:cs typeface="Arial"/>
-              </a:rPr>
-              <a:t>WVU DSPIRA</a:t>
-            </a:r>
-          </a:p>
-        </p:txBody>
       </p:sp>
       <p:sp>
         <p:nvSpPr>
@@ -28071,6 +29046,156 @@
                 <a:cs typeface="Arial"/>
               </a:rPr>
               <a:t>20 of 29</a:t>
+            </a:r>
+          </a:p>
+        </p:txBody>
+      </p:sp>
+      <p:sp>
+        <p:nvSpPr>
+          <p:cNvPr id="333" name="WVU DSPIRA navy band"/>
+          <p:cNvSpPr>
+            <a:spLocks noGrp="1"/>
+          </p:cNvSpPr>
+          <p:nvPr/>
+        </p:nvSpPr>
+        <p:spPr>
+          <a:xfrm>
+            <a:off x="0" y="0"/>
+            <a:ext cx="9144000" cy="323850"/>
+          </a:xfrm>
+          <a:prstGeom prst="rect">
+            <a:avLst/>
+          </a:prstGeom>
+          <a:solidFill>
+            <a:srgbClr val="002855"/>
+          </a:solidFill>
+          <a:ln w="0">
+            <a:noFill/>
+          </a:ln>
+        </p:spPr>
+      </p:sp>
+      <p:sp>
+        <p:nvSpPr>
+          <p:cNvPr id="334" name="WVU DSPIRA gold rule"/>
+          <p:cNvSpPr>
+            <a:spLocks noGrp="1"/>
+          </p:cNvSpPr>
+          <p:nvPr/>
+        </p:nvSpPr>
+        <p:spPr>
+          <a:xfrm>
+            <a:off x="0" y="323850"/>
+            <a:ext cx="9144000" cy="19050"/>
+          </a:xfrm>
+          <a:prstGeom prst="rect">
+            <a:avLst/>
+          </a:prstGeom>
+          <a:solidFill>
+            <a:srgbClr val="EEAA00"/>
+          </a:solidFill>
+          <a:ln w="0">
+            <a:noFill/>
+          </a:ln>
+        </p:spPr>
+      </p:sp>
+      <p:sp>
+        <p:nvSpPr>
+          <p:cNvPr id="335" name="WVU DSPIRA name"/>
+          <p:cNvSpPr>
+            <a:spLocks noGrp="1"/>
+          </p:cNvSpPr>
+          <p:nvPr/>
+        </p:nvSpPr>
+        <p:spPr>
+          <a:xfrm>
+            <a:off x="228600" y="19050"/>
+            <a:ext cx="2857500" cy="257175"/>
+          </a:xfrm>
+          <a:prstGeom prst="rect">
+            <a:avLst/>
+          </a:prstGeom>
+          <a:noFill/>
+          <a:ln w="0">
+            <a:noFill/>
+          </a:ln>
+        </p:spPr>
+        <p:txBody>
+          <a:bodyPr>
+            <a:noAutofit/>
+          </a:bodyPr>
+          <a:lstStyle/>
+          <a:p>
+            <a:pPr>
+              <a:defRPr sz="1600" b="1">
+                <a:solidFill>
+                  <a:srgbClr val="FFFFFF"/>
+                </a:solidFill>
+                <a:latin typeface="Arial"/>
+                <a:ea typeface="Arial"/>
+                <a:cs typeface="Arial"/>
+              </a:defRPr>
+            </a:pPr>
+            <a:r>
+              <a:rPr sz="1600" b="1">
+                <a:solidFill>
+                  <a:srgbClr val="FFFFFF"/>
+                </a:solidFill>
+                <a:latin typeface="Arial"/>
+                <a:ea typeface="Arial"/>
+                <a:cs typeface="Arial"/>
+              </a:rPr>
+              <a:t>WVU DSPIRA</a:t>
+            </a:r>
+          </a:p>
+        </p:txBody>
+      </p:sp>
+      <p:sp>
+        <p:nvSpPr>
+          <p:cNvPr id="336" name="WVU DSPIRA university"/>
+          <p:cNvSpPr>
+            <a:spLocks noGrp="1"/>
+          </p:cNvSpPr>
+          <p:nvPr/>
+        </p:nvSpPr>
+        <p:spPr>
+          <a:xfrm>
+            <a:off x="6286500" y="114300"/>
+            <a:ext cx="2628900" cy="171450"/>
+          </a:xfrm>
+          <a:prstGeom prst="rect">
+            <a:avLst/>
+          </a:prstGeom>
+          <a:noFill/>
+          <a:ln w="0">
+            <a:noFill/>
+          </a:ln>
+        </p:spPr>
+        <p:txBody>
+          <a:bodyPr>
+            <a:noAutofit/>
+          </a:bodyPr>
+          <a:lstStyle/>
+          <a:p>
+            <a:pPr algn="r">
+              <a:defRPr sz="900">
+                <a:solidFill>
+                  <a:srgbClr val="FFFFFF"/>
+                </a:solidFill>
+                <a:latin typeface="Arial"/>
+                <a:ea typeface="Arial"/>
+                <a:cs typeface="Arial"/>
+              </a:defRPr>
+            </a:pPr>
+            <a:r>
+              <a:rPr sz="900">
+                <a:solidFill>
+                  <a:srgbClr val="FFFFFF"/>
+                </a:solidFill>
+                <a:latin typeface="Arial"/>
+                <a:ea typeface="Arial"/>
+                <a:cs typeface="Arial"/>
+              </a:rPr>
+              <a:t>WEST VIRGINIA UNIVERSITY</a:t>
             </a:r>
           </a:p>
         </p:txBody>
@@ -28411,30 +29536,6 @@
       </p:sp>
       <p:sp>
         <p:nvSpPr>
-          <p:cNvPr id="335" name="DSPIRA 1"/>
-          <p:cNvSpPr>
-            <a:spLocks noGrp="1"/>
-          </p:cNvSpPr>
-          <p:nvPr/>
-        </p:nvSpPr>
-        <p:spPr>
-          <a:xfrm>
-            <a:off x="0" y="0"/>
-            <a:ext cx="9144000" cy="342900"/>
-          </a:xfrm>
-          <a:prstGeom prst="rect">
-            <a:avLst/>
-          </a:prstGeom>
-          <a:solidFill>
-            <a:srgbClr val="FFFFFF"/>
-          </a:solidFill>
-          <a:ln w="0">
-            <a:noFill/>
-          </a:ln>
-        </p:spPr>
-      </p:sp>
-      <p:sp>
-        <p:nvSpPr>
           <p:cNvPr id="336" name="DSPIRA 2"/>
           <p:cNvSpPr>
             <a:spLocks noGrp="1"/>
@@ -28456,57 +29557,6 @@
             <a:noFill/>
           </a:ln>
         </p:spPr>
-      </p:sp>
-      <p:sp>
-        <p:nvSpPr>
-          <p:cNvPr id="337" name="DSPIRA 3"/>
-          <p:cNvSpPr>
-            <a:spLocks noGrp="1"/>
-          </p:cNvSpPr>
-          <p:nvPr/>
-        </p:nvSpPr>
-        <p:spPr>
-          <a:xfrm>
-            <a:off x="228600" y="76200"/>
-            <a:ext cx="4762500" cy="228600"/>
-          </a:xfrm>
-          <a:prstGeom prst="rect">
-            <a:avLst/>
-          </a:prstGeom>
-          <a:noFill/>
-          <a:ln w="0">
-            <a:noFill/>
-          </a:ln>
-        </p:spPr>
-        <p:txBody>
-          <a:bodyPr>
-            <a:noAutofit/>
-          </a:bodyPr>
-          <a:lstStyle/>
-          <a:p>
-            <a:pPr>
-              <a:defRPr sz="1200" b="1">
-                <a:solidFill>
-                  <a:srgbClr val="002855"/>
-                </a:solidFill>
-                <a:latin typeface="Arial"/>
-                <a:ea typeface="Arial"/>
-                <a:cs typeface="Arial"/>
-              </a:defRPr>
-            </a:pPr>
-            <a:r>
-              <a:rPr sz="1200" b="1">
-                <a:solidFill>
-                  <a:srgbClr val="002855"/>
-                </a:solidFill>
-                <a:latin typeface="Arial"/>
-                <a:ea typeface="Arial"/>
-                <a:cs typeface="Arial"/>
-              </a:rPr>
-              <a:t>WVU DSPIRA</a:t>
-            </a:r>
-          </a:p>
-        </p:txBody>
       </p:sp>
       <p:sp>
         <p:nvSpPr>
@@ -28606,6 +29656,156 @@
                 <a:cs typeface="Arial"/>
               </a:rPr>
               <a:t>21 of 29</a:t>
+            </a:r>
+          </a:p>
+        </p:txBody>
+      </p:sp>
+      <p:sp>
+        <p:nvSpPr>
+          <p:cNvPr id="340" name="WVU DSPIRA navy band"/>
+          <p:cNvSpPr>
+            <a:spLocks noGrp="1"/>
+          </p:cNvSpPr>
+          <p:nvPr/>
+        </p:nvSpPr>
+        <p:spPr>
+          <a:xfrm>
+            <a:off x="0" y="0"/>
+            <a:ext cx="9144000" cy="323850"/>
+          </a:xfrm>
+          <a:prstGeom prst="rect">
+            <a:avLst/>
+          </a:prstGeom>
+          <a:solidFill>
+            <a:srgbClr val="002855"/>
+          </a:solidFill>
+          <a:ln w="0">
+            <a:noFill/>
+          </a:ln>
+        </p:spPr>
+      </p:sp>
+      <p:sp>
+        <p:nvSpPr>
+          <p:cNvPr id="341" name="WVU DSPIRA gold rule"/>
+          <p:cNvSpPr>
+            <a:spLocks noGrp="1"/>
+          </p:cNvSpPr>
+          <p:nvPr/>
+        </p:nvSpPr>
+        <p:spPr>
+          <a:xfrm>
+            <a:off x="0" y="323850"/>
+            <a:ext cx="9144000" cy="19050"/>
+          </a:xfrm>
+          <a:prstGeom prst="rect">
+            <a:avLst/>
+          </a:prstGeom>
+          <a:solidFill>
+            <a:srgbClr val="EEAA00"/>
+          </a:solidFill>
+          <a:ln w="0">
+            <a:noFill/>
+          </a:ln>
+        </p:spPr>
+      </p:sp>
+      <p:sp>
+        <p:nvSpPr>
+          <p:cNvPr id="342" name="WVU DSPIRA name"/>
+          <p:cNvSpPr>
+            <a:spLocks noGrp="1"/>
+          </p:cNvSpPr>
+          <p:nvPr/>
+        </p:nvSpPr>
+        <p:spPr>
+          <a:xfrm>
+            <a:off x="228600" y="19050"/>
+            <a:ext cx="2857500" cy="257175"/>
+          </a:xfrm>
+          <a:prstGeom prst="rect">
+            <a:avLst/>
+          </a:prstGeom>
+          <a:noFill/>
+          <a:ln w="0">
+            <a:noFill/>
+          </a:ln>
+        </p:spPr>
+        <p:txBody>
+          <a:bodyPr>
+            <a:noAutofit/>
+          </a:bodyPr>
+          <a:lstStyle/>
+          <a:p>
+            <a:pPr>
+              <a:defRPr sz="1600" b="1">
+                <a:solidFill>
+                  <a:srgbClr val="FFFFFF"/>
+                </a:solidFill>
+                <a:latin typeface="Arial"/>
+                <a:ea typeface="Arial"/>
+                <a:cs typeface="Arial"/>
+              </a:defRPr>
+            </a:pPr>
+            <a:r>
+              <a:rPr sz="1600" b="1">
+                <a:solidFill>
+                  <a:srgbClr val="FFFFFF"/>
+                </a:solidFill>
+                <a:latin typeface="Arial"/>
+                <a:ea typeface="Arial"/>
+                <a:cs typeface="Arial"/>
+              </a:rPr>
+              <a:t>WVU DSPIRA</a:t>
+            </a:r>
+          </a:p>
+        </p:txBody>
+      </p:sp>
+      <p:sp>
+        <p:nvSpPr>
+          <p:cNvPr id="343" name="WVU DSPIRA university"/>
+          <p:cNvSpPr>
+            <a:spLocks noGrp="1"/>
+          </p:cNvSpPr>
+          <p:nvPr/>
+        </p:nvSpPr>
+        <p:spPr>
+          <a:xfrm>
+            <a:off x="6286500" y="114300"/>
+            <a:ext cx="2628900" cy="171450"/>
+          </a:xfrm>
+          <a:prstGeom prst="rect">
+            <a:avLst/>
+          </a:prstGeom>
+          <a:noFill/>
+          <a:ln w="0">
+            <a:noFill/>
+          </a:ln>
+        </p:spPr>
+        <p:txBody>
+          <a:bodyPr>
+            <a:noAutofit/>
+          </a:bodyPr>
+          <a:lstStyle/>
+          <a:p>
+            <a:pPr algn="r">
+              <a:defRPr sz="900">
+                <a:solidFill>
+                  <a:srgbClr val="FFFFFF"/>
+                </a:solidFill>
+                <a:latin typeface="Arial"/>
+                <a:ea typeface="Arial"/>
+                <a:cs typeface="Arial"/>
+              </a:defRPr>
+            </a:pPr>
+            <a:r>
+              <a:rPr sz="900">
+                <a:solidFill>
+                  <a:srgbClr val="FFFFFF"/>
+                </a:solidFill>
+                <a:latin typeface="Arial"/>
+                <a:ea typeface="Arial"/>
+                <a:cs typeface="Arial"/>
+              </a:rPr>
+              <a:t>WEST VIRGINIA UNIVERSITY</a:t>
             </a:r>
           </a:p>
         </p:txBody>
@@ -28978,30 +30178,6 @@
       </p:pic>
       <p:sp>
         <p:nvSpPr>
-          <p:cNvPr id="342" name="DSPIRA 1"/>
-          <p:cNvSpPr>
-            <a:spLocks noGrp="1"/>
-          </p:cNvSpPr>
-          <p:nvPr/>
-        </p:nvSpPr>
-        <p:spPr>
-          <a:xfrm>
-            <a:off x="0" y="0"/>
-            <a:ext cx="9144000" cy="342900"/>
-          </a:xfrm>
-          <a:prstGeom prst="rect">
-            <a:avLst/>
-          </a:prstGeom>
-          <a:solidFill>
-            <a:srgbClr val="FFFFFF"/>
-          </a:solidFill>
-          <a:ln w="0">
-            <a:noFill/>
-          </a:ln>
-        </p:spPr>
-      </p:sp>
-      <p:sp>
-        <p:nvSpPr>
           <p:cNvPr id="343" name="DSPIRA 2"/>
           <p:cNvSpPr>
             <a:spLocks noGrp="1"/>
@@ -29023,57 +30199,6 @@
             <a:noFill/>
           </a:ln>
         </p:spPr>
-      </p:sp>
-      <p:sp>
-        <p:nvSpPr>
-          <p:cNvPr id="344" name="DSPIRA 3"/>
-          <p:cNvSpPr>
-            <a:spLocks noGrp="1"/>
-          </p:cNvSpPr>
-          <p:nvPr/>
-        </p:nvSpPr>
-        <p:spPr>
-          <a:xfrm>
-            <a:off x="228600" y="76200"/>
-            <a:ext cx="4762500" cy="228600"/>
-          </a:xfrm>
-          <a:prstGeom prst="rect">
-            <a:avLst/>
-          </a:prstGeom>
-          <a:noFill/>
-          <a:ln w="0">
-            <a:noFill/>
-          </a:ln>
-        </p:spPr>
-        <p:txBody>
-          <a:bodyPr>
-            <a:noAutofit/>
-          </a:bodyPr>
-          <a:lstStyle/>
-          <a:p>
-            <a:pPr>
-              <a:defRPr sz="1200" b="1">
-                <a:solidFill>
-                  <a:srgbClr val="002855"/>
-                </a:solidFill>
-                <a:latin typeface="Arial"/>
-                <a:ea typeface="Arial"/>
-                <a:cs typeface="Arial"/>
-              </a:defRPr>
-            </a:pPr>
-            <a:r>
-              <a:rPr sz="1200" b="1">
-                <a:solidFill>
-                  <a:srgbClr val="002855"/>
-                </a:solidFill>
-                <a:latin typeface="Arial"/>
-                <a:ea typeface="Arial"/>
-                <a:cs typeface="Arial"/>
-              </a:rPr>
-              <a:t>WVU DSPIRA</a:t>
-            </a:r>
-          </a:p>
-        </p:txBody>
       </p:sp>
       <p:sp>
         <p:nvSpPr>
@@ -29173,6 +30298,156 @@
                 <a:cs typeface="Arial"/>
               </a:rPr>
               <a:t>22 of 29</a:t>
+            </a:r>
+          </a:p>
+        </p:txBody>
+      </p:sp>
+      <p:sp>
+        <p:nvSpPr>
+          <p:cNvPr id="347" name="WVU DSPIRA navy band"/>
+          <p:cNvSpPr>
+            <a:spLocks noGrp="1"/>
+          </p:cNvSpPr>
+          <p:nvPr/>
+        </p:nvSpPr>
+        <p:spPr>
+          <a:xfrm>
+            <a:off x="0" y="0"/>
+            <a:ext cx="9144000" cy="323850"/>
+          </a:xfrm>
+          <a:prstGeom prst="rect">
+            <a:avLst/>
+          </a:prstGeom>
+          <a:solidFill>
+            <a:srgbClr val="002855"/>
+          </a:solidFill>
+          <a:ln w="0">
+            <a:noFill/>
+          </a:ln>
+        </p:spPr>
+      </p:sp>
+      <p:sp>
+        <p:nvSpPr>
+          <p:cNvPr id="348" name="WVU DSPIRA gold rule"/>
+          <p:cNvSpPr>
+            <a:spLocks noGrp="1"/>
+          </p:cNvSpPr>
+          <p:nvPr/>
+        </p:nvSpPr>
+        <p:spPr>
+          <a:xfrm>
+            <a:off x="0" y="323850"/>
+            <a:ext cx="9144000" cy="19050"/>
+          </a:xfrm>
+          <a:prstGeom prst="rect">
+            <a:avLst/>
+          </a:prstGeom>
+          <a:solidFill>
+            <a:srgbClr val="EEAA00"/>
+          </a:solidFill>
+          <a:ln w="0">
+            <a:noFill/>
+          </a:ln>
+        </p:spPr>
+      </p:sp>
+      <p:sp>
+        <p:nvSpPr>
+          <p:cNvPr id="349" name="WVU DSPIRA name"/>
+          <p:cNvSpPr>
+            <a:spLocks noGrp="1"/>
+          </p:cNvSpPr>
+          <p:nvPr/>
+        </p:nvSpPr>
+        <p:spPr>
+          <a:xfrm>
+            <a:off x="228600" y="19050"/>
+            <a:ext cx="2857500" cy="257175"/>
+          </a:xfrm>
+          <a:prstGeom prst="rect">
+            <a:avLst/>
+          </a:prstGeom>
+          <a:noFill/>
+          <a:ln w="0">
+            <a:noFill/>
+          </a:ln>
+        </p:spPr>
+        <p:txBody>
+          <a:bodyPr>
+            <a:noAutofit/>
+          </a:bodyPr>
+          <a:lstStyle/>
+          <a:p>
+            <a:pPr>
+              <a:defRPr sz="1600" b="1">
+                <a:solidFill>
+                  <a:srgbClr val="FFFFFF"/>
+                </a:solidFill>
+                <a:latin typeface="Arial"/>
+                <a:ea typeface="Arial"/>
+                <a:cs typeface="Arial"/>
+              </a:defRPr>
+            </a:pPr>
+            <a:r>
+              <a:rPr sz="1600" b="1">
+                <a:solidFill>
+                  <a:srgbClr val="FFFFFF"/>
+                </a:solidFill>
+                <a:latin typeface="Arial"/>
+                <a:ea typeface="Arial"/>
+                <a:cs typeface="Arial"/>
+              </a:rPr>
+              <a:t>WVU DSPIRA</a:t>
+            </a:r>
+          </a:p>
+        </p:txBody>
+      </p:sp>
+      <p:sp>
+        <p:nvSpPr>
+          <p:cNvPr id="350" name="WVU DSPIRA university"/>
+          <p:cNvSpPr>
+            <a:spLocks noGrp="1"/>
+          </p:cNvSpPr>
+          <p:nvPr/>
+        </p:nvSpPr>
+        <p:spPr>
+          <a:xfrm>
+            <a:off x="6286500" y="114300"/>
+            <a:ext cx="2628900" cy="171450"/>
+          </a:xfrm>
+          <a:prstGeom prst="rect">
+            <a:avLst/>
+          </a:prstGeom>
+          <a:noFill/>
+          <a:ln w="0">
+            <a:noFill/>
+          </a:ln>
+        </p:spPr>
+        <p:txBody>
+          <a:bodyPr>
+            <a:noAutofit/>
+          </a:bodyPr>
+          <a:lstStyle/>
+          <a:p>
+            <a:pPr algn="r">
+              <a:defRPr sz="900">
+                <a:solidFill>
+                  <a:srgbClr val="FFFFFF"/>
+                </a:solidFill>
+                <a:latin typeface="Arial"/>
+                <a:ea typeface="Arial"/>
+                <a:cs typeface="Arial"/>
+              </a:defRPr>
+            </a:pPr>
+            <a:r>
+              <a:rPr sz="900">
+                <a:solidFill>
+                  <a:srgbClr val="FFFFFF"/>
+                </a:solidFill>
+                <a:latin typeface="Arial"/>
+                <a:ea typeface="Arial"/>
+                <a:cs typeface="Arial"/>
+              </a:rPr>
+              <a:t>WEST VIRGINIA UNIVERSITY</a:t>
             </a:r>
           </a:p>
         </p:txBody>
@@ -29427,30 +30702,6 @@
       </p:sp>
       <p:sp>
         <p:nvSpPr>
-          <p:cNvPr id="350" name="DSPIRA 1"/>
-          <p:cNvSpPr>
-            <a:spLocks noGrp="1"/>
-          </p:cNvSpPr>
-          <p:nvPr/>
-        </p:nvSpPr>
-        <p:spPr>
-          <a:xfrm>
-            <a:off x="0" y="0"/>
-            <a:ext cx="9144000" cy="342900"/>
-          </a:xfrm>
-          <a:prstGeom prst="rect">
-            <a:avLst/>
-          </a:prstGeom>
-          <a:solidFill>
-            <a:srgbClr val="FFFFFF"/>
-          </a:solidFill>
-          <a:ln w="0">
-            <a:noFill/>
-          </a:ln>
-        </p:spPr>
-      </p:sp>
-      <p:sp>
-        <p:nvSpPr>
           <p:cNvPr id="351" name="DSPIRA 2"/>
           <p:cNvSpPr>
             <a:spLocks noGrp="1"/>
@@ -29472,57 +30723,6 @@
             <a:noFill/>
           </a:ln>
         </p:spPr>
-      </p:sp>
-      <p:sp>
-        <p:nvSpPr>
-          <p:cNvPr id="352" name="DSPIRA 3"/>
-          <p:cNvSpPr>
-            <a:spLocks noGrp="1"/>
-          </p:cNvSpPr>
-          <p:nvPr/>
-        </p:nvSpPr>
-        <p:spPr>
-          <a:xfrm>
-            <a:off x="228600" y="76200"/>
-            <a:ext cx="4762500" cy="228600"/>
-          </a:xfrm>
-          <a:prstGeom prst="rect">
-            <a:avLst/>
-          </a:prstGeom>
-          <a:noFill/>
-          <a:ln w="0">
-            <a:noFill/>
-          </a:ln>
-        </p:spPr>
-        <p:txBody>
-          <a:bodyPr>
-            <a:noAutofit/>
-          </a:bodyPr>
-          <a:lstStyle/>
-          <a:p>
-            <a:pPr>
-              <a:defRPr sz="1200" b="1">
-                <a:solidFill>
-                  <a:srgbClr val="002855"/>
-                </a:solidFill>
-                <a:latin typeface="Arial"/>
-                <a:ea typeface="Arial"/>
-                <a:cs typeface="Arial"/>
-              </a:defRPr>
-            </a:pPr>
-            <a:r>
-              <a:rPr sz="1200" b="1">
-                <a:solidFill>
-                  <a:srgbClr val="002855"/>
-                </a:solidFill>
-                <a:latin typeface="Arial"/>
-                <a:ea typeface="Arial"/>
-                <a:cs typeface="Arial"/>
-              </a:rPr>
-              <a:t>WVU DSPIRA</a:t>
-            </a:r>
-          </a:p>
-        </p:txBody>
       </p:sp>
       <p:sp>
         <p:nvSpPr>
@@ -29622,6 +30822,156 @@
                 <a:cs typeface="Arial"/>
               </a:rPr>
               <a:t>23 of 29</a:t>
+            </a:r>
+          </a:p>
+        </p:txBody>
+      </p:sp>
+      <p:sp>
+        <p:nvSpPr>
+          <p:cNvPr id="355" name="WVU DSPIRA navy band"/>
+          <p:cNvSpPr>
+            <a:spLocks noGrp="1"/>
+          </p:cNvSpPr>
+          <p:nvPr/>
+        </p:nvSpPr>
+        <p:spPr>
+          <a:xfrm>
+            <a:off x="0" y="0"/>
+            <a:ext cx="9144000" cy="323850"/>
+          </a:xfrm>
+          <a:prstGeom prst="rect">
+            <a:avLst/>
+          </a:prstGeom>
+          <a:solidFill>
+            <a:srgbClr val="002855"/>
+          </a:solidFill>
+          <a:ln w="0">
+            <a:noFill/>
+          </a:ln>
+        </p:spPr>
+      </p:sp>
+      <p:sp>
+        <p:nvSpPr>
+          <p:cNvPr id="356" name="WVU DSPIRA gold rule"/>
+          <p:cNvSpPr>
+            <a:spLocks noGrp="1"/>
+          </p:cNvSpPr>
+          <p:nvPr/>
+        </p:nvSpPr>
+        <p:spPr>
+          <a:xfrm>
+            <a:off x="0" y="323850"/>
+            <a:ext cx="9144000" cy="19050"/>
+          </a:xfrm>
+          <a:prstGeom prst="rect">
+            <a:avLst/>
+          </a:prstGeom>
+          <a:solidFill>
+            <a:srgbClr val="EEAA00"/>
+          </a:solidFill>
+          <a:ln w="0">
+            <a:noFill/>
+          </a:ln>
+        </p:spPr>
+      </p:sp>
+      <p:sp>
+        <p:nvSpPr>
+          <p:cNvPr id="357" name="WVU DSPIRA name"/>
+          <p:cNvSpPr>
+            <a:spLocks noGrp="1"/>
+          </p:cNvSpPr>
+          <p:nvPr/>
+        </p:nvSpPr>
+        <p:spPr>
+          <a:xfrm>
+            <a:off x="228600" y="19050"/>
+            <a:ext cx="2857500" cy="257175"/>
+          </a:xfrm>
+          <a:prstGeom prst="rect">
+            <a:avLst/>
+          </a:prstGeom>
+          <a:noFill/>
+          <a:ln w="0">
+            <a:noFill/>
+          </a:ln>
+        </p:spPr>
+        <p:txBody>
+          <a:bodyPr>
+            <a:noAutofit/>
+          </a:bodyPr>
+          <a:lstStyle/>
+          <a:p>
+            <a:pPr>
+              <a:defRPr sz="1600" b="1">
+                <a:solidFill>
+                  <a:srgbClr val="FFFFFF"/>
+                </a:solidFill>
+                <a:latin typeface="Arial"/>
+                <a:ea typeface="Arial"/>
+                <a:cs typeface="Arial"/>
+              </a:defRPr>
+            </a:pPr>
+            <a:r>
+              <a:rPr sz="1600" b="1">
+                <a:solidFill>
+                  <a:srgbClr val="FFFFFF"/>
+                </a:solidFill>
+                <a:latin typeface="Arial"/>
+                <a:ea typeface="Arial"/>
+                <a:cs typeface="Arial"/>
+              </a:rPr>
+              <a:t>WVU DSPIRA</a:t>
+            </a:r>
+          </a:p>
+        </p:txBody>
+      </p:sp>
+      <p:sp>
+        <p:nvSpPr>
+          <p:cNvPr id="358" name="WVU DSPIRA university"/>
+          <p:cNvSpPr>
+            <a:spLocks noGrp="1"/>
+          </p:cNvSpPr>
+          <p:nvPr/>
+        </p:nvSpPr>
+        <p:spPr>
+          <a:xfrm>
+            <a:off x="6286500" y="114300"/>
+            <a:ext cx="2628900" cy="171450"/>
+          </a:xfrm>
+          <a:prstGeom prst="rect">
+            <a:avLst/>
+          </a:prstGeom>
+          <a:noFill/>
+          <a:ln w="0">
+            <a:noFill/>
+          </a:ln>
+        </p:spPr>
+        <p:txBody>
+          <a:bodyPr>
+            <a:noAutofit/>
+          </a:bodyPr>
+          <a:lstStyle/>
+          <a:p>
+            <a:pPr algn="r">
+              <a:defRPr sz="900">
+                <a:solidFill>
+                  <a:srgbClr val="FFFFFF"/>
+                </a:solidFill>
+                <a:latin typeface="Arial"/>
+                <a:ea typeface="Arial"/>
+                <a:cs typeface="Arial"/>
+              </a:defRPr>
+            </a:pPr>
+            <a:r>
+              <a:rPr sz="900">
+                <a:solidFill>
+                  <a:srgbClr val="FFFFFF"/>
+                </a:solidFill>
+                <a:latin typeface="Arial"/>
+                <a:ea typeface="Arial"/>
+                <a:cs typeface="Arial"/>
+              </a:rPr>
+              <a:t>WEST VIRGINIA UNIVERSITY</a:t>
             </a:r>
           </a:p>
         </p:txBody>
@@ -29856,30 +31206,6 @@
       </p:sp>
       <p:sp>
         <p:nvSpPr>
-          <p:cNvPr id="359" name="DSPIRA 1"/>
-          <p:cNvSpPr>
-            <a:spLocks noGrp="1"/>
-          </p:cNvSpPr>
-          <p:nvPr/>
-        </p:nvSpPr>
-        <p:spPr>
-          <a:xfrm>
-            <a:off x="0" y="0"/>
-            <a:ext cx="9144000" cy="342900"/>
-          </a:xfrm>
-          <a:prstGeom prst="rect">
-            <a:avLst/>
-          </a:prstGeom>
-          <a:solidFill>
-            <a:srgbClr val="FFFFFF"/>
-          </a:solidFill>
-          <a:ln w="0">
-            <a:noFill/>
-          </a:ln>
-        </p:spPr>
-      </p:sp>
-      <p:sp>
-        <p:nvSpPr>
           <p:cNvPr id="360" name="DSPIRA 2"/>
           <p:cNvSpPr>
             <a:spLocks noGrp="1"/>
@@ -29901,57 +31227,6 @@
             <a:noFill/>
           </a:ln>
         </p:spPr>
-      </p:sp>
-      <p:sp>
-        <p:nvSpPr>
-          <p:cNvPr id="361" name="DSPIRA 3"/>
-          <p:cNvSpPr>
-            <a:spLocks noGrp="1"/>
-          </p:cNvSpPr>
-          <p:nvPr/>
-        </p:nvSpPr>
-        <p:spPr>
-          <a:xfrm>
-            <a:off x="228600" y="76200"/>
-            <a:ext cx="4762500" cy="228600"/>
-          </a:xfrm>
-          <a:prstGeom prst="rect">
-            <a:avLst/>
-          </a:prstGeom>
-          <a:noFill/>
-          <a:ln w="0">
-            <a:noFill/>
-          </a:ln>
-        </p:spPr>
-        <p:txBody>
-          <a:bodyPr>
-            <a:noAutofit/>
-          </a:bodyPr>
-          <a:lstStyle/>
-          <a:p>
-            <a:pPr>
-              <a:defRPr sz="1200" b="1">
-                <a:solidFill>
-                  <a:srgbClr val="002855"/>
-                </a:solidFill>
-                <a:latin typeface="Arial"/>
-                <a:ea typeface="Arial"/>
-                <a:cs typeface="Arial"/>
-              </a:defRPr>
-            </a:pPr>
-            <a:r>
-              <a:rPr sz="1200" b="1">
-                <a:solidFill>
-                  <a:srgbClr val="002855"/>
-                </a:solidFill>
-                <a:latin typeface="Arial"/>
-                <a:ea typeface="Arial"/>
-                <a:cs typeface="Arial"/>
-              </a:rPr>
-              <a:t>WVU DSPIRA</a:t>
-            </a:r>
-          </a:p>
-        </p:txBody>
       </p:sp>
       <p:sp>
         <p:nvSpPr>
@@ -30051,6 +31326,156 @@
                 <a:cs typeface="Arial"/>
               </a:rPr>
               <a:t>24 of 29</a:t>
+            </a:r>
+          </a:p>
+        </p:txBody>
+      </p:sp>
+      <p:sp>
+        <p:nvSpPr>
+          <p:cNvPr id="364" name="WVU DSPIRA navy band"/>
+          <p:cNvSpPr>
+            <a:spLocks noGrp="1"/>
+          </p:cNvSpPr>
+          <p:nvPr/>
+        </p:nvSpPr>
+        <p:spPr>
+          <a:xfrm>
+            <a:off x="0" y="0"/>
+            <a:ext cx="9144000" cy="323850"/>
+          </a:xfrm>
+          <a:prstGeom prst="rect">
+            <a:avLst/>
+          </a:prstGeom>
+          <a:solidFill>
+            <a:srgbClr val="002855"/>
+          </a:solidFill>
+          <a:ln w="0">
+            <a:noFill/>
+          </a:ln>
+        </p:spPr>
+      </p:sp>
+      <p:sp>
+        <p:nvSpPr>
+          <p:cNvPr id="365" name="WVU DSPIRA gold rule"/>
+          <p:cNvSpPr>
+            <a:spLocks noGrp="1"/>
+          </p:cNvSpPr>
+          <p:nvPr/>
+        </p:nvSpPr>
+        <p:spPr>
+          <a:xfrm>
+            <a:off x="0" y="323850"/>
+            <a:ext cx="9144000" cy="19050"/>
+          </a:xfrm>
+          <a:prstGeom prst="rect">
+            <a:avLst/>
+          </a:prstGeom>
+          <a:solidFill>
+            <a:srgbClr val="EEAA00"/>
+          </a:solidFill>
+          <a:ln w="0">
+            <a:noFill/>
+          </a:ln>
+        </p:spPr>
+      </p:sp>
+      <p:sp>
+        <p:nvSpPr>
+          <p:cNvPr id="366" name="WVU DSPIRA name"/>
+          <p:cNvSpPr>
+            <a:spLocks noGrp="1"/>
+          </p:cNvSpPr>
+          <p:nvPr/>
+        </p:nvSpPr>
+        <p:spPr>
+          <a:xfrm>
+            <a:off x="228600" y="19050"/>
+            <a:ext cx="2857500" cy="257175"/>
+          </a:xfrm>
+          <a:prstGeom prst="rect">
+            <a:avLst/>
+          </a:prstGeom>
+          <a:noFill/>
+          <a:ln w="0">
+            <a:noFill/>
+          </a:ln>
+        </p:spPr>
+        <p:txBody>
+          <a:bodyPr>
+            <a:noAutofit/>
+          </a:bodyPr>
+          <a:lstStyle/>
+          <a:p>
+            <a:pPr>
+              <a:defRPr sz="1600" b="1">
+                <a:solidFill>
+                  <a:srgbClr val="FFFFFF"/>
+                </a:solidFill>
+                <a:latin typeface="Arial"/>
+                <a:ea typeface="Arial"/>
+                <a:cs typeface="Arial"/>
+              </a:defRPr>
+            </a:pPr>
+            <a:r>
+              <a:rPr sz="1600" b="1">
+                <a:solidFill>
+                  <a:srgbClr val="FFFFFF"/>
+                </a:solidFill>
+                <a:latin typeface="Arial"/>
+                <a:ea typeface="Arial"/>
+                <a:cs typeface="Arial"/>
+              </a:rPr>
+              <a:t>WVU DSPIRA</a:t>
+            </a:r>
+          </a:p>
+        </p:txBody>
+      </p:sp>
+      <p:sp>
+        <p:nvSpPr>
+          <p:cNvPr id="367" name="WVU DSPIRA university"/>
+          <p:cNvSpPr>
+            <a:spLocks noGrp="1"/>
+          </p:cNvSpPr>
+          <p:nvPr/>
+        </p:nvSpPr>
+        <p:spPr>
+          <a:xfrm>
+            <a:off x="6286500" y="114300"/>
+            <a:ext cx="2628900" cy="171450"/>
+          </a:xfrm>
+          <a:prstGeom prst="rect">
+            <a:avLst/>
+          </a:prstGeom>
+          <a:noFill/>
+          <a:ln w="0">
+            <a:noFill/>
+          </a:ln>
+        </p:spPr>
+        <p:txBody>
+          <a:bodyPr>
+            <a:noAutofit/>
+          </a:bodyPr>
+          <a:lstStyle/>
+          <a:p>
+            <a:pPr algn="r">
+              <a:defRPr sz="900">
+                <a:solidFill>
+                  <a:srgbClr val="FFFFFF"/>
+                </a:solidFill>
+                <a:latin typeface="Arial"/>
+                <a:ea typeface="Arial"/>
+                <a:cs typeface="Arial"/>
+              </a:defRPr>
+            </a:pPr>
+            <a:r>
+              <a:rPr sz="900">
+                <a:solidFill>
+                  <a:srgbClr val="FFFFFF"/>
+                </a:solidFill>
+                <a:latin typeface="Arial"/>
+                <a:ea typeface="Arial"/>
+                <a:cs typeface="Arial"/>
+              </a:rPr>
+              <a:t>WEST VIRGINIA UNIVERSITY</a:t>
             </a:r>
           </a:p>
         </p:txBody>
@@ -30397,30 +31822,6 @@
       </p:sp>
       <p:sp>
         <p:nvSpPr>
-          <p:cNvPr id="365" name="DSPIRA 1"/>
-          <p:cNvSpPr>
-            <a:spLocks noGrp="1"/>
-          </p:cNvSpPr>
-          <p:nvPr/>
-        </p:nvSpPr>
-        <p:spPr>
-          <a:xfrm>
-            <a:off x="0" y="0"/>
-            <a:ext cx="9144000" cy="342900"/>
-          </a:xfrm>
-          <a:prstGeom prst="rect">
-            <a:avLst/>
-          </a:prstGeom>
-          <a:solidFill>
-            <a:srgbClr val="FFFFFF"/>
-          </a:solidFill>
-          <a:ln w="0">
-            <a:noFill/>
-          </a:ln>
-        </p:spPr>
-      </p:sp>
-      <p:sp>
-        <p:nvSpPr>
           <p:cNvPr id="366" name="DSPIRA 2"/>
           <p:cNvSpPr>
             <a:spLocks noGrp="1"/>
@@ -30442,57 +31843,6 @@
             <a:noFill/>
           </a:ln>
         </p:spPr>
-      </p:sp>
-      <p:sp>
-        <p:nvSpPr>
-          <p:cNvPr id="367" name="DSPIRA 3"/>
-          <p:cNvSpPr>
-            <a:spLocks noGrp="1"/>
-          </p:cNvSpPr>
-          <p:nvPr/>
-        </p:nvSpPr>
-        <p:spPr>
-          <a:xfrm>
-            <a:off x="228600" y="76200"/>
-            <a:ext cx="4762500" cy="228600"/>
-          </a:xfrm>
-          <a:prstGeom prst="rect">
-            <a:avLst/>
-          </a:prstGeom>
-          <a:noFill/>
-          <a:ln w="0">
-            <a:noFill/>
-          </a:ln>
-        </p:spPr>
-        <p:txBody>
-          <a:bodyPr>
-            <a:noAutofit/>
-          </a:bodyPr>
-          <a:lstStyle/>
-          <a:p>
-            <a:pPr>
-              <a:defRPr sz="1200" b="1">
-                <a:solidFill>
-                  <a:srgbClr val="002855"/>
-                </a:solidFill>
-                <a:latin typeface="Arial"/>
-                <a:ea typeface="Arial"/>
-                <a:cs typeface="Arial"/>
-              </a:defRPr>
-            </a:pPr>
-            <a:r>
-              <a:rPr sz="1200" b="1">
-                <a:solidFill>
-                  <a:srgbClr val="002855"/>
-                </a:solidFill>
-                <a:latin typeface="Arial"/>
-                <a:ea typeface="Arial"/>
-                <a:cs typeface="Arial"/>
-              </a:rPr>
-              <a:t>WVU DSPIRA</a:t>
-            </a:r>
-          </a:p>
-        </p:txBody>
       </p:sp>
       <p:sp>
         <p:nvSpPr>
@@ -30592,6 +31942,156 @@
                 <a:cs typeface="Arial"/>
               </a:rPr>
               <a:t>25 of 29</a:t>
+            </a:r>
+          </a:p>
+        </p:txBody>
+      </p:sp>
+      <p:sp>
+        <p:nvSpPr>
+          <p:cNvPr id="370" name="WVU DSPIRA navy band"/>
+          <p:cNvSpPr>
+            <a:spLocks noGrp="1"/>
+          </p:cNvSpPr>
+          <p:nvPr/>
+        </p:nvSpPr>
+        <p:spPr>
+          <a:xfrm>
+            <a:off x="0" y="0"/>
+            <a:ext cx="9144000" cy="323850"/>
+          </a:xfrm>
+          <a:prstGeom prst="rect">
+            <a:avLst/>
+          </a:prstGeom>
+          <a:solidFill>
+            <a:srgbClr val="002855"/>
+          </a:solidFill>
+          <a:ln w="0">
+            <a:noFill/>
+          </a:ln>
+        </p:spPr>
+      </p:sp>
+      <p:sp>
+        <p:nvSpPr>
+          <p:cNvPr id="371" name="WVU DSPIRA gold rule"/>
+          <p:cNvSpPr>
+            <a:spLocks noGrp="1"/>
+          </p:cNvSpPr>
+          <p:nvPr/>
+        </p:nvSpPr>
+        <p:spPr>
+          <a:xfrm>
+            <a:off x="0" y="323850"/>
+            <a:ext cx="9144000" cy="19050"/>
+          </a:xfrm>
+          <a:prstGeom prst="rect">
+            <a:avLst/>
+          </a:prstGeom>
+          <a:solidFill>
+            <a:srgbClr val="EEAA00"/>
+          </a:solidFill>
+          <a:ln w="0">
+            <a:noFill/>
+          </a:ln>
+        </p:spPr>
+      </p:sp>
+      <p:sp>
+        <p:nvSpPr>
+          <p:cNvPr id="372" name="WVU DSPIRA name"/>
+          <p:cNvSpPr>
+            <a:spLocks noGrp="1"/>
+          </p:cNvSpPr>
+          <p:nvPr/>
+        </p:nvSpPr>
+        <p:spPr>
+          <a:xfrm>
+            <a:off x="228600" y="19050"/>
+            <a:ext cx="2857500" cy="257175"/>
+          </a:xfrm>
+          <a:prstGeom prst="rect">
+            <a:avLst/>
+          </a:prstGeom>
+          <a:noFill/>
+          <a:ln w="0">
+            <a:noFill/>
+          </a:ln>
+        </p:spPr>
+        <p:txBody>
+          <a:bodyPr>
+            <a:noAutofit/>
+          </a:bodyPr>
+          <a:lstStyle/>
+          <a:p>
+            <a:pPr>
+              <a:defRPr sz="1600" b="1">
+                <a:solidFill>
+                  <a:srgbClr val="FFFFFF"/>
+                </a:solidFill>
+                <a:latin typeface="Arial"/>
+                <a:ea typeface="Arial"/>
+                <a:cs typeface="Arial"/>
+              </a:defRPr>
+            </a:pPr>
+            <a:r>
+              <a:rPr sz="1600" b="1">
+                <a:solidFill>
+                  <a:srgbClr val="FFFFFF"/>
+                </a:solidFill>
+                <a:latin typeface="Arial"/>
+                <a:ea typeface="Arial"/>
+                <a:cs typeface="Arial"/>
+              </a:rPr>
+              <a:t>WVU DSPIRA</a:t>
+            </a:r>
+          </a:p>
+        </p:txBody>
+      </p:sp>
+      <p:sp>
+        <p:nvSpPr>
+          <p:cNvPr id="373" name="WVU DSPIRA university"/>
+          <p:cNvSpPr>
+            <a:spLocks noGrp="1"/>
+          </p:cNvSpPr>
+          <p:nvPr/>
+        </p:nvSpPr>
+        <p:spPr>
+          <a:xfrm>
+            <a:off x="6286500" y="114300"/>
+            <a:ext cx="2628900" cy="171450"/>
+          </a:xfrm>
+          <a:prstGeom prst="rect">
+            <a:avLst/>
+          </a:prstGeom>
+          <a:noFill/>
+          <a:ln w="0">
+            <a:noFill/>
+          </a:ln>
+        </p:spPr>
+        <p:txBody>
+          <a:bodyPr>
+            <a:noAutofit/>
+          </a:bodyPr>
+          <a:lstStyle/>
+          <a:p>
+            <a:pPr algn="r">
+              <a:defRPr sz="900">
+                <a:solidFill>
+                  <a:srgbClr val="FFFFFF"/>
+                </a:solidFill>
+                <a:latin typeface="Arial"/>
+                <a:ea typeface="Arial"/>
+                <a:cs typeface="Arial"/>
+              </a:defRPr>
+            </a:pPr>
+            <a:r>
+              <a:rPr sz="900">
+                <a:solidFill>
+                  <a:srgbClr val="FFFFFF"/>
+                </a:solidFill>
+                <a:latin typeface="Arial"/>
+                <a:ea typeface="Arial"/>
+                <a:cs typeface="Arial"/>
+              </a:rPr>
+              <a:t>WEST VIRGINIA UNIVERSITY</a:t>
             </a:r>
           </a:p>
         </p:txBody>
@@ -31118,30 +32618,6 @@
       </p:sp>
       <p:sp>
         <p:nvSpPr>
-          <p:cNvPr id="371" name="DSPIRA 1"/>
-          <p:cNvSpPr>
-            <a:spLocks noGrp="1"/>
-          </p:cNvSpPr>
-          <p:nvPr/>
-        </p:nvSpPr>
-        <p:spPr>
-          <a:xfrm>
-            <a:off x="0" y="0"/>
-            <a:ext cx="9144000" cy="342900"/>
-          </a:xfrm>
-          <a:prstGeom prst="rect">
-            <a:avLst/>
-          </a:prstGeom>
-          <a:solidFill>
-            <a:srgbClr val="FFFFFF"/>
-          </a:solidFill>
-          <a:ln w="0">
-            <a:noFill/>
-          </a:ln>
-        </p:spPr>
-      </p:sp>
-      <p:sp>
-        <p:nvSpPr>
           <p:cNvPr id="372" name="DSPIRA 2"/>
           <p:cNvSpPr>
             <a:spLocks noGrp="1"/>
@@ -31163,57 +32639,6 @@
             <a:noFill/>
           </a:ln>
         </p:spPr>
-      </p:sp>
-      <p:sp>
-        <p:nvSpPr>
-          <p:cNvPr id="373" name="DSPIRA 3"/>
-          <p:cNvSpPr>
-            <a:spLocks noGrp="1"/>
-          </p:cNvSpPr>
-          <p:nvPr/>
-        </p:nvSpPr>
-        <p:spPr>
-          <a:xfrm>
-            <a:off x="228600" y="76200"/>
-            <a:ext cx="4762500" cy="228600"/>
-          </a:xfrm>
-          <a:prstGeom prst="rect">
-            <a:avLst/>
-          </a:prstGeom>
-          <a:noFill/>
-          <a:ln w="0">
-            <a:noFill/>
-          </a:ln>
-        </p:spPr>
-        <p:txBody>
-          <a:bodyPr>
-            <a:noAutofit/>
-          </a:bodyPr>
-          <a:lstStyle/>
-          <a:p>
-            <a:pPr>
-              <a:defRPr sz="1200" b="1">
-                <a:solidFill>
-                  <a:srgbClr val="002855"/>
-                </a:solidFill>
-                <a:latin typeface="Arial"/>
-                <a:ea typeface="Arial"/>
-                <a:cs typeface="Arial"/>
-              </a:defRPr>
-            </a:pPr>
-            <a:r>
-              <a:rPr sz="1200" b="1">
-                <a:solidFill>
-                  <a:srgbClr val="002855"/>
-                </a:solidFill>
-                <a:latin typeface="Arial"/>
-                <a:ea typeface="Arial"/>
-                <a:cs typeface="Arial"/>
-              </a:rPr>
-              <a:t>WVU DSPIRA</a:t>
-            </a:r>
-          </a:p>
-        </p:txBody>
       </p:sp>
       <p:sp>
         <p:nvSpPr>
@@ -31313,6 +32738,156 @@
                 <a:cs typeface="Arial"/>
               </a:rPr>
               <a:t>26 of 29</a:t>
+            </a:r>
+          </a:p>
+        </p:txBody>
+      </p:sp>
+      <p:sp>
+        <p:nvSpPr>
+          <p:cNvPr id="376" name="WVU DSPIRA navy band"/>
+          <p:cNvSpPr>
+            <a:spLocks noGrp="1"/>
+          </p:cNvSpPr>
+          <p:nvPr/>
+        </p:nvSpPr>
+        <p:spPr>
+          <a:xfrm>
+            <a:off x="0" y="0"/>
+            <a:ext cx="9144000" cy="323850"/>
+          </a:xfrm>
+          <a:prstGeom prst="rect">
+            <a:avLst/>
+          </a:prstGeom>
+          <a:solidFill>
+            <a:srgbClr val="002855"/>
+          </a:solidFill>
+          <a:ln w="0">
+            <a:noFill/>
+          </a:ln>
+        </p:spPr>
+      </p:sp>
+      <p:sp>
+        <p:nvSpPr>
+          <p:cNvPr id="377" name="WVU DSPIRA gold rule"/>
+          <p:cNvSpPr>
+            <a:spLocks noGrp="1"/>
+          </p:cNvSpPr>
+          <p:nvPr/>
+        </p:nvSpPr>
+        <p:spPr>
+          <a:xfrm>
+            <a:off x="0" y="323850"/>
+            <a:ext cx="9144000" cy="19050"/>
+          </a:xfrm>
+          <a:prstGeom prst="rect">
+            <a:avLst/>
+          </a:prstGeom>
+          <a:solidFill>
+            <a:srgbClr val="EEAA00"/>
+          </a:solidFill>
+          <a:ln w="0">
+            <a:noFill/>
+          </a:ln>
+        </p:spPr>
+      </p:sp>
+      <p:sp>
+        <p:nvSpPr>
+          <p:cNvPr id="378" name="WVU DSPIRA name"/>
+          <p:cNvSpPr>
+            <a:spLocks noGrp="1"/>
+          </p:cNvSpPr>
+          <p:nvPr/>
+        </p:nvSpPr>
+        <p:spPr>
+          <a:xfrm>
+            <a:off x="228600" y="19050"/>
+            <a:ext cx="2857500" cy="257175"/>
+          </a:xfrm>
+          <a:prstGeom prst="rect">
+            <a:avLst/>
+          </a:prstGeom>
+          <a:noFill/>
+          <a:ln w="0">
+            <a:noFill/>
+          </a:ln>
+        </p:spPr>
+        <p:txBody>
+          <a:bodyPr>
+            <a:noAutofit/>
+          </a:bodyPr>
+          <a:lstStyle/>
+          <a:p>
+            <a:pPr>
+              <a:defRPr sz="1600" b="1">
+                <a:solidFill>
+                  <a:srgbClr val="FFFFFF"/>
+                </a:solidFill>
+                <a:latin typeface="Arial"/>
+                <a:ea typeface="Arial"/>
+                <a:cs typeface="Arial"/>
+              </a:defRPr>
+            </a:pPr>
+            <a:r>
+              <a:rPr sz="1600" b="1">
+                <a:solidFill>
+                  <a:srgbClr val="FFFFFF"/>
+                </a:solidFill>
+                <a:latin typeface="Arial"/>
+                <a:ea typeface="Arial"/>
+                <a:cs typeface="Arial"/>
+              </a:rPr>
+              <a:t>WVU DSPIRA</a:t>
+            </a:r>
+          </a:p>
+        </p:txBody>
+      </p:sp>
+      <p:sp>
+        <p:nvSpPr>
+          <p:cNvPr id="379" name="WVU DSPIRA university"/>
+          <p:cNvSpPr>
+            <a:spLocks noGrp="1"/>
+          </p:cNvSpPr>
+          <p:nvPr/>
+        </p:nvSpPr>
+        <p:spPr>
+          <a:xfrm>
+            <a:off x="6286500" y="114300"/>
+            <a:ext cx="2628900" cy="171450"/>
+          </a:xfrm>
+          <a:prstGeom prst="rect">
+            <a:avLst/>
+          </a:prstGeom>
+          <a:noFill/>
+          <a:ln w="0">
+            <a:noFill/>
+          </a:ln>
+        </p:spPr>
+        <p:txBody>
+          <a:bodyPr>
+            <a:noAutofit/>
+          </a:bodyPr>
+          <a:lstStyle/>
+          <a:p>
+            <a:pPr algn="r">
+              <a:defRPr sz="900">
+                <a:solidFill>
+                  <a:srgbClr val="FFFFFF"/>
+                </a:solidFill>
+                <a:latin typeface="Arial"/>
+                <a:ea typeface="Arial"/>
+                <a:cs typeface="Arial"/>
+              </a:defRPr>
+            </a:pPr>
+            <a:r>
+              <a:rPr sz="900">
+                <a:solidFill>
+                  <a:srgbClr val="FFFFFF"/>
+                </a:solidFill>
+                <a:latin typeface="Arial"/>
+                <a:ea typeface="Arial"/>
+                <a:cs typeface="Arial"/>
+              </a:rPr>
+              <a:t>WEST VIRGINIA UNIVERSITY</a:t>
             </a:r>
           </a:p>
         </p:txBody>
@@ -31678,30 +33253,6 @@
       </p:sp>
       <p:sp>
         <p:nvSpPr>
-          <p:cNvPr id="378" name="DSPIRA 1"/>
-          <p:cNvSpPr>
-            <a:spLocks noGrp="1"/>
-          </p:cNvSpPr>
-          <p:nvPr/>
-        </p:nvSpPr>
-        <p:spPr>
-          <a:xfrm>
-            <a:off x="0" y="0"/>
-            <a:ext cx="9144000" cy="342900"/>
-          </a:xfrm>
-          <a:prstGeom prst="rect">
-            <a:avLst/>
-          </a:prstGeom>
-          <a:solidFill>
-            <a:srgbClr val="FFFFFF"/>
-          </a:solidFill>
-          <a:ln w="0">
-            <a:noFill/>
-          </a:ln>
-        </p:spPr>
-      </p:sp>
-      <p:sp>
-        <p:nvSpPr>
           <p:cNvPr id="379" name="DSPIRA 2"/>
           <p:cNvSpPr>
             <a:spLocks noGrp="1"/>
@@ -31723,57 +33274,6 @@
             <a:noFill/>
           </a:ln>
         </p:spPr>
-      </p:sp>
-      <p:sp>
-        <p:nvSpPr>
-          <p:cNvPr id="380" name="DSPIRA 3"/>
-          <p:cNvSpPr>
-            <a:spLocks noGrp="1"/>
-          </p:cNvSpPr>
-          <p:nvPr/>
-        </p:nvSpPr>
-        <p:spPr>
-          <a:xfrm>
-            <a:off x="228600" y="76200"/>
-            <a:ext cx="4762500" cy="228600"/>
-          </a:xfrm>
-          <a:prstGeom prst="rect">
-            <a:avLst/>
-          </a:prstGeom>
-          <a:noFill/>
-          <a:ln w="0">
-            <a:noFill/>
-          </a:ln>
-        </p:spPr>
-        <p:txBody>
-          <a:bodyPr>
-            <a:noAutofit/>
-          </a:bodyPr>
-          <a:lstStyle/>
-          <a:p>
-            <a:pPr>
-              <a:defRPr sz="1200" b="1">
-                <a:solidFill>
-                  <a:srgbClr val="002855"/>
-                </a:solidFill>
-                <a:latin typeface="Arial"/>
-                <a:ea typeface="Arial"/>
-                <a:cs typeface="Arial"/>
-              </a:defRPr>
-            </a:pPr>
-            <a:r>
-              <a:rPr sz="1200" b="1">
-                <a:solidFill>
-                  <a:srgbClr val="002855"/>
-                </a:solidFill>
-                <a:latin typeface="Arial"/>
-                <a:ea typeface="Arial"/>
-                <a:cs typeface="Arial"/>
-              </a:rPr>
-              <a:t>WVU DSPIRA</a:t>
-            </a:r>
-          </a:p>
-        </p:txBody>
       </p:sp>
       <p:sp>
         <p:nvSpPr>
@@ -31873,6 +33373,156 @@
                 <a:cs typeface="Arial"/>
               </a:rPr>
               <a:t>27 of 29</a:t>
+            </a:r>
+          </a:p>
+        </p:txBody>
+      </p:sp>
+      <p:sp>
+        <p:nvSpPr>
+          <p:cNvPr id="383" name="WVU DSPIRA navy band"/>
+          <p:cNvSpPr>
+            <a:spLocks noGrp="1"/>
+          </p:cNvSpPr>
+          <p:nvPr/>
+        </p:nvSpPr>
+        <p:spPr>
+          <a:xfrm>
+            <a:off x="0" y="0"/>
+            <a:ext cx="9144000" cy="323850"/>
+          </a:xfrm>
+          <a:prstGeom prst="rect">
+            <a:avLst/>
+          </a:prstGeom>
+          <a:solidFill>
+            <a:srgbClr val="002855"/>
+          </a:solidFill>
+          <a:ln w="0">
+            <a:noFill/>
+          </a:ln>
+        </p:spPr>
+      </p:sp>
+      <p:sp>
+        <p:nvSpPr>
+          <p:cNvPr id="384" name="WVU DSPIRA gold rule"/>
+          <p:cNvSpPr>
+            <a:spLocks noGrp="1"/>
+          </p:cNvSpPr>
+          <p:nvPr/>
+        </p:nvSpPr>
+        <p:spPr>
+          <a:xfrm>
+            <a:off x="0" y="323850"/>
+            <a:ext cx="9144000" cy="19050"/>
+          </a:xfrm>
+          <a:prstGeom prst="rect">
+            <a:avLst/>
+          </a:prstGeom>
+          <a:solidFill>
+            <a:srgbClr val="EEAA00"/>
+          </a:solidFill>
+          <a:ln w="0">
+            <a:noFill/>
+          </a:ln>
+        </p:spPr>
+      </p:sp>
+      <p:sp>
+        <p:nvSpPr>
+          <p:cNvPr id="385" name="WVU DSPIRA name"/>
+          <p:cNvSpPr>
+            <a:spLocks noGrp="1"/>
+          </p:cNvSpPr>
+          <p:nvPr/>
+        </p:nvSpPr>
+        <p:spPr>
+          <a:xfrm>
+            <a:off x="228600" y="19050"/>
+            <a:ext cx="2857500" cy="257175"/>
+          </a:xfrm>
+          <a:prstGeom prst="rect">
+            <a:avLst/>
+          </a:prstGeom>
+          <a:noFill/>
+          <a:ln w="0">
+            <a:noFill/>
+          </a:ln>
+        </p:spPr>
+        <p:txBody>
+          <a:bodyPr>
+            <a:noAutofit/>
+          </a:bodyPr>
+          <a:lstStyle/>
+          <a:p>
+            <a:pPr>
+              <a:defRPr sz="1600" b="1">
+                <a:solidFill>
+                  <a:srgbClr val="FFFFFF"/>
+                </a:solidFill>
+                <a:latin typeface="Arial"/>
+                <a:ea typeface="Arial"/>
+                <a:cs typeface="Arial"/>
+              </a:defRPr>
+            </a:pPr>
+            <a:r>
+              <a:rPr sz="1600" b="1">
+                <a:solidFill>
+                  <a:srgbClr val="FFFFFF"/>
+                </a:solidFill>
+                <a:latin typeface="Arial"/>
+                <a:ea typeface="Arial"/>
+                <a:cs typeface="Arial"/>
+              </a:rPr>
+              <a:t>WVU DSPIRA</a:t>
+            </a:r>
+          </a:p>
+        </p:txBody>
+      </p:sp>
+      <p:sp>
+        <p:nvSpPr>
+          <p:cNvPr id="386" name="WVU DSPIRA university"/>
+          <p:cNvSpPr>
+            <a:spLocks noGrp="1"/>
+          </p:cNvSpPr>
+          <p:nvPr/>
+        </p:nvSpPr>
+        <p:spPr>
+          <a:xfrm>
+            <a:off x="6286500" y="114300"/>
+            <a:ext cx="2628900" cy="171450"/>
+          </a:xfrm>
+          <a:prstGeom prst="rect">
+            <a:avLst/>
+          </a:prstGeom>
+          <a:noFill/>
+          <a:ln w="0">
+            <a:noFill/>
+          </a:ln>
+        </p:spPr>
+        <p:txBody>
+          <a:bodyPr>
+            <a:noAutofit/>
+          </a:bodyPr>
+          <a:lstStyle/>
+          <a:p>
+            <a:pPr algn="r">
+              <a:defRPr sz="900">
+                <a:solidFill>
+                  <a:srgbClr val="FFFFFF"/>
+                </a:solidFill>
+                <a:latin typeface="Arial"/>
+                <a:ea typeface="Arial"/>
+                <a:cs typeface="Arial"/>
+              </a:defRPr>
+            </a:pPr>
+            <a:r>
+              <a:rPr sz="900">
+                <a:solidFill>
+                  <a:srgbClr val="FFFFFF"/>
+                </a:solidFill>
+                <a:latin typeface="Arial"/>
+                <a:ea typeface="Arial"/>
+                <a:cs typeface="Arial"/>
+              </a:rPr>
+              <a:t>WEST VIRGINIA UNIVERSITY</a:t>
             </a:r>
           </a:p>
         </p:txBody>
@@ -32190,30 +33840,6 @@
       </p:sp>
       <p:sp>
         <p:nvSpPr>
-          <p:cNvPr id="187" name="DSPIRA 1"/>
-          <p:cNvSpPr>
-            <a:spLocks noGrp="1"/>
-          </p:cNvSpPr>
-          <p:nvPr/>
-        </p:nvSpPr>
-        <p:spPr>
-          <a:xfrm>
-            <a:off x="0" y="0"/>
-            <a:ext cx="9144000" cy="342900"/>
-          </a:xfrm>
-          <a:prstGeom prst="rect">
-            <a:avLst/>
-          </a:prstGeom>
-          <a:solidFill>
-            <a:srgbClr val="FFFFFF"/>
-          </a:solidFill>
-          <a:ln w="0">
-            <a:noFill/>
-          </a:ln>
-        </p:spPr>
-      </p:sp>
-      <p:sp>
-        <p:nvSpPr>
           <p:cNvPr id="188" name="DSPIRA 2"/>
           <p:cNvSpPr>
             <a:spLocks noGrp="1"/>
@@ -32235,57 +33861,6 @@
             <a:noFill/>
           </a:ln>
         </p:spPr>
-      </p:sp>
-      <p:sp>
-        <p:nvSpPr>
-          <p:cNvPr id="189" name="DSPIRA 3"/>
-          <p:cNvSpPr>
-            <a:spLocks noGrp="1"/>
-          </p:cNvSpPr>
-          <p:nvPr/>
-        </p:nvSpPr>
-        <p:spPr>
-          <a:xfrm>
-            <a:off x="228600" y="76200"/>
-            <a:ext cx="4762500" cy="228600"/>
-          </a:xfrm>
-          <a:prstGeom prst="rect">
-            <a:avLst/>
-          </a:prstGeom>
-          <a:noFill/>
-          <a:ln w="0">
-            <a:noFill/>
-          </a:ln>
-        </p:spPr>
-        <p:txBody>
-          <a:bodyPr>
-            <a:noAutofit/>
-          </a:bodyPr>
-          <a:lstStyle/>
-          <a:p>
-            <a:pPr>
-              <a:defRPr sz="1200" b="1">
-                <a:solidFill>
-                  <a:srgbClr val="002855"/>
-                </a:solidFill>
-                <a:latin typeface="Arial"/>
-                <a:ea typeface="Arial"/>
-                <a:cs typeface="Arial"/>
-              </a:defRPr>
-            </a:pPr>
-            <a:r>
-              <a:rPr sz="1200" b="1">
-                <a:solidFill>
-                  <a:srgbClr val="002855"/>
-                </a:solidFill>
-                <a:latin typeface="Arial"/>
-                <a:ea typeface="Arial"/>
-                <a:cs typeface="Arial"/>
-              </a:rPr>
-              <a:t>WVU DSPIRA</a:t>
-            </a:r>
-          </a:p>
-        </p:txBody>
       </p:sp>
       <p:sp>
         <p:nvSpPr>
@@ -32385,6 +33960,156 @@
                 <a:cs typeface="Arial"/>
               </a:rPr>
               <a:t>3 of 29</a:t>
+            </a:r>
+          </a:p>
+        </p:txBody>
+      </p:sp>
+      <p:sp>
+        <p:nvSpPr>
+          <p:cNvPr id="192" name="WVU DSPIRA navy band"/>
+          <p:cNvSpPr>
+            <a:spLocks noGrp="1"/>
+          </p:cNvSpPr>
+          <p:nvPr/>
+        </p:nvSpPr>
+        <p:spPr>
+          <a:xfrm>
+            <a:off x="0" y="0"/>
+            <a:ext cx="9144000" cy="323850"/>
+          </a:xfrm>
+          <a:prstGeom prst="rect">
+            <a:avLst/>
+          </a:prstGeom>
+          <a:solidFill>
+            <a:srgbClr val="002855"/>
+          </a:solidFill>
+          <a:ln w="0">
+            <a:noFill/>
+          </a:ln>
+        </p:spPr>
+      </p:sp>
+      <p:sp>
+        <p:nvSpPr>
+          <p:cNvPr id="193" name="WVU DSPIRA gold rule"/>
+          <p:cNvSpPr>
+            <a:spLocks noGrp="1"/>
+          </p:cNvSpPr>
+          <p:nvPr/>
+        </p:nvSpPr>
+        <p:spPr>
+          <a:xfrm>
+            <a:off x="0" y="323850"/>
+            <a:ext cx="9144000" cy="19050"/>
+          </a:xfrm>
+          <a:prstGeom prst="rect">
+            <a:avLst/>
+          </a:prstGeom>
+          <a:solidFill>
+            <a:srgbClr val="EEAA00"/>
+          </a:solidFill>
+          <a:ln w="0">
+            <a:noFill/>
+          </a:ln>
+        </p:spPr>
+      </p:sp>
+      <p:sp>
+        <p:nvSpPr>
+          <p:cNvPr id="194" name="WVU DSPIRA name"/>
+          <p:cNvSpPr>
+            <a:spLocks noGrp="1"/>
+          </p:cNvSpPr>
+          <p:nvPr/>
+        </p:nvSpPr>
+        <p:spPr>
+          <a:xfrm>
+            <a:off x="228600" y="19050"/>
+            <a:ext cx="2857500" cy="257175"/>
+          </a:xfrm>
+          <a:prstGeom prst="rect">
+            <a:avLst/>
+          </a:prstGeom>
+          <a:noFill/>
+          <a:ln w="0">
+            <a:noFill/>
+          </a:ln>
+        </p:spPr>
+        <p:txBody>
+          <a:bodyPr>
+            <a:noAutofit/>
+          </a:bodyPr>
+          <a:lstStyle/>
+          <a:p>
+            <a:pPr>
+              <a:defRPr sz="1600" b="1">
+                <a:solidFill>
+                  <a:srgbClr val="FFFFFF"/>
+                </a:solidFill>
+                <a:latin typeface="Arial"/>
+                <a:ea typeface="Arial"/>
+                <a:cs typeface="Arial"/>
+              </a:defRPr>
+            </a:pPr>
+            <a:r>
+              <a:rPr sz="1600" b="1">
+                <a:solidFill>
+                  <a:srgbClr val="FFFFFF"/>
+                </a:solidFill>
+                <a:latin typeface="Arial"/>
+                <a:ea typeface="Arial"/>
+                <a:cs typeface="Arial"/>
+              </a:rPr>
+              <a:t>WVU DSPIRA</a:t>
+            </a:r>
+          </a:p>
+        </p:txBody>
+      </p:sp>
+      <p:sp>
+        <p:nvSpPr>
+          <p:cNvPr id="195" name="WVU DSPIRA university"/>
+          <p:cNvSpPr>
+            <a:spLocks noGrp="1"/>
+          </p:cNvSpPr>
+          <p:nvPr/>
+        </p:nvSpPr>
+        <p:spPr>
+          <a:xfrm>
+            <a:off x="6286500" y="114300"/>
+            <a:ext cx="2628900" cy="171450"/>
+          </a:xfrm>
+          <a:prstGeom prst="rect">
+            <a:avLst/>
+          </a:prstGeom>
+          <a:noFill/>
+          <a:ln w="0">
+            <a:noFill/>
+          </a:ln>
+        </p:spPr>
+        <p:txBody>
+          <a:bodyPr>
+            <a:noAutofit/>
+          </a:bodyPr>
+          <a:lstStyle/>
+          <a:p>
+            <a:pPr algn="r">
+              <a:defRPr sz="900">
+                <a:solidFill>
+                  <a:srgbClr val="FFFFFF"/>
+                </a:solidFill>
+                <a:latin typeface="Arial"/>
+                <a:ea typeface="Arial"/>
+                <a:cs typeface="Arial"/>
+              </a:defRPr>
+            </a:pPr>
+            <a:r>
+              <a:rPr sz="900">
+                <a:solidFill>
+                  <a:srgbClr val="FFFFFF"/>
+                </a:solidFill>
+                <a:latin typeface="Arial"/>
+                <a:ea typeface="Arial"/>
+                <a:cs typeface="Arial"/>
+              </a:rPr>
+              <a:t>WEST VIRGINIA UNIVERSITY</a:t>
             </a:r>
           </a:p>
         </p:txBody>
@@ -32626,30 +34351,6 @@
       </p:pic>
       <p:sp>
         <p:nvSpPr>
-          <p:cNvPr id="385" name="DSPIRA 1"/>
-          <p:cNvSpPr>
-            <a:spLocks noGrp="1"/>
-          </p:cNvSpPr>
-          <p:nvPr/>
-        </p:nvSpPr>
-        <p:spPr>
-          <a:xfrm>
-            <a:off x="0" y="0"/>
-            <a:ext cx="9144000" cy="342900"/>
-          </a:xfrm>
-          <a:prstGeom prst="rect">
-            <a:avLst/>
-          </a:prstGeom>
-          <a:solidFill>
-            <a:srgbClr val="FFFFFF"/>
-          </a:solidFill>
-          <a:ln w="0">
-            <a:noFill/>
-          </a:ln>
-        </p:spPr>
-      </p:sp>
-      <p:sp>
-        <p:nvSpPr>
           <p:cNvPr id="386" name="DSPIRA 2"/>
           <p:cNvSpPr>
             <a:spLocks noGrp="1"/>
@@ -32671,57 +34372,6 @@
             <a:noFill/>
           </a:ln>
         </p:spPr>
-      </p:sp>
-      <p:sp>
-        <p:nvSpPr>
-          <p:cNvPr id="387" name="DSPIRA 3"/>
-          <p:cNvSpPr>
-            <a:spLocks noGrp="1"/>
-          </p:cNvSpPr>
-          <p:nvPr/>
-        </p:nvSpPr>
-        <p:spPr>
-          <a:xfrm>
-            <a:off x="228600" y="76200"/>
-            <a:ext cx="4762500" cy="228600"/>
-          </a:xfrm>
-          <a:prstGeom prst="rect">
-            <a:avLst/>
-          </a:prstGeom>
-          <a:noFill/>
-          <a:ln w="0">
-            <a:noFill/>
-          </a:ln>
-        </p:spPr>
-        <p:txBody>
-          <a:bodyPr>
-            <a:noAutofit/>
-          </a:bodyPr>
-          <a:lstStyle/>
-          <a:p>
-            <a:pPr>
-              <a:defRPr sz="1200" b="1">
-                <a:solidFill>
-                  <a:srgbClr val="002855"/>
-                </a:solidFill>
-                <a:latin typeface="Arial"/>
-                <a:ea typeface="Arial"/>
-                <a:cs typeface="Arial"/>
-              </a:defRPr>
-            </a:pPr>
-            <a:r>
-              <a:rPr sz="1200" b="1">
-                <a:solidFill>
-                  <a:srgbClr val="002855"/>
-                </a:solidFill>
-                <a:latin typeface="Arial"/>
-                <a:ea typeface="Arial"/>
-                <a:cs typeface="Arial"/>
-              </a:rPr>
-              <a:t>WVU DSPIRA</a:t>
-            </a:r>
-          </a:p>
-        </p:txBody>
       </p:sp>
       <p:sp>
         <p:nvSpPr>
@@ -32821,6 +34471,156 @@
                 <a:cs typeface="Arial"/>
               </a:rPr>
               <a:t>28 of 29</a:t>
+            </a:r>
+          </a:p>
+        </p:txBody>
+      </p:sp>
+      <p:sp>
+        <p:nvSpPr>
+          <p:cNvPr id="390" name="WVU DSPIRA navy band"/>
+          <p:cNvSpPr>
+            <a:spLocks noGrp="1"/>
+          </p:cNvSpPr>
+          <p:nvPr/>
+        </p:nvSpPr>
+        <p:spPr>
+          <a:xfrm>
+            <a:off x="0" y="0"/>
+            <a:ext cx="9144000" cy="323850"/>
+          </a:xfrm>
+          <a:prstGeom prst="rect">
+            <a:avLst/>
+          </a:prstGeom>
+          <a:solidFill>
+            <a:srgbClr val="002855"/>
+          </a:solidFill>
+          <a:ln w="0">
+            <a:noFill/>
+          </a:ln>
+        </p:spPr>
+      </p:sp>
+      <p:sp>
+        <p:nvSpPr>
+          <p:cNvPr id="391" name="WVU DSPIRA gold rule"/>
+          <p:cNvSpPr>
+            <a:spLocks noGrp="1"/>
+          </p:cNvSpPr>
+          <p:nvPr/>
+        </p:nvSpPr>
+        <p:spPr>
+          <a:xfrm>
+            <a:off x="0" y="323850"/>
+            <a:ext cx="9144000" cy="19050"/>
+          </a:xfrm>
+          <a:prstGeom prst="rect">
+            <a:avLst/>
+          </a:prstGeom>
+          <a:solidFill>
+            <a:srgbClr val="EEAA00"/>
+          </a:solidFill>
+          <a:ln w="0">
+            <a:noFill/>
+          </a:ln>
+        </p:spPr>
+      </p:sp>
+      <p:sp>
+        <p:nvSpPr>
+          <p:cNvPr id="392" name="WVU DSPIRA name"/>
+          <p:cNvSpPr>
+            <a:spLocks noGrp="1"/>
+          </p:cNvSpPr>
+          <p:nvPr/>
+        </p:nvSpPr>
+        <p:spPr>
+          <a:xfrm>
+            <a:off x="228600" y="19050"/>
+            <a:ext cx="2857500" cy="257175"/>
+          </a:xfrm>
+          <a:prstGeom prst="rect">
+            <a:avLst/>
+          </a:prstGeom>
+          <a:noFill/>
+          <a:ln w="0">
+            <a:noFill/>
+          </a:ln>
+        </p:spPr>
+        <p:txBody>
+          <a:bodyPr>
+            <a:noAutofit/>
+          </a:bodyPr>
+          <a:lstStyle/>
+          <a:p>
+            <a:pPr>
+              <a:defRPr sz="1600" b="1">
+                <a:solidFill>
+                  <a:srgbClr val="FFFFFF"/>
+                </a:solidFill>
+                <a:latin typeface="Arial"/>
+                <a:ea typeface="Arial"/>
+                <a:cs typeface="Arial"/>
+              </a:defRPr>
+            </a:pPr>
+            <a:r>
+              <a:rPr sz="1600" b="1">
+                <a:solidFill>
+                  <a:srgbClr val="FFFFFF"/>
+                </a:solidFill>
+                <a:latin typeface="Arial"/>
+                <a:ea typeface="Arial"/>
+                <a:cs typeface="Arial"/>
+              </a:rPr>
+              <a:t>WVU DSPIRA</a:t>
+            </a:r>
+          </a:p>
+        </p:txBody>
+      </p:sp>
+      <p:sp>
+        <p:nvSpPr>
+          <p:cNvPr id="393" name="WVU DSPIRA university"/>
+          <p:cNvSpPr>
+            <a:spLocks noGrp="1"/>
+          </p:cNvSpPr>
+          <p:nvPr/>
+        </p:nvSpPr>
+        <p:spPr>
+          <a:xfrm>
+            <a:off x="6286500" y="114300"/>
+            <a:ext cx="2628900" cy="171450"/>
+          </a:xfrm>
+          <a:prstGeom prst="rect">
+            <a:avLst/>
+          </a:prstGeom>
+          <a:noFill/>
+          <a:ln w="0">
+            <a:noFill/>
+          </a:ln>
+        </p:spPr>
+        <p:txBody>
+          <a:bodyPr>
+            <a:noAutofit/>
+          </a:bodyPr>
+          <a:lstStyle/>
+          <a:p>
+            <a:pPr algn="r">
+              <a:defRPr sz="900">
+                <a:solidFill>
+                  <a:srgbClr val="FFFFFF"/>
+                </a:solidFill>
+                <a:latin typeface="Arial"/>
+                <a:ea typeface="Arial"/>
+                <a:cs typeface="Arial"/>
+              </a:defRPr>
+            </a:pPr>
+            <a:r>
+              <a:rPr sz="900">
+                <a:solidFill>
+                  <a:srgbClr val="FFFFFF"/>
+                </a:solidFill>
+                <a:latin typeface="Arial"/>
+                <a:ea typeface="Arial"/>
+                <a:cs typeface="Arial"/>
+              </a:rPr>
+              <a:t>WEST VIRGINIA UNIVERSITY</a:t>
             </a:r>
           </a:p>
         </p:txBody>
@@ -33108,30 +34908,6 @@
       </p:sp>
       <p:sp>
         <p:nvSpPr>
-          <p:cNvPr id="391" name="DSPIRA 1"/>
-          <p:cNvSpPr>
-            <a:spLocks noGrp="1"/>
-          </p:cNvSpPr>
-          <p:nvPr/>
-        </p:nvSpPr>
-        <p:spPr>
-          <a:xfrm>
-            <a:off x="0" y="0"/>
-            <a:ext cx="9144000" cy="342900"/>
-          </a:xfrm>
-          <a:prstGeom prst="rect">
-            <a:avLst/>
-          </a:prstGeom>
-          <a:solidFill>
-            <a:srgbClr val="FFFFFF"/>
-          </a:solidFill>
-          <a:ln w="0">
-            <a:noFill/>
-          </a:ln>
-        </p:spPr>
-      </p:sp>
-      <p:sp>
-        <p:nvSpPr>
           <p:cNvPr id="392" name="DSPIRA 2"/>
           <p:cNvSpPr>
             <a:spLocks noGrp="1"/>
@@ -33153,57 +34929,6 @@
             <a:noFill/>
           </a:ln>
         </p:spPr>
-      </p:sp>
-      <p:sp>
-        <p:nvSpPr>
-          <p:cNvPr id="393" name="DSPIRA 3"/>
-          <p:cNvSpPr>
-            <a:spLocks noGrp="1"/>
-          </p:cNvSpPr>
-          <p:nvPr/>
-        </p:nvSpPr>
-        <p:spPr>
-          <a:xfrm>
-            <a:off x="228600" y="76200"/>
-            <a:ext cx="4762500" cy="228600"/>
-          </a:xfrm>
-          <a:prstGeom prst="rect">
-            <a:avLst/>
-          </a:prstGeom>
-          <a:noFill/>
-          <a:ln w="0">
-            <a:noFill/>
-          </a:ln>
-        </p:spPr>
-        <p:txBody>
-          <a:bodyPr>
-            <a:noAutofit/>
-          </a:bodyPr>
-          <a:lstStyle/>
-          <a:p>
-            <a:pPr>
-              <a:defRPr sz="1200" b="1">
-                <a:solidFill>
-                  <a:srgbClr val="002855"/>
-                </a:solidFill>
-                <a:latin typeface="Arial"/>
-                <a:ea typeface="Arial"/>
-                <a:cs typeface="Arial"/>
-              </a:defRPr>
-            </a:pPr>
-            <a:r>
-              <a:rPr sz="1200" b="1">
-                <a:solidFill>
-                  <a:srgbClr val="002855"/>
-                </a:solidFill>
-                <a:latin typeface="Arial"/>
-                <a:ea typeface="Arial"/>
-                <a:cs typeface="Arial"/>
-              </a:rPr>
-              <a:t>WVU DSPIRA</a:t>
-            </a:r>
-          </a:p>
-        </p:txBody>
       </p:sp>
       <p:sp>
         <p:nvSpPr>
@@ -33303,6 +35028,156 @@
                 <a:cs typeface="Arial"/>
               </a:rPr>
               <a:t>29 of 29</a:t>
+            </a:r>
+          </a:p>
+        </p:txBody>
+      </p:sp>
+      <p:sp>
+        <p:nvSpPr>
+          <p:cNvPr id="396" name="WVU DSPIRA navy band"/>
+          <p:cNvSpPr>
+            <a:spLocks noGrp="1"/>
+          </p:cNvSpPr>
+          <p:nvPr/>
+        </p:nvSpPr>
+        <p:spPr>
+          <a:xfrm>
+            <a:off x="0" y="0"/>
+            <a:ext cx="9144000" cy="323850"/>
+          </a:xfrm>
+          <a:prstGeom prst="rect">
+            <a:avLst/>
+          </a:prstGeom>
+          <a:solidFill>
+            <a:srgbClr val="002855"/>
+          </a:solidFill>
+          <a:ln w="0">
+            <a:noFill/>
+          </a:ln>
+        </p:spPr>
+      </p:sp>
+      <p:sp>
+        <p:nvSpPr>
+          <p:cNvPr id="397" name="WVU DSPIRA gold rule"/>
+          <p:cNvSpPr>
+            <a:spLocks noGrp="1"/>
+          </p:cNvSpPr>
+          <p:nvPr/>
+        </p:nvSpPr>
+        <p:spPr>
+          <a:xfrm>
+            <a:off x="0" y="323850"/>
+            <a:ext cx="9144000" cy="19050"/>
+          </a:xfrm>
+          <a:prstGeom prst="rect">
+            <a:avLst/>
+          </a:prstGeom>
+          <a:solidFill>
+            <a:srgbClr val="EEAA00"/>
+          </a:solidFill>
+          <a:ln w="0">
+            <a:noFill/>
+          </a:ln>
+        </p:spPr>
+      </p:sp>
+      <p:sp>
+        <p:nvSpPr>
+          <p:cNvPr id="398" name="WVU DSPIRA name"/>
+          <p:cNvSpPr>
+            <a:spLocks noGrp="1"/>
+          </p:cNvSpPr>
+          <p:nvPr/>
+        </p:nvSpPr>
+        <p:spPr>
+          <a:xfrm>
+            <a:off x="228600" y="19050"/>
+            <a:ext cx="2857500" cy="257175"/>
+          </a:xfrm>
+          <a:prstGeom prst="rect">
+            <a:avLst/>
+          </a:prstGeom>
+          <a:noFill/>
+          <a:ln w="0">
+            <a:noFill/>
+          </a:ln>
+        </p:spPr>
+        <p:txBody>
+          <a:bodyPr>
+            <a:noAutofit/>
+          </a:bodyPr>
+          <a:lstStyle/>
+          <a:p>
+            <a:pPr>
+              <a:defRPr sz="1600" b="1">
+                <a:solidFill>
+                  <a:srgbClr val="FFFFFF"/>
+                </a:solidFill>
+                <a:latin typeface="Arial"/>
+                <a:ea typeface="Arial"/>
+                <a:cs typeface="Arial"/>
+              </a:defRPr>
+            </a:pPr>
+            <a:r>
+              <a:rPr sz="1600" b="1">
+                <a:solidFill>
+                  <a:srgbClr val="FFFFFF"/>
+                </a:solidFill>
+                <a:latin typeface="Arial"/>
+                <a:ea typeface="Arial"/>
+                <a:cs typeface="Arial"/>
+              </a:rPr>
+              <a:t>WVU DSPIRA</a:t>
+            </a:r>
+          </a:p>
+        </p:txBody>
+      </p:sp>
+      <p:sp>
+        <p:nvSpPr>
+          <p:cNvPr id="399" name="WVU DSPIRA university"/>
+          <p:cNvSpPr>
+            <a:spLocks noGrp="1"/>
+          </p:cNvSpPr>
+          <p:nvPr/>
+        </p:nvSpPr>
+        <p:spPr>
+          <a:xfrm>
+            <a:off x="6286500" y="114300"/>
+            <a:ext cx="2628900" cy="171450"/>
+          </a:xfrm>
+          <a:prstGeom prst="rect">
+            <a:avLst/>
+          </a:prstGeom>
+          <a:noFill/>
+          <a:ln w="0">
+            <a:noFill/>
+          </a:ln>
+        </p:spPr>
+        <p:txBody>
+          <a:bodyPr>
+            <a:noAutofit/>
+          </a:bodyPr>
+          <a:lstStyle/>
+          <a:p>
+            <a:pPr algn="r">
+              <a:defRPr sz="900">
+                <a:solidFill>
+                  <a:srgbClr val="FFFFFF"/>
+                </a:solidFill>
+                <a:latin typeface="Arial"/>
+                <a:ea typeface="Arial"/>
+                <a:cs typeface="Arial"/>
+              </a:defRPr>
+            </a:pPr>
+            <a:r>
+              <a:rPr sz="900">
+                <a:solidFill>
+                  <a:srgbClr val="FFFFFF"/>
+                </a:solidFill>
+                <a:latin typeface="Arial"/>
+                <a:ea typeface="Arial"/>
+                <a:cs typeface="Arial"/>
+              </a:rPr>
+              <a:t>WEST VIRGINIA UNIVERSITY</a:t>
             </a:r>
           </a:p>
         </p:txBody>
@@ -33565,30 +35440,6 @@
       </p:sp>
       <p:sp>
         <p:nvSpPr>
-          <p:cNvPr id="397" name="DSPIRA 1"/>
-          <p:cNvSpPr>
-            <a:spLocks noGrp="1"/>
-          </p:cNvSpPr>
-          <p:nvPr/>
-        </p:nvSpPr>
-        <p:spPr>
-          <a:xfrm>
-            <a:off x="0" y="0"/>
-            <a:ext cx="9144000" cy="342900"/>
-          </a:xfrm>
-          <a:prstGeom prst="rect">
-            <a:avLst/>
-          </a:prstGeom>
-          <a:solidFill>
-            <a:srgbClr val="FFFFFF"/>
-          </a:solidFill>
-          <a:ln w="0">
-            <a:noFill/>
-          </a:ln>
-        </p:spPr>
-      </p:sp>
-      <p:sp>
-        <p:nvSpPr>
           <p:cNvPr id="398" name="DSPIRA 2"/>
           <p:cNvSpPr>
             <a:spLocks noGrp="1"/>
@@ -33610,57 +35461,6 @@
             <a:noFill/>
           </a:ln>
         </p:spPr>
-      </p:sp>
-      <p:sp>
-        <p:nvSpPr>
-          <p:cNvPr id="399" name="DSPIRA 3"/>
-          <p:cNvSpPr>
-            <a:spLocks noGrp="1"/>
-          </p:cNvSpPr>
-          <p:nvPr/>
-        </p:nvSpPr>
-        <p:spPr>
-          <a:xfrm>
-            <a:off x="228600" y="76200"/>
-            <a:ext cx="4762500" cy="228600"/>
-          </a:xfrm>
-          <a:prstGeom prst="rect">
-            <a:avLst/>
-          </a:prstGeom>
-          <a:noFill/>
-          <a:ln w="0">
-            <a:noFill/>
-          </a:ln>
-        </p:spPr>
-        <p:txBody>
-          <a:bodyPr>
-            <a:noAutofit/>
-          </a:bodyPr>
-          <a:lstStyle/>
-          <a:p>
-            <a:pPr>
-              <a:defRPr sz="1200" b="1">
-                <a:solidFill>
-                  <a:srgbClr val="002855"/>
-                </a:solidFill>
-                <a:latin typeface="Arial"/>
-                <a:ea typeface="Arial"/>
-                <a:cs typeface="Arial"/>
-              </a:defRPr>
-            </a:pPr>
-            <a:r>
-              <a:rPr sz="1200" b="1">
-                <a:solidFill>
-                  <a:srgbClr val="002855"/>
-                </a:solidFill>
-                <a:latin typeface="Arial"/>
-                <a:ea typeface="Arial"/>
-                <a:cs typeface="Arial"/>
-              </a:rPr>
-              <a:t>WVU DSPIRA</a:t>
-            </a:r>
-          </a:p>
-        </p:txBody>
       </p:sp>
       <p:sp>
         <p:nvSpPr>
@@ -33760,6 +35560,156 @@
                 <a:cs typeface="Arial"/>
               </a:rPr>
               <a:t>Supplemental</a:t>
+            </a:r>
+          </a:p>
+        </p:txBody>
+      </p:sp>
+      <p:sp>
+        <p:nvSpPr>
+          <p:cNvPr id="402" name="WVU DSPIRA navy band"/>
+          <p:cNvSpPr>
+            <a:spLocks noGrp="1"/>
+          </p:cNvSpPr>
+          <p:nvPr/>
+        </p:nvSpPr>
+        <p:spPr>
+          <a:xfrm>
+            <a:off x="0" y="0"/>
+            <a:ext cx="9144000" cy="323850"/>
+          </a:xfrm>
+          <a:prstGeom prst="rect">
+            <a:avLst/>
+          </a:prstGeom>
+          <a:solidFill>
+            <a:srgbClr val="002855"/>
+          </a:solidFill>
+          <a:ln w="0">
+            <a:noFill/>
+          </a:ln>
+        </p:spPr>
+      </p:sp>
+      <p:sp>
+        <p:nvSpPr>
+          <p:cNvPr id="403" name="WVU DSPIRA gold rule"/>
+          <p:cNvSpPr>
+            <a:spLocks noGrp="1"/>
+          </p:cNvSpPr>
+          <p:nvPr/>
+        </p:nvSpPr>
+        <p:spPr>
+          <a:xfrm>
+            <a:off x="0" y="323850"/>
+            <a:ext cx="9144000" cy="19050"/>
+          </a:xfrm>
+          <a:prstGeom prst="rect">
+            <a:avLst/>
+          </a:prstGeom>
+          <a:solidFill>
+            <a:srgbClr val="EEAA00"/>
+          </a:solidFill>
+          <a:ln w="0">
+            <a:noFill/>
+          </a:ln>
+        </p:spPr>
+      </p:sp>
+      <p:sp>
+        <p:nvSpPr>
+          <p:cNvPr id="404" name="WVU DSPIRA name"/>
+          <p:cNvSpPr>
+            <a:spLocks noGrp="1"/>
+          </p:cNvSpPr>
+          <p:nvPr/>
+        </p:nvSpPr>
+        <p:spPr>
+          <a:xfrm>
+            <a:off x="228600" y="19050"/>
+            <a:ext cx="2857500" cy="257175"/>
+          </a:xfrm>
+          <a:prstGeom prst="rect">
+            <a:avLst/>
+          </a:prstGeom>
+          <a:noFill/>
+          <a:ln w="0">
+            <a:noFill/>
+          </a:ln>
+        </p:spPr>
+        <p:txBody>
+          <a:bodyPr>
+            <a:noAutofit/>
+          </a:bodyPr>
+          <a:lstStyle/>
+          <a:p>
+            <a:pPr>
+              <a:defRPr sz="1600" b="1">
+                <a:solidFill>
+                  <a:srgbClr val="FFFFFF"/>
+                </a:solidFill>
+                <a:latin typeface="Arial"/>
+                <a:ea typeface="Arial"/>
+                <a:cs typeface="Arial"/>
+              </a:defRPr>
+            </a:pPr>
+            <a:r>
+              <a:rPr sz="1600" b="1">
+                <a:solidFill>
+                  <a:srgbClr val="FFFFFF"/>
+                </a:solidFill>
+                <a:latin typeface="Arial"/>
+                <a:ea typeface="Arial"/>
+                <a:cs typeface="Arial"/>
+              </a:rPr>
+              <a:t>WVU DSPIRA</a:t>
+            </a:r>
+          </a:p>
+        </p:txBody>
+      </p:sp>
+      <p:sp>
+        <p:nvSpPr>
+          <p:cNvPr id="405" name="WVU DSPIRA university"/>
+          <p:cNvSpPr>
+            <a:spLocks noGrp="1"/>
+          </p:cNvSpPr>
+          <p:nvPr/>
+        </p:nvSpPr>
+        <p:spPr>
+          <a:xfrm>
+            <a:off x="6286500" y="114300"/>
+            <a:ext cx="2628900" cy="171450"/>
+          </a:xfrm>
+          <a:prstGeom prst="rect">
+            <a:avLst/>
+          </a:prstGeom>
+          <a:noFill/>
+          <a:ln w="0">
+            <a:noFill/>
+          </a:ln>
+        </p:spPr>
+        <p:txBody>
+          <a:bodyPr>
+            <a:noAutofit/>
+          </a:bodyPr>
+          <a:lstStyle/>
+          <a:p>
+            <a:pPr algn="r">
+              <a:defRPr sz="900">
+                <a:solidFill>
+                  <a:srgbClr val="FFFFFF"/>
+                </a:solidFill>
+                <a:latin typeface="Arial"/>
+                <a:ea typeface="Arial"/>
+                <a:cs typeface="Arial"/>
+              </a:defRPr>
+            </a:pPr>
+            <a:r>
+              <a:rPr sz="900">
+                <a:solidFill>
+                  <a:srgbClr val="FFFFFF"/>
+                </a:solidFill>
+                <a:latin typeface="Arial"/>
+                <a:ea typeface="Arial"/>
+                <a:cs typeface="Arial"/>
+              </a:rPr>
+              <a:t>WEST VIRGINIA UNIVERSITY</a:t>
             </a:r>
           </a:p>
         </p:txBody>
@@ -34036,30 +35986,6 @@
       </p:pic>
       <p:sp>
         <p:nvSpPr>
-          <p:cNvPr id="404" name="DSPIRA 1"/>
-          <p:cNvSpPr>
-            <a:spLocks noGrp="1"/>
-          </p:cNvSpPr>
-          <p:nvPr/>
-        </p:nvSpPr>
-        <p:spPr>
-          <a:xfrm>
-            <a:off x="0" y="0"/>
-            <a:ext cx="9144000" cy="342900"/>
-          </a:xfrm>
-          <a:prstGeom prst="rect">
-            <a:avLst/>
-          </a:prstGeom>
-          <a:solidFill>
-            <a:srgbClr val="FFFFFF"/>
-          </a:solidFill>
-          <a:ln w="0">
-            <a:noFill/>
-          </a:ln>
-        </p:spPr>
-      </p:sp>
-      <p:sp>
-        <p:nvSpPr>
           <p:cNvPr id="405" name="DSPIRA 2"/>
           <p:cNvSpPr>
             <a:spLocks noGrp="1"/>
@@ -34081,57 +36007,6 @@
             <a:noFill/>
           </a:ln>
         </p:spPr>
-      </p:sp>
-      <p:sp>
-        <p:nvSpPr>
-          <p:cNvPr id="406" name="DSPIRA 3"/>
-          <p:cNvSpPr>
-            <a:spLocks noGrp="1"/>
-          </p:cNvSpPr>
-          <p:nvPr/>
-        </p:nvSpPr>
-        <p:spPr>
-          <a:xfrm>
-            <a:off x="228600" y="76200"/>
-            <a:ext cx="4762500" cy="228600"/>
-          </a:xfrm>
-          <a:prstGeom prst="rect">
-            <a:avLst/>
-          </a:prstGeom>
-          <a:noFill/>
-          <a:ln w="0">
-            <a:noFill/>
-          </a:ln>
-        </p:spPr>
-        <p:txBody>
-          <a:bodyPr>
-            <a:noAutofit/>
-          </a:bodyPr>
-          <a:lstStyle/>
-          <a:p>
-            <a:pPr>
-              <a:defRPr sz="1200" b="1">
-                <a:solidFill>
-                  <a:srgbClr val="002855"/>
-                </a:solidFill>
-                <a:latin typeface="Arial"/>
-                <a:ea typeface="Arial"/>
-                <a:cs typeface="Arial"/>
-              </a:defRPr>
-            </a:pPr>
-            <a:r>
-              <a:rPr sz="1200" b="1">
-                <a:solidFill>
-                  <a:srgbClr val="002855"/>
-                </a:solidFill>
-                <a:latin typeface="Arial"/>
-                <a:ea typeface="Arial"/>
-                <a:cs typeface="Arial"/>
-              </a:rPr>
-              <a:t>WVU DSPIRA</a:t>
-            </a:r>
-          </a:p>
-        </p:txBody>
       </p:sp>
       <p:sp>
         <p:nvSpPr>
@@ -34231,6 +36106,156 @@
                 <a:cs typeface="Arial"/>
               </a:rPr>
               <a:t>Supplemental</a:t>
+            </a:r>
+          </a:p>
+        </p:txBody>
+      </p:sp>
+      <p:sp>
+        <p:nvSpPr>
+          <p:cNvPr id="409" name="WVU DSPIRA navy band"/>
+          <p:cNvSpPr>
+            <a:spLocks noGrp="1"/>
+          </p:cNvSpPr>
+          <p:nvPr/>
+        </p:nvSpPr>
+        <p:spPr>
+          <a:xfrm>
+            <a:off x="0" y="0"/>
+            <a:ext cx="9144000" cy="323850"/>
+          </a:xfrm>
+          <a:prstGeom prst="rect">
+            <a:avLst/>
+          </a:prstGeom>
+          <a:solidFill>
+            <a:srgbClr val="002855"/>
+          </a:solidFill>
+          <a:ln w="0">
+            <a:noFill/>
+          </a:ln>
+        </p:spPr>
+      </p:sp>
+      <p:sp>
+        <p:nvSpPr>
+          <p:cNvPr id="410" name="WVU DSPIRA gold rule"/>
+          <p:cNvSpPr>
+            <a:spLocks noGrp="1"/>
+          </p:cNvSpPr>
+          <p:nvPr/>
+        </p:nvSpPr>
+        <p:spPr>
+          <a:xfrm>
+            <a:off x="0" y="323850"/>
+            <a:ext cx="9144000" cy="19050"/>
+          </a:xfrm>
+          <a:prstGeom prst="rect">
+            <a:avLst/>
+          </a:prstGeom>
+          <a:solidFill>
+            <a:srgbClr val="EEAA00"/>
+          </a:solidFill>
+          <a:ln w="0">
+            <a:noFill/>
+          </a:ln>
+        </p:spPr>
+      </p:sp>
+      <p:sp>
+        <p:nvSpPr>
+          <p:cNvPr id="411" name="WVU DSPIRA name"/>
+          <p:cNvSpPr>
+            <a:spLocks noGrp="1"/>
+          </p:cNvSpPr>
+          <p:nvPr/>
+        </p:nvSpPr>
+        <p:spPr>
+          <a:xfrm>
+            <a:off x="228600" y="19050"/>
+            <a:ext cx="2857500" cy="257175"/>
+          </a:xfrm>
+          <a:prstGeom prst="rect">
+            <a:avLst/>
+          </a:prstGeom>
+          <a:noFill/>
+          <a:ln w="0">
+            <a:noFill/>
+          </a:ln>
+        </p:spPr>
+        <p:txBody>
+          <a:bodyPr>
+            <a:noAutofit/>
+          </a:bodyPr>
+          <a:lstStyle/>
+          <a:p>
+            <a:pPr>
+              <a:defRPr sz="1600" b="1">
+                <a:solidFill>
+                  <a:srgbClr val="FFFFFF"/>
+                </a:solidFill>
+                <a:latin typeface="Arial"/>
+                <a:ea typeface="Arial"/>
+                <a:cs typeface="Arial"/>
+              </a:defRPr>
+            </a:pPr>
+            <a:r>
+              <a:rPr sz="1600" b="1">
+                <a:solidFill>
+                  <a:srgbClr val="FFFFFF"/>
+                </a:solidFill>
+                <a:latin typeface="Arial"/>
+                <a:ea typeface="Arial"/>
+                <a:cs typeface="Arial"/>
+              </a:rPr>
+              <a:t>WVU DSPIRA</a:t>
+            </a:r>
+          </a:p>
+        </p:txBody>
+      </p:sp>
+      <p:sp>
+        <p:nvSpPr>
+          <p:cNvPr id="412" name="WVU DSPIRA university"/>
+          <p:cNvSpPr>
+            <a:spLocks noGrp="1"/>
+          </p:cNvSpPr>
+          <p:nvPr/>
+        </p:nvSpPr>
+        <p:spPr>
+          <a:xfrm>
+            <a:off x="6286500" y="114300"/>
+            <a:ext cx="2628900" cy="171450"/>
+          </a:xfrm>
+          <a:prstGeom prst="rect">
+            <a:avLst/>
+          </a:prstGeom>
+          <a:noFill/>
+          <a:ln w="0">
+            <a:noFill/>
+          </a:ln>
+        </p:spPr>
+        <p:txBody>
+          <a:bodyPr>
+            <a:noAutofit/>
+          </a:bodyPr>
+          <a:lstStyle/>
+          <a:p>
+            <a:pPr algn="r">
+              <a:defRPr sz="900">
+                <a:solidFill>
+                  <a:srgbClr val="FFFFFF"/>
+                </a:solidFill>
+                <a:latin typeface="Arial"/>
+                <a:ea typeface="Arial"/>
+                <a:cs typeface="Arial"/>
+              </a:defRPr>
+            </a:pPr>
+            <a:r>
+              <a:rPr sz="900">
+                <a:solidFill>
+                  <a:srgbClr val="FFFFFF"/>
+                </a:solidFill>
+                <a:latin typeface="Arial"/>
+                <a:ea typeface="Arial"/>
+                <a:cs typeface="Arial"/>
+              </a:rPr>
+              <a:t>WEST VIRGINIA UNIVERSITY</a:t>
             </a:r>
           </a:p>
         </p:txBody>
@@ -34559,30 +36584,6 @@
       </p:sp>
       <p:sp>
         <p:nvSpPr>
-          <p:cNvPr id="411" name="DSPIRA 1"/>
-          <p:cNvSpPr>
-            <a:spLocks noGrp="1"/>
-          </p:cNvSpPr>
-          <p:nvPr/>
-        </p:nvSpPr>
-        <p:spPr>
-          <a:xfrm>
-            <a:off x="0" y="0"/>
-            <a:ext cx="9144000" cy="342900"/>
-          </a:xfrm>
-          <a:prstGeom prst="rect">
-            <a:avLst/>
-          </a:prstGeom>
-          <a:solidFill>
-            <a:srgbClr val="FFFFFF"/>
-          </a:solidFill>
-          <a:ln w="0">
-            <a:noFill/>
-          </a:ln>
-        </p:spPr>
-      </p:sp>
-      <p:sp>
-        <p:nvSpPr>
           <p:cNvPr id="412" name="DSPIRA 2"/>
           <p:cNvSpPr>
             <a:spLocks noGrp="1"/>
@@ -34604,57 +36605,6 @@
             <a:noFill/>
           </a:ln>
         </p:spPr>
-      </p:sp>
-      <p:sp>
-        <p:nvSpPr>
-          <p:cNvPr id="413" name="DSPIRA 3"/>
-          <p:cNvSpPr>
-            <a:spLocks noGrp="1"/>
-          </p:cNvSpPr>
-          <p:nvPr/>
-        </p:nvSpPr>
-        <p:spPr>
-          <a:xfrm>
-            <a:off x="228600" y="76200"/>
-            <a:ext cx="4762500" cy="228600"/>
-          </a:xfrm>
-          <a:prstGeom prst="rect">
-            <a:avLst/>
-          </a:prstGeom>
-          <a:noFill/>
-          <a:ln w="0">
-            <a:noFill/>
-          </a:ln>
-        </p:spPr>
-        <p:txBody>
-          <a:bodyPr>
-            <a:noAutofit/>
-          </a:bodyPr>
-          <a:lstStyle/>
-          <a:p>
-            <a:pPr>
-              <a:defRPr sz="1200" b="1">
-                <a:solidFill>
-                  <a:srgbClr val="002855"/>
-                </a:solidFill>
-                <a:latin typeface="Arial"/>
-                <a:ea typeface="Arial"/>
-                <a:cs typeface="Arial"/>
-              </a:defRPr>
-            </a:pPr>
-            <a:r>
-              <a:rPr sz="1200" b="1">
-                <a:solidFill>
-                  <a:srgbClr val="002855"/>
-                </a:solidFill>
-                <a:latin typeface="Arial"/>
-                <a:ea typeface="Arial"/>
-                <a:cs typeface="Arial"/>
-              </a:rPr>
-              <a:t>WVU DSPIRA</a:t>
-            </a:r>
-          </a:p>
-        </p:txBody>
       </p:sp>
       <p:sp>
         <p:nvSpPr>
@@ -34754,6 +36704,156 @@
                 <a:cs typeface="Arial"/>
               </a:rPr>
               <a:t>Supplemental</a:t>
+            </a:r>
+          </a:p>
+        </p:txBody>
+      </p:sp>
+      <p:sp>
+        <p:nvSpPr>
+          <p:cNvPr id="416" name="WVU DSPIRA navy band"/>
+          <p:cNvSpPr>
+            <a:spLocks noGrp="1"/>
+          </p:cNvSpPr>
+          <p:nvPr/>
+        </p:nvSpPr>
+        <p:spPr>
+          <a:xfrm>
+            <a:off x="0" y="0"/>
+            <a:ext cx="9144000" cy="323850"/>
+          </a:xfrm>
+          <a:prstGeom prst="rect">
+            <a:avLst/>
+          </a:prstGeom>
+          <a:solidFill>
+            <a:srgbClr val="002855"/>
+          </a:solidFill>
+          <a:ln w="0">
+            <a:noFill/>
+          </a:ln>
+        </p:spPr>
+      </p:sp>
+      <p:sp>
+        <p:nvSpPr>
+          <p:cNvPr id="417" name="WVU DSPIRA gold rule"/>
+          <p:cNvSpPr>
+            <a:spLocks noGrp="1"/>
+          </p:cNvSpPr>
+          <p:nvPr/>
+        </p:nvSpPr>
+        <p:spPr>
+          <a:xfrm>
+            <a:off x="0" y="323850"/>
+            <a:ext cx="9144000" cy="19050"/>
+          </a:xfrm>
+          <a:prstGeom prst="rect">
+            <a:avLst/>
+          </a:prstGeom>
+          <a:solidFill>
+            <a:srgbClr val="EEAA00"/>
+          </a:solidFill>
+          <a:ln w="0">
+            <a:noFill/>
+          </a:ln>
+        </p:spPr>
+      </p:sp>
+      <p:sp>
+        <p:nvSpPr>
+          <p:cNvPr id="418" name="WVU DSPIRA name"/>
+          <p:cNvSpPr>
+            <a:spLocks noGrp="1"/>
+          </p:cNvSpPr>
+          <p:nvPr/>
+        </p:nvSpPr>
+        <p:spPr>
+          <a:xfrm>
+            <a:off x="228600" y="19050"/>
+            <a:ext cx="2857500" cy="257175"/>
+          </a:xfrm>
+          <a:prstGeom prst="rect">
+            <a:avLst/>
+          </a:prstGeom>
+          <a:noFill/>
+          <a:ln w="0">
+            <a:noFill/>
+          </a:ln>
+        </p:spPr>
+        <p:txBody>
+          <a:bodyPr>
+            <a:noAutofit/>
+          </a:bodyPr>
+          <a:lstStyle/>
+          <a:p>
+            <a:pPr>
+              <a:defRPr sz="1600" b="1">
+                <a:solidFill>
+                  <a:srgbClr val="FFFFFF"/>
+                </a:solidFill>
+                <a:latin typeface="Arial"/>
+                <a:ea typeface="Arial"/>
+                <a:cs typeface="Arial"/>
+              </a:defRPr>
+            </a:pPr>
+            <a:r>
+              <a:rPr sz="1600" b="1">
+                <a:solidFill>
+                  <a:srgbClr val="FFFFFF"/>
+                </a:solidFill>
+                <a:latin typeface="Arial"/>
+                <a:ea typeface="Arial"/>
+                <a:cs typeface="Arial"/>
+              </a:rPr>
+              <a:t>WVU DSPIRA</a:t>
+            </a:r>
+          </a:p>
+        </p:txBody>
+      </p:sp>
+      <p:sp>
+        <p:nvSpPr>
+          <p:cNvPr id="419" name="WVU DSPIRA university"/>
+          <p:cNvSpPr>
+            <a:spLocks noGrp="1"/>
+          </p:cNvSpPr>
+          <p:nvPr/>
+        </p:nvSpPr>
+        <p:spPr>
+          <a:xfrm>
+            <a:off x="6286500" y="114300"/>
+            <a:ext cx="2628900" cy="171450"/>
+          </a:xfrm>
+          <a:prstGeom prst="rect">
+            <a:avLst/>
+          </a:prstGeom>
+          <a:noFill/>
+          <a:ln w="0">
+            <a:noFill/>
+          </a:ln>
+        </p:spPr>
+        <p:txBody>
+          <a:bodyPr>
+            <a:noAutofit/>
+          </a:bodyPr>
+          <a:lstStyle/>
+          <a:p>
+            <a:pPr algn="r">
+              <a:defRPr sz="900">
+                <a:solidFill>
+                  <a:srgbClr val="FFFFFF"/>
+                </a:solidFill>
+                <a:latin typeface="Arial"/>
+                <a:ea typeface="Arial"/>
+                <a:cs typeface="Arial"/>
+              </a:defRPr>
+            </a:pPr>
+            <a:r>
+              <a:rPr sz="900">
+                <a:solidFill>
+                  <a:srgbClr val="FFFFFF"/>
+                </a:solidFill>
+                <a:latin typeface="Arial"/>
+                <a:ea typeface="Arial"/>
+                <a:cs typeface="Arial"/>
+              </a:rPr>
+              <a:t>WEST VIRGINIA UNIVERSITY</a:t>
             </a:r>
           </a:p>
         </p:txBody>
@@ -35441,30 +37541,6 @@
       </p:sp>
       <p:sp>
         <p:nvSpPr>
-          <p:cNvPr id="198" name="DSPIRA 1"/>
-          <p:cNvSpPr>
-            <a:spLocks noGrp="1"/>
-          </p:cNvSpPr>
-          <p:nvPr/>
-        </p:nvSpPr>
-        <p:spPr>
-          <a:xfrm>
-            <a:off x="0" y="0"/>
-            <a:ext cx="9144000" cy="342900"/>
-          </a:xfrm>
-          <a:prstGeom prst="rect">
-            <a:avLst/>
-          </a:prstGeom>
-          <a:solidFill>
-            <a:srgbClr val="FFFFFF"/>
-          </a:solidFill>
-          <a:ln w="0">
-            <a:noFill/>
-          </a:ln>
-        </p:spPr>
-      </p:sp>
-      <p:sp>
-        <p:nvSpPr>
           <p:cNvPr id="199" name="DSPIRA 2"/>
           <p:cNvSpPr>
             <a:spLocks noGrp="1"/>
@@ -35486,57 +37562,6 @@
             <a:noFill/>
           </a:ln>
         </p:spPr>
-      </p:sp>
-      <p:sp>
-        <p:nvSpPr>
-          <p:cNvPr id="200" name="DSPIRA 3"/>
-          <p:cNvSpPr>
-            <a:spLocks noGrp="1"/>
-          </p:cNvSpPr>
-          <p:nvPr/>
-        </p:nvSpPr>
-        <p:spPr>
-          <a:xfrm>
-            <a:off x="228600" y="76200"/>
-            <a:ext cx="4762500" cy="228600"/>
-          </a:xfrm>
-          <a:prstGeom prst="rect">
-            <a:avLst/>
-          </a:prstGeom>
-          <a:noFill/>
-          <a:ln w="0">
-            <a:noFill/>
-          </a:ln>
-        </p:spPr>
-        <p:txBody>
-          <a:bodyPr>
-            <a:noAutofit/>
-          </a:bodyPr>
-          <a:lstStyle/>
-          <a:p>
-            <a:pPr>
-              <a:defRPr sz="1200" b="1">
-                <a:solidFill>
-                  <a:srgbClr val="002855"/>
-                </a:solidFill>
-                <a:latin typeface="Arial"/>
-                <a:ea typeface="Arial"/>
-                <a:cs typeface="Arial"/>
-              </a:defRPr>
-            </a:pPr>
-            <a:r>
-              <a:rPr sz="1200" b="1">
-                <a:solidFill>
-                  <a:srgbClr val="002855"/>
-                </a:solidFill>
-                <a:latin typeface="Arial"/>
-                <a:ea typeface="Arial"/>
-                <a:cs typeface="Arial"/>
-              </a:rPr>
-              <a:t>WVU DSPIRA</a:t>
-            </a:r>
-          </a:p>
-        </p:txBody>
       </p:sp>
       <p:sp>
         <p:nvSpPr>
@@ -35636,6 +37661,156 @@
                 <a:cs typeface="Arial"/>
               </a:rPr>
               <a:t>4 of 29</a:t>
+            </a:r>
+          </a:p>
+        </p:txBody>
+      </p:sp>
+      <p:sp>
+        <p:nvSpPr>
+          <p:cNvPr id="203" name="WVU DSPIRA navy band"/>
+          <p:cNvSpPr>
+            <a:spLocks noGrp="1"/>
+          </p:cNvSpPr>
+          <p:nvPr/>
+        </p:nvSpPr>
+        <p:spPr>
+          <a:xfrm>
+            <a:off x="0" y="0"/>
+            <a:ext cx="9144000" cy="323850"/>
+          </a:xfrm>
+          <a:prstGeom prst="rect">
+            <a:avLst/>
+          </a:prstGeom>
+          <a:solidFill>
+            <a:srgbClr val="002855"/>
+          </a:solidFill>
+          <a:ln w="0">
+            <a:noFill/>
+          </a:ln>
+        </p:spPr>
+      </p:sp>
+      <p:sp>
+        <p:nvSpPr>
+          <p:cNvPr id="204" name="WVU DSPIRA gold rule"/>
+          <p:cNvSpPr>
+            <a:spLocks noGrp="1"/>
+          </p:cNvSpPr>
+          <p:nvPr/>
+        </p:nvSpPr>
+        <p:spPr>
+          <a:xfrm>
+            <a:off x="0" y="323850"/>
+            <a:ext cx="9144000" cy="19050"/>
+          </a:xfrm>
+          <a:prstGeom prst="rect">
+            <a:avLst/>
+          </a:prstGeom>
+          <a:solidFill>
+            <a:srgbClr val="EEAA00"/>
+          </a:solidFill>
+          <a:ln w="0">
+            <a:noFill/>
+          </a:ln>
+        </p:spPr>
+      </p:sp>
+      <p:sp>
+        <p:nvSpPr>
+          <p:cNvPr id="205" name="WVU DSPIRA name"/>
+          <p:cNvSpPr>
+            <a:spLocks noGrp="1"/>
+          </p:cNvSpPr>
+          <p:nvPr/>
+        </p:nvSpPr>
+        <p:spPr>
+          <a:xfrm>
+            <a:off x="228600" y="19050"/>
+            <a:ext cx="2857500" cy="257175"/>
+          </a:xfrm>
+          <a:prstGeom prst="rect">
+            <a:avLst/>
+          </a:prstGeom>
+          <a:noFill/>
+          <a:ln w="0">
+            <a:noFill/>
+          </a:ln>
+        </p:spPr>
+        <p:txBody>
+          <a:bodyPr>
+            <a:noAutofit/>
+          </a:bodyPr>
+          <a:lstStyle/>
+          <a:p>
+            <a:pPr>
+              <a:defRPr sz="1600" b="1">
+                <a:solidFill>
+                  <a:srgbClr val="FFFFFF"/>
+                </a:solidFill>
+                <a:latin typeface="Arial"/>
+                <a:ea typeface="Arial"/>
+                <a:cs typeface="Arial"/>
+              </a:defRPr>
+            </a:pPr>
+            <a:r>
+              <a:rPr sz="1600" b="1">
+                <a:solidFill>
+                  <a:srgbClr val="FFFFFF"/>
+                </a:solidFill>
+                <a:latin typeface="Arial"/>
+                <a:ea typeface="Arial"/>
+                <a:cs typeface="Arial"/>
+              </a:rPr>
+              <a:t>WVU DSPIRA</a:t>
+            </a:r>
+          </a:p>
+        </p:txBody>
+      </p:sp>
+      <p:sp>
+        <p:nvSpPr>
+          <p:cNvPr id="206" name="WVU DSPIRA university"/>
+          <p:cNvSpPr>
+            <a:spLocks noGrp="1"/>
+          </p:cNvSpPr>
+          <p:nvPr/>
+        </p:nvSpPr>
+        <p:spPr>
+          <a:xfrm>
+            <a:off x="6286500" y="114300"/>
+            <a:ext cx="2628900" cy="171450"/>
+          </a:xfrm>
+          <a:prstGeom prst="rect">
+            <a:avLst/>
+          </a:prstGeom>
+          <a:noFill/>
+          <a:ln w="0">
+            <a:noFill/>
+          </a:ln>
+        </p:spPr>
+        <p:txBody>
+          <a:bodyPr>
+            <a:noAutofit/>
+          </a:bodyPr>
+          <a:lstStyle/>
+          <a:p>
+            <a:pPr algn="r">
+              <a:defRPr sz="900">
+                <a:solidFill>
+                  <a:srgbClr val="FFFFFF"/>
+                </a:solidFill>
+                <a:latin typeface="Arial"/>
+                <a:ea typeface="Arial"/>
+                <a:cs typeface="Arial"/>
+              </a:defRPr>
+            </a:pPr>
+            <a:r>
+              <a:rPr sz="900">
+                <a:solidFill>
+                  <a:srgbClr val="FFFFFF"/>
+                </a:solidFill>
+                <a:latin typeface="Arial"/>
+                <a:ea typeface="Arial"/>
+                <a:cs typeface="Arial"/>
+              </a:rPr>
+              <a:t>WEST VIRGINIA UNIVERSITY</a:t>
             </a:r>
           </a:p>
         </p:txBody>
@@ -35989,30 +38164,6 @@
       </p:sp>
       <p:sp>
         <p:nvSpPr>
-          <p:cNvPr id="204" name="DSPIRA 1"/>
-          <p:cNvSpPr>
-            <a:spLocks noGrp="1"/>
-          </p:cNvSpPr>
-          <p:nvPr/>
-        </p:nvSpPr>
-        <p:spPr>
-          <a:xfrm>
-            <a:off x="0" y="0"/>
-            <a:ext cx="9144000" cy="342900"/>
-          </a:xfrm>
-          <a:prstGeom prst="rect">
-            <a:avLst/>
-          </a:prstGeom>
-          <a:solidFill>
-            <a:srgbClr val="FFFFFF"/>
-          </a:solidFill>
-          <a:ln w="0">
-            <a:noFill/>
-          </a:ln>
-        </p:spPr>
-      </p:sp>
-      <p:sp>
-        <p:nvSpPr>
           <p:cNvPr id="205" name="DSPIRA 2"/>
           <p:cNvSpPr>
             <a:spLocks noGrp="1"/>
@@ -36034,57 +38185,6 @@
             <a:noFill/>
           </a:ln>
         </p:spPr>
-      </p:sp>
-      <p:sp>
-        <p:nvSpPr>
-          <p:cNvPr id="206" name="DSPIRA 3"/>
-          <p:cNvSpPr>
-            <a:spLocks noGrp="1"/>
-          </p:cNvSpPr>
-          <p:nvPr/>
-        </p:nvSpPr>
-        <p:spPr>
-          <a:xfrm>
-            <a:off x="228600" y="76200"/>
-            <a:ext cx="4762500" cy="228600"/>
-          </a:xfrm>
-          <a:prstGeom prst="rect">
-            <a:avLst/>
-          </a:prstGeom>
-          <a:noFill/>
-          <a:ln w="0">
-            <a:noFill/>
-          </a:ln>
-        </p:spPr>
-        <p:txBody>
-          <a:bodyPr>
-            <a:noAutofit/>
-          </a:bodyPr>
-          <a:lstStyle/>
-          <a:p>
-            <a:pPr>
-              <a:defRPr sz="1200" b="1">
-                <a:solidFill>
-                  <a:srgbClr val="002855"/>
-                </a:solidFill>
-                <a:latin typeface="Arial"/>
-                <a:ea typeface="Arial"/>
-                <a:cs typeface="Arial"/>
-              </a:defRPr>
-            </a:pPr>
-            <a:r>
-              <a:rPr sz="1200" b="1">
-                <a:solidFill>
-                  <a:srgbClr val="002855"/>
-                </a:solidFill>
-                <a:latin typeface="Arial"/>
-                <a:ea typeface="Arial"/>
-                <a:cs typeface="Arial"/>
-              </a:rPr>
-              <a:t>WVU DSPIRA</a:t>
-            </a:r>
-          </a:p>
-        </p:txBody>
       </p:sp>
       <p:sp>
         <p:nvSpPr>
@@ -36184,6 +38284,156 @@
                 <a:cs typeface="Arial"/>
               </a:rPr>
               <a:t>5 of 29</a:t>
+            </a:r>
+          </a:p>
+        </p:txBody>
+      </p:sp>
+      <p:sp>
+        <p:nvSpPr>
+          <p:cNvPr id="209" name="WVU DSPIRA navy band"/>
+          <p:cNvSpPr>
+            <a:spLocks noGrp="1"/>
+          </p:cNvSpPr>
+          <p:nvPr/>
+        </p:nvSpPr>
+        <p:spPr>
+          <a:xfrm>
+            <a:off x="0" y="0"/>
+            <a:ext cx="9144000" cy="323850"/>
+          </a:xfrm>
+          <a:prstGeom prst="rect">
+            <a:avLst/>
+          </a:prstGeom>
+          <a:solidFill>
+            <a:srgbClr val="002855"/>
+          </a:solidFill>
+          <a:ln w="0">
+            <a:noFill/>
+          </a:ln>
+        </p:spPr>
+      </p:sp>
+      <p:sp>
+        <p:nvSpPr>
+          <p:cNvPr id="210" name="WVU DSPIRA gold rule"/>
+          <p:cNvSpPr>
+            <a:spLocks noGrp="1"/>
+          </p:cNvSpPr>
+          <p:nvPr/>
+        </p:nvSpPr>
+        <p:spPr>
+          <a:xfrm>
+            <a:off x="0" y="323850"/>
+            <a:ext cx="9144000" cy="19050"/>
+          </a:xfrm>
+          <a:prstGeom prst="rect">
+            <a:avLst/>
+          </a:prstGeom>
+          <a:solidFill>
+            <a:srgbClr val="EEAA00"/>
+          </a:solidFill>
+          <a:ln w="0">
+            <a:noFill/>
+          </a:ln>
+        </p:spPr>
+      </p:sp>
+      <p:sp>
+        <p:nvSpPr>
+          <p:cNvPr id="211" name="WVU DSPIRA name"/>
+          <p:cNvSpPr>
+            <a:spLocks noGrp="1"/>
+          </p:cNvSpPr>
+          <p:nvPr/>
+        </p:nvSpPr>
+        <p:spPr>
+          <a:xfrm>
+            <a:off x="228600" y="19050"/>
+            <a:ext cx="2857500" cy="257175"/>
+          </a:xfrm>
+          <a:prstGeom prst="rect">
+            <a:avLst/>
+          </a:prstGeom>
+          <a:noFill/>
+          <a:ln w="0">
+            <a:noFill/>
+          </a:ln>
+        </p:spPr>
+        <p:txBody>
+          <a:bodyPr>
+            <a:noAutofit/>
+          </a:bodyPr>
+          <a:lstStyle/>
+          <a:p>
+            <a:pPr>
+              <a:defRPr sz="1600" b="1">
+                <a:solidFill>
+                  <a:srgbClr val="FFFFFF"/>
+                </a:solidFill>
+                <a:latin typeface="Arial"/>
+                <a:ea typeface="Arial"/>
+                <a:cs typeface="Arial"/>
+              </a:defRPr>
+            </a:pPr>
+            <a:r>
+              <a:rPr sz="1600" b="1">
+                <a:solidFill>
+                  <a:srgbClr val="FFFFFF"/>
+                </a:solidFill>
+                <a:latin typeface="Arial"/>
+                <a:ea typeface="Arial"/>
+                <a:cs typeface="Arial"/>
+              </a:rPr>
+              <a:t>WVU DSPIRA</a:t>
+            </a:r>
+          </a:p>
+        </p:txBody>
+      </p:sp>
+      <p:sp>
+        <p:nvSpPr>
+          <p:cNvPr id="212" name="WVU DSPIRA university"/>
+          <p:cNvSpPr>
+            <a:spLocks noGrp="1"/>
+          </p:cNvSpPr>
+          <p:nvPr/>
+        </p:nvSpPr>
+        <p:spPr>
+          <a:xfrm>
+            <a:off x="6286500" y="114300"/>
+            <a:ext cx="2628900" cy="171450"/>
+          </a:xfrm>
+          <a:prstGeom prst="rect">
+            <a:avLst/>
+          </a:prstGeom>
+          <a:noFill/>
+          <a:ln w="0">
+            <a:noFill/>
+          </a:ln>
+        </p:spPr>
+        <p:txBody>
+          <a:bodyPr>
+            <a:noAutofit/>
+          </a:bodyPr>
+          <a:lstStyle/>
+          <a:p>
+            <a:pPr algn="r">
+              <a:defRPr sz="900">
+                <a:solidFill>
+                  <a:srgbClr val="FFFFFF"/>
+                </a:solidFill>
+                <a:latin typeface="Arial"/>
+                <a:ea typeface="Arial"/>
+                <a:cs typeface="Arial"/>
+              </a:defRPr>
+            </a:pPr>
+            <a:r>
+              <a:rPr sz="900">
+                <a:solidFill>
+                  <a:srgbClr val="FFFFFF"/>
+                </a:solidFill>
+                <a:latin typeface="Arial"/>
+                <a:ea typeface="Arial"/>
+                <a:cs typeface="Arial"/>
+              </a:rPr>
+              <a:t>WEST VIRGINIA UNIVERSITY</a:t>
             </a:r>
           </a:p>
         </p:txBody>
@@ -36537,30 +38787,6 @@
       </p:sp>
       <p:sp>
         <p:nvSpPr>
-          <p:cNvPr id="210" name="DSPIRA 1"/>
-          <p:cNvSpPr>
-            <a:spLocks noGrp="1"/>
-          </p:cNvSpPr>
-          <p:nvPr/>
-        </p:nvSpPr>
-        <p:spPr>
-          <a:xfrm>
-            <a:off x="0" y="0"/>
-            <a:ext cx="9144000" cy="342900"/>
-          </a:xfrm>
-          <a:prstGeom prst="rect">
-            <a:avLst/>
-          </a:prstGeom>
-          <a:solidFill>
-            <a:srgbClr val="FFFFFF"/>
-          </a:solidFill>
-          <a:ln w="0">
-            <a:noFill/>
-          </a:ln>
-        </p:spPr>
-      </p:sp>
-      <p:sp>
-        <p:nvSpPr>
           <p:cNvPr id="211" name="DSPIRA 2"/>
           <p:cNvSpPr>
             <a:spLocks noGrp="1"/>
@@ -36582,57 +38808,6 @@
             <a:noFill/>
           </a:ln>
         </p:spPr>
-      </p:sp>
-      <p:sp>
-        <p:nvSpPr>
-          <p:cNvPr id="212" name="DSPIRA 3"/>
-          <p:cNvSpPr>
-            <a:spLocks noGrp="1"/>
-          </p:cNvSpPr>
-          <p:nvPr/>
-        </p:nvSpPr>
-        <p:spPr>
-          <a:xfrm>
-            <a:off x="228600" y="76200"/>
-            <a:ext cx="4762500" cy="228600"/>
-          </a:xfrm>
-          <a:prstGeom prst="rect">
-            <a:avLst/>
-          </a:prstGeom>
-          <a:noFill/>
-          <a:ln w="0">
-            <a:noFill/>
-          </a:ln>
-        </p:spPr>
-        <p:txBody>
-          <a:bodyPr>
-            <a:noAutofit/>
-          </a:bodyPr>
-          <a:lstStyle/>
-          <a:p>
-            <a:pPr>
-              <a:defRPr sz="1200" b="1">
-                <a:solidFill>
-                  <a:srgbClr val="002855"/>
-                </a:solidFill>
-                <a:latin typeface="Arial"/>
-                <a:ea typeface="Arial"/>
-                <a:cs typeface="Arial"/>
-              </a:defRPr>
-            </a:pPr>
-            <a:r>
-              <a:rPr sz="1200" b="1">
-                <a:solidFill>
-                  <a:srgbClr val="002855"/>
-                </a:solidFill>
-                <a:latin typeface="Arial"/>
-                <a:ea typeface="Arial"/>
-                <a:cs typeface="Arial"/>
-              </a:rPr>
-              <a:t>WVU DSPIRA</a:t>
-            </a:r>
-          </a:p>
-        </p:txBody>
       </p:sp>
       <p:sp>
         <p:nvSpPr>
@@ -36732,6 +38907,156 @@
                 <a:cs typeface="Arial"/>
               </a:rPr>
               <a:t>6 of 29</a:t>
+            </a:r>
+          </a:p>
+        </p:txBody>
+      </p:sp>
+      <p:sp>
+        <p:nvSpPr>
+          <p:cNvPr id="215" name="WVU DSPIRA navy band"/>
+          <p:cNvSpPr>
+            <a:spLocks noGrp="1"/>
+          </p:cNvSpPr>
+          <p:nvPr/>
+        </p:nvSpPr>
+        <p:spPr>
+          <a:xfrm>
+            <a:off x="0" y="0"/>
+            <a:ext cx="9144000" cy="323850"/>
+          </a:xfrm>
+          <a:prstGeom prst="rect">
+            <a:avLst/>
+          </a:prstGeom>
+          <a:solidFill>
+            <a:srgbClr val="002855"/>
+          </a:solidFill>
+          <a:ln w="0">
+            <a:noFill/>
+          </a:ln>
+        </p:spPr>
+      </p:sp>
+      <p:sp>
+        <p:nvSpPr>
+          <p:cNvPr id="216" name="WVU DSPIRA gold rule"/>
+          <p:cNvSpPr>
+            <a:spLocks noGrp="1"/>
+          </p:cNvSpPr>
+          <p:nvPr/>
+        </p:nvSpPr>
+        <p:spPr>
+          <a:xfrm>
+            <a:off x="0" y="323850"/>
+            <a:ext cx="9144000" cy="19050"/>
+          </a:xfrm>
+          <a:prstGeom prst="rect">
+            <a:avLst/>
+          </a:prstGeom>
+          <a:solidFill>
+            <a:srgbClr val="EEAA00"/>
+          </a:solidFill>
+          <a:ln w="0">
+            <a:noFill/>
+          </a:ln>
+        </p:spPr>
+      </p:sp>
+      <p:sp>
+        <p:nvSpPr>
+          <p:cNvPr id="217" name="WVU DSPIRA name"/>
+          <p:cNvSpPr>
+            <a:spLocks noGrp="1"/>
+          </p:cNvSpPr>
+          <p:nvPr/>
+        </p:nvSpPr>
+        <p:spPr>
+          <a:xfrm>
+            <a:off x="228600" y="19050"/>
+            <a:ext cx="2857500" cy="257175"/>
+          </a:xfrm>
+          <a:prstGeom prst="rect">
+            <a:avLst/>
+          </a:prstGeom>
+          <a:noFill/>
+          <a:ln w="0">
+            <a:noFill/>
+          </a:ln>
+        </p:spPr>
+        <p:txBody>
+          <a:bodyPr>
+            <a:noAutofit/>
+          </a:bodyPr>
+          <a:lstStyle/>
+          <a:p>
+            <a:pPr>
+              <a:defRPr sz="1600" b="1">
+                <a:solidFill>
+                  <a:srgbClr val="FFFFFF"/>
+                </a:solidFill>
+                <a:latin typeface="Arial"/>
+                <a:ea typeface="Arial"/>
+                <a:cs typeface="Arial"/>
+              </a:defRPr>
+            </a:pPr>
+            <a:r>
+              <a:rPr sz="1600" b="1">
+                <a:solidFill>
+                  <a:srgbClr val="FFFFFF"/>
+                </a:solidFill>
+                <a:latin typeface="Arial"/>
+                <a:ea typeface="Arial"/>
+                <a:cs typeface="Arial"/>
+              </a:rPr>
+              <a:t>WVU DSPIRA</a:t>
+            </a:r>
+          </a:p>
+        </p:txBody>
+      </p:sp>
+      <p:sp>
+        <p:nvSpPr>
+          <p:cNvPr id="218" name="WVU DSPIRA university"/>
+          <p:cNvSpPr>
+            <a:spLocks noGrp="1"/>
+          </p:cNvSpPr>
+          <p:nvPr/>
+        </p:nvSpPr>
+        <p:spPr>
+          <a:xfrm>
+            <a:off x="6286500" y="114300"/>
+            <a:ext cx="2628900" cy="171450"/>
+          </a:xfrm>
+          <a:prstGeom prst="rect">
+            <a:avLst/>
+          </a:prstGeom>
+          <a:noFill/>
+          <a:ln w="0">
+            <a:noFill/>
+          </a:ln>
+        </p:spPr>
+        <p:txBody>
+          <a:bodyPr>
+            <a:noAutofit/>
+          </a:bodyPr>
+          <a:lstStyle/>
+          <a:p>
+            <a:pPr algn="r">
+              <a:defRPr sz="900">
+                <a:solidFill>
+                  <a:srgbClr val="FFFFFF"/>
+                </a:solidFill>
+                <a:latin typeface="Arial"/>
+                <a:ea typeface="Arial"/>
+                <a:cs typeface="Arial"/>
+              </a:defRPr>
+            </a:pPr>
+            <a:r>
+              <a:rPr sz="900">
+                <a:solidFill>
+                  <a:srgbClr val="FFFFFF"/>
+                </a:solidFill>
+                <a:latin typeface="Arial"/>
+                <a:ea typeface="Arial"/>
+                <a:cs typeface="Arial"/>
+              </a:rPr>
+              <a:t>WEST VIRGINIA UNIVERSITY</a:t>
             </a:r>
           </a:p>
         </p:txBody>
@@ -37005,30 +39330,6 @@
       </p:sp>
       <p:sp>
         <p:nvSpPr>
-          <p:cNvPr id="216" name="DSPIRA 1"/>
-          <p:cNvSpPr>
-            <a:spLocks noGrp="1"/>
-          </p:cNvSpPr>
-          <p:nvPr/>
-        </p:nvSpPr>
-        <p:spPr>
-          <a:xfrm>
-            <a:off x="0" y="0"/>
-            <a:ext cx="9144000" cy="342900"/>
-          </a:xfrm>
-          <a:prstGeom prst="rect">
-            <a:avLst/>
-          </a:prstGeom>
-          <a:solidFill>
-            <a:srgbClr val="FFFFFF"/>
-          </a:solidFill>
-          <a:ln w="0">
-            <a:noFill/>
-          </a:ln>
-        </p:spPr>
-      </p:sp>
-      <p:sp>
-        <p:nvSpPr>
           <p:cNvPr id="217" name="DSPIRA 2"/>
           <p:cNvSpPr>
             <a:spLocks noGrp="1"/>
@@ -37050,57 +39351,6 @@
             <a:noFill/>
           </a:ln>
         </p:spPr>
-      </p:sp>
-      <p:sp>
-        <p:nvSpPr>
-          <p:cNvPr id="218" name="DSPIRA 3"/>
-          <p:cNvSpPr>
-            <a:spLocks noGrp="1"/>
-          </p:cNvSpPr>
-          <p:nvPr/>
-        </p:nvSpPr>
-        <p:spPr>
-          <a:xfrm>
-            <a:off x="228600" y="76200"/>
-            <a:ext cx="4762500" cy="228600"/>
-          </a:xfrm>
-          <a:prstGeom prst="rect">
-            <a:avLst/>
-          </a:prstGeom>
-          <a:noFill/>
-          <a:ln w="0">
-            <a:noFill/>
-          </a:ln>
-        </p:spPr>
-        <p:txBody>
-          <a:bodyPr>
-            <a:noAutofit/>
-          </a:bodyPr>
-          <a:lstStyle/>
-          <a:p>
-            <a:pPr>
-              <a:defRPr sz="1200" b="1">
-                <a:solidFill>
-                  <a:srgbClr val="002855"/>
-                </a:solidFill>
-                <a:latin typeface="Arial"/>
-                <a:ea typeface="Arial"/>
-                <a:cs typeface="Arial"/>
-              </a:defRPr>
-            </a:pPr>
-            <a:r>
-              <a:rPr sz="1200" b="1">
-                <a:solidFill>
-                  <a:srgbClr val="002855"/>
-                </a:solidFill>
-                <a:latin typeface="Arial"/>
-                <a:ea typeface="Arial"/>
-                <a:cs typeface="Arial"/>
-              </a:rPr>
-              <a:t>WVU DSPIRA</a:t>
-            </a:r>
-          </a:p>
-        </p:txBody>
       </p:sp>
       <p:sp>
         <p:nvSpPr>
@@ -37200,6 +39450,156 @@
                 <a:cs typeface="Arial"/>
               </a:rPr>
               <a:t>7 of 29</a:t>
+            </a:r>
+          </a:p>
+        </p:txBody>
+      </p:sp>
+      <p:sp>
+        <p:nvSpPr>
+          <p:cNvPr id="221" name="WVU DSPIRA navy band"/>
+          <p:cNvSpPr>
+            <a:spLocks noGrp="1"/>
+          </p:cNvSpPr>
+          <p:nvPr/>
+        </p:nvSpPr>
+        <p:spPr>
+          <a:xfrm>
+            <a:off x="0" y="0"/>
+            <a:ext cx="9144000" cy="323850"/>
+          </a:xfrm>
+          <a:prstGeom prst="rect">
+            <a:avLst/>
+          </a:prstGeom>
+          <a:solidFill>
+            <a:srgbClr val="002855"/>
+          </a:solidFill>
+          <a:ln w="0">
+            <a:noFill/>
+          </a:ln>
+        </p:spPr>
+      </p:sp>
+      <p:sp>
+        <p:nvSpPr>
+          <p:cNvPr id="222" name="WVU DSPIRA gold rule"/>
+          <p:cNvSpPr>
+            <a:spLocks noGrp="1"/>
+          </p:cNvSpPr>
+          <p:nvPr/>
+        </p:nvSpPr>
+        <p:spPr>
+          <a:xfrm>
+            <a:off x="0" y="323850"/>
+            <a:ext cx="9144000" cy="19050"/>
+          </a:xfrm>
+          <a:prstGeom prst="rect">
+            <a:avLst/>
+          </a:prstGeom>
+          <a:solidFill>
+            <a:srgbClr val="EEAA00"/>
+          </a:solidFill>
+          <a:ln w="0">
+            <a:noFill/>
+          </a:ln>
+        </p:spPr>
+      </p:sp>
+      <p:sp>
+        <p:nvSpPr>
+          <p:cNvPr id="223" name="WVU DSPIRA name"/>
+          <p:cNvSpPr>
+            <a:spLocks noGrp="1"/>
+          </p:cNvSpPr>
+          <p:nvPr/>
+        </p:nvSpPr>
+        <p:spPr>
+          <a:xfrm>
+            <a:off x="228600" y="19050"/>
+            <a:ext cx="2857500" cy="257175"/>
+          </a:xfrm>
+          <a:prstGeom prst="rect">
+            <a:avLst/>
+          </a:prstGeom>
+          <a:noFill/>
+          <a:ln w="0">
+            <a:noFill/>
+          </a:ln>
+        </p:spPr>
+        <p:txBody>
+          <a:bodyPr>
+            <a:noAutofit/>
+          </a:bodyPr>
+          <a:lstStyle/>
+          <a:p>
+            <a:pPr>
+              <a:defRPr sz="1600" b="1">
+                <a:solidFill>
+                  <a:srgbClr val="FFFFFF"/>
+                </a:solidFill>
+                <a:latin typeface="Arial"/>
+                <a:ea typeface="Arial"/>
+                <a:cs typeface="Arial"/>
+              </a:defRPr>
+            </a:pPr>
+            <a:r>
+              <a:rPr sz="1600" b="1">
+                <a:solidFill>
+                  <a:srgbClr val="FFFFFF"/>
+                </a:solidFill>
+                <a:latin typeface="Arial"/>
+                <a:ea typeface="Arial"/>
+                <a:cs typeface="Arial"/>
+              </a:rPr>
+              <a:t>WVU DSPIRA</a:t>
+            </a:r>
+          </a:p>
+        </p:txBody>
+      </p:sp>
+      <p:sp>
+        <p:nvSpPr>
+          <p:cNvPr id="224" name="WVU DSPIRA university"/>
+          <p:cNvSpPr>
+            <a:spLocks noGrp="1"/>
+          </p:cNvSpPr>
+          <p:nvPr/>
+        </p:nvSpPr>
+        <p:spPr>
+          <a:xfrm>
+            <a:off x="6286500" y="114300"/>
+            <a:ext cx="2628900" cy="171450"/>
+          </a:xfrm>
+          <a:prstGeom prst="rect">
+            <a:avLst/>
+          </a:prstGeom>
+          <a:noFill/>
+          <a:ln w="0">
+            <a:noFill/>
+          </a:ln>
+        </p:spPr>
+        <p:txBody>
+          <a:bodyPr>
+            <a:noAutofit/>
+          </a:bodyPr>
+          <a:lstStyle/>
+          <a:p>
+            <a:pPr algn="r">
+              <a:defRPr sz="900">
+                <a:solidFill>
+                  <a:srgbClr val="FFFFFF"/>
+                </a:solidFill>
+                <a:latin typeface="Arial"/>
+                <a:ea typeface="Arial"/>
+                <a:cs typeface="Arial"/>
+              </a:defRPr>
+            </a:pPr>
+            <a:r>
+              <a:rPr sz="900">
+                <a:solidFill>
+                  <a:srgbClr val="FFFFFF"/>
+                </a:solidFill>
+                <a:latin typeface="Arial"/>
+                <a:ea typeface="Arial"/>
+                <a:cs typeface="Arial"/>
+              </a:rPr>
+              <a:t>WEST VIRGINIA UNIVERSITY</a:t>
             </a:r>
           </a:p>
         </p:txBody>
@@ -37473,30 +39873,6 @@
       </p:sp>
       <p:sp>
         <p:nvSpPr>
-          <p:cNvPr id="222" name="DSPIRA 1"/>
-          <p:cNvSpPr>
-            <a:spLocks noGrp="1"/>
-          </p:cNvSpPr>
-          <p:nvPr/>
-        </p:nvSpPr>
-        <p:spPr>
-          <a:xfrm>
-            <a:off x="0" y="0"/>
-            <a:ext cx="9144000" cy="342900"/>
-          </a:xfrm>
-          <a:prstGeom prst="rect">
-            <a:avLst/>
-          </a:prstGeom>
-          <a:solidFill>
-            <a:srgbClr val="FFFFFF"/>
-          </a:solidFill>
-          <a:ln w="0">
-            <a:noFill/>
-          </a:ln>
-        </p:spPr>
-      </p:sp>
-      <p:sp>
-        <p:nvSpPr>
           <p:cNvPr id="223" name="DSPIRA 2"/>
           <p:cNvSpPr>
             <a:spLocks noGrp="1"/>
@@ -37518,57 +39894,6 @@
             <a:noFill/>
           </a:ln>
         </p:spPr>
-      </p:sp>
-      <p:sp>
-        <p:nvSpPr>
-          <p:cNvPr id="224" name="DSPIRA 3"/>
-          <p:cNvSpPr>
-            <a:spLocks noGrp="1"/>
-          </p:cNvSpPr>
-          <p:nvPr/>
-        </p:nvSpPr>
-        <p:spPr>
-          <a:xfrm>
-            <a:off x="228600" y="76200"/>
-            <a:ext cx="4762500" cy="228600"/>
-          </a:xfrm>
-          <a:prstGeom prst="rect">
-            <a:avLst/>
-          </a:prstGeom>
-          <a:noFill/>
-          <a:ln w="0">
-            <a:noFill/>
-          </a:ln>
-        </p:spPr>
-        <p:txBody>
-          <a:bodyPr>
-            <a:noAutofit/>
-          </a:bodyPr>
-          <a:lstStyle/>
-          <a:p>
-            <a:pPr>
-              <a:defRPr sz="1200" b="1">
-                <a:solidFill>
-                  <a:srgbClr val="002855"/>
-                </a:solidFill>
-                <a:latin typeface="Arial"/>
-                <a:ea typeface="Arial"/>
-                <a:cs typeface="Arial"/>
-              </a:defRPr>
-            </a:pPr>
-            <a:r>
-              <a:rPr sz="1200" b="1">
-                <a:solidFill>
-                  <a:srgbClr val="002855"/>
-                </a:solidFill>
-                <a:latin typeface="Arial"/>
-                <a:ea typeface="Arial"/>
-                <a:cs typeface="Arial"/>
-              </a:rPr>
-              <a:t>WVU DSPIRA</a:t>
-            </a:r>
-          </a:p>
-        </p:txBody>
       </p:sp>
       <p:sp>
         <p:nvSpPr>
@@ -37668,6 +39993,156 @@
                 <a:cs typeface="Arial"/>
               </a:rPr>
               <a:t>8 of 29</a:t>
+            </a:r>
+          </a:p>
+        </p:txBody>
+      </p:sp>
+      <p:sp>
+        <p:nvSpPr>
+          <p:cNvPr id="227" name="WVU DSPIRA navy band"/>
+          <p:cNvSpPr>
+            <a:spLocks noGrp="1"/>
+          </p:cNvSpPr>
+          <p:nvPr/>
+        </p:nvSpPr>
+        <p:spPr>
+          <a:xfrm>
+            <a:off x="0" y="0"/>
+            <a:ext cx="9144000" cy="323850"/>
+          </a:xfrm>
+          <a:prstGeom prst="rect">
+            <a:avLst/>
+          </a:prstGeom>
+          <a:solidFill>
+            <a:srgbClr val="002855"/>
+          </a:solidFill>
+          <a:ln w="0">
+            <a:noFill/>
+          </a:ln>
+        </p:spPr>
+      </p:sp>
+      <p:sp>
+        <p:nvSpPr>
+          <p:cNvPr id="228" name="WVU DSPIRA gold rule"/>
+          <p:cNvSpPr>
+            <a:spLocks noGrp="1"/>
+          </p:cNvSpPr>
+          <p:nvPr/>
+        </p:nvSpPr>
+        <p:spPr>
+          <a:xfrm>
+            <a:off x="0" y="323850"/>
+            <a:ext cx="9144000" cy="19050"/>
+          </a:xfrm>
+          <a:prstGeom prst="rect">
+            <a:avLst/>
+          </a:prstGeom>
+          <a:solidFill>
+            <a:srgbClr val="EEAA00"/>
+          </a:solidFill>
+          <a:ln w="0">
+            <a:noFill/>
+          </a:ln>
+        </p:spPr>
+      </p:sp>
+      <p:sp>
+        <p:nvSpPr>
+          <p:cNvPr id="229" name="WVU DSPIRA name"/>
+          <p:cNvSpPr>
+            <a:spLocks noGrp="1"/>
+          </p:cNvSpPr>
+          <p:nvPr/>
+        </p:nvSpPr>
+        <p:spPr>
+          <a:xfrm>
+            <a:off x="228600" y="19050"/>
+            <a:ext cx="2857500" cy="257175"/>
+          </a:xfrm>
+          <a:prstGeom prst="rect">
+            <a:avLst/>
+          </a:prstGeom>
+          <a:noFill/>
+          <a:ln w="0">
+            <a:noFill/>
+          </a:ln>
+        </p:spPr>
+        <p:txBody>
+          <a:bodyPr>
+            <a:noAutofit/>
+          </a:bodyPr>
+          <a:lstStyle/>
+          <a:p>
+            <a:pPr>
+              <a:defRPr sz="1600" b="1">
+                <a:solidFill>
+                  <a:srgbClr val="FFFFFF"/>
+                </a:solidFill>
+                <a:latin typeface="Arial"/>
+                <a:ea typeface="Arial"/>
+                <a:cs typeface="Arial"/>
+              </a:defRPr>
+            </a:pPr>
+            <a:r>
+              <a:rPr sz="1600" b="1">
+                <a:solidFill>
+                  <a:srgbClr val="FFFFFF"/>
+                </a:solidFill>
+                <a:latin typeface="Arial"/>
+                <a:ea typeface="Arial"/>
+                <a:cs typeface="Arial"/>
+              </a:rPr>
+              <a:t>WVU DSPIRA</a:t>
+            </a:r>
+          </a:p>
+        </p:txBody>
+      </p:sp>
+      <p:sp>
+        <p:nvSpPr>
+          <p:cNvPr id="230" name="WVU DSPIRA university"/>
+          <p:cNvSpPr>
+            <a:spLocks noGrp="1"/>
+          </p:cNvSpPr>
+          <p:nvPr/>
+        </p:nvSpPr>
+        <p:spPr>
+          <a:xfrm>
+            <a:off x="6286500" y="114300"/>
+            <a:ext cx="2628900" cy="171450"/>
+          </a:xfrm>
+          <a:prstGeom prst="rect">
+            <a:avLst/>
+          </a:prstGeom>
+          <a:noFill/>
+          <a:ln w="0">
+            <a:noFill/>
+          </a:ln>
+        </p:spPr>
+        <p:txBody>
+          <a:bodyPr>
+            <a:noAutofit/>
+          </a:bodyPr>
+          <a:lstStyle/>
+          <a:p>
+            <a:pPr algn="r">
+              <a:defRPr sz="900">
+                <a:solidFill>
+                  <a:srgbClr val="FFFFFF"/>
+                </a:solidFill>
+                <a:latin typeface="Arial"/>
+                <a:ea typeface="Arial"/>
+                <a:cs typeface="Arial"/>
+              </a:defRPr>
+            </a:pPr>
+            <a:r>
+              <a:rPr sz="900">
+                <a:solidFill>
+                  <a:srgbClr val="FFFFFF"/>
+                </a:solidFill>
+                <a:latin typeface="Arial"/>
+                <a:ea typeface="Arial"/>
+                <a:cs typeface="Arial"/>
+              </a:rPr>
+              <a:t>WEST VIRGINIA UNIVERSITY</a:t>
             </a:r>
           </a:p>
         </p:txBody>
@@ -38049,30 +40524,6 @@
       </p:sp>
       <p:sp>
         <p:nvSpPr>
-          <p:cNvPr id="229" name="DSPIRA 1"/>
-          <p:cNvSpPr>
-            <a:spLocks noGrp="1"/>
-          </p:cNvSpPr>
-          <p:nvPr/>
-        </p:nvSpPr>
-        <p:spPr>
-          <a:xfrm>
-            <a:off x="0" y="0"/>
-            <a:ext cx="9144000" cy="342900"/>
-          </a:xfrm>
-          <a:prstGeom prst="rect">
-            <a:avLst/>
-          </a:prstGeom>
-          <a:solidFill>
-            <a:srgbClr val="FFFFFF"/>
-          </a:solidFill>
-          <a:ln w="0">
-            <a:noFill/>
-          </a:ln>
-        </p:spPr>
-      </p:sp>
-      <p:sp>
-        <p:nvSpPr>
           <p:cNvPr id="230" name="DSPIRA 2"/>
           <p:cNvSpPr>
             <a:spLocks noGrp="1"/>
@@ -38094,57 +40545,6 @@
             <a:noFill/>
           </a:ln>
         </p:spPr>
-      </p:sp>
-      <p:sp>
-        <p:nvSpPr>
-          <p:cNvPr id="231" name="DSPIRA 3"/>
-          <p:cNvSpPr>
-            <a:spLocks noGrp="1"/>
-          </p:cNvSpPr>
-          <p:nvPr/>
-        </p:nvSpPr>
-        <p:spPr>
-          <a:xfrm>
-            <a:off x="228600" y="76200"/>
-            <a:ext cx="4762500" cy="228600"/>
-          </a:xfrm>
-          <a:prstGeom prst="rect">
-            <a:avLst/>
-          </a:prstGeom>
-          <a:noFill/>
-          <a:ln w="0">
-            <a:noFill/>
-          </a:ln>
-        </p:spPr>
-        <p:txBody>
-          <a:bodyPr>
-            <a:noAutofit/>
-          </a:bodyPr>
-          <a:lstStyle/>
-          <a:p>
-            <a:pPr>
-              <a:defRPr sz="1200" b="1">
-                <a:solidFill>
-                  <a:srgbClr val="002855"/>
-                </a:solidFill>
-                <a:latin typeface="Arial"/>
-                <a:ea typeface="Arial"/>
-                <a:cs typeface="Arial"/>
-              </a:defRPr>
-            </a:pPr>
-            <a:r>
-              <a:rPr sz="1200" b="1">
-                <a:solidFill>
-                  <a:srgbClr val="002855"/>
-                </a:solidFill>
-                <a:latin typeface="Arial"/>
-                <a:ea typeface="Arial"/>
-                <a:cs typeface="Arial"/>
-              </a:rPr>
-              <a:t>WVU DSPIRA</a:t>
-            </a:r>
-          </a:p>
-        </p:txBody>
       </p:sp>
       <p:sp>
         <p:nvSpPr>
@@ -38244,6 +40644,156 @@
                 <a:cs typeface="Arial"/>
               </a:rPr>
               <a:t>9 of 29</a:t>
+            </a:r>
+          </a:p>
+        </p:txBody>
+      </p:sp>
+      <p:sp>
+        <p:nvSpPr>
+          <p:cNvPr id="234" name="WVU DSPIRA navy band"/>
+          <p:cNvSpPr>
+            <a:spLocks noGrp="1"/>
+          </p:cNvSpPr>
+          <p:nvPr/>
+        </p:nvSpPr>
+        <p:spPr>
+          <a:xfrm>
+            <a:off x="0" y="0"/>
+            <a:ext cx="9144000" cy="323850"/>
+          </a:xfrm>
+          <a:prstGeom prst="rect">
+            <a:avLst/>
+          </a:prstGeom>
+          <a:solidFill>
+            <a:srgbClr val="002855"/>
+          </a:solidFill>
+          <a:ln w="0">
+            <a:noFill/>
+          </a:ln>
+        </p:spPr>
+      </p:sp>
+      <p:sp>
+        <p:nvSpPr>
+          <p:cNvPr id="235" name="WVU DSPIRA gold rule"/>
+          <p:cNvSpPr>
+            <a:spLocks noGrp="1"/>
+          </p:cNvSpPr>
+          <p:nvPr/>
+        </p:nvSpPr>
+        <p:spPr>
+          <a:xfrm>
+            <a:off x="0" y="323850"/>
+            <a:ext cx="9144000" cy="19050"/>
+          </a:xfrm>
+          <a:prstGeom prst="rect">
+            <a:avLst/>
+          </a:prstGeom>
+          <a:solidFill>
+            <a:srgbClr val="EEAA00"/>
+          </a:solidFill>
+          <a:ln w="0">
+            <a:noFill/>
+          </a:ln>
+        </p:spPr>
+      </p:sp>
+      <p:sp>
+        <p:nvSpPr>
+          <p:cNvPr id="236" name="WVU DSPIRA name"/>
+          <p:cNvSpPr>
+            <a:spLocks noGrp="1"/>
+          </p:cNvSpPr>
+          <p:nvPr/>
+        </p:nvSpPr>
+        <p:spPr>
+          <a:xfrm>
+            <a:off x="228600" y="19050"/>
+            <a:ext cx="2857500" cy="257175"/>
+          </a:xfrm>
+          <a:prstGeom prst="rect">
+            <a:avLst/>
+          </a:prstGeom>
+          <a:noFill/>
+          <a:ln w="0">
+            <a:noFill/>
+          </a:ln>
+        </p:spPr>
+        <p:txBody>
+          <a:bodyPr>
+            <a:noAutofit/>
+          </a:bodyPr>
+          <a:lstStyle/>
+          <a:p>
+            <a:pPr>
+              <a:defRPr sz="1600" b="1">
+                <a:solidFill>
+                  <a:srgbClr val="FFFFFF"/>
+                </a:solidFill>
+                <a:latin typeface="Arial"/>
+                <a:ea typeface="Arial"/>
+                <a:cs typeface="Arial"/>
+              </a:defRPr>
+            </a:pPr>
+            <a:r>
+              <a:rPr sz="1600" b="1">
+                <a:solidFill>
+                  <a:srgbClr val="FFFFFF"/>
+                </a:solidFill>
+                <a:latin typeface="Arial"/>
+                <a:ea typeface="Arial"/>
+                <a:cs typeface="Arial"/>
+              </a:rPr>
+              <a:t>WVU DSPIRA</a:t>
+            </a:r>
+          </a:p>
+        </p:txBody>
+      </p:sp>
+      <p:sp>
+        <p:nvSpPr>
+          <p:cNvPr id="237" name="WVU DSPIRA university"/>
+          <p:cNvSpPr>
+            <a:spLocks noGrp="1"/>
+          </p:cNvSpPr>
+          <p:nvPr/>
+        </p:nvSpPr>
+        <p:spPr>
+          <a:xfrm>
+            <a:off x="6286500" y="114300"/>
+            <a:ext cx="2628900" cy="171450"/>
+          </a:xfrm>
+          <a:prstGeom prst="rect">
+            <a:avLst/>
+          </a:prstGeom>
+          <a:noFill/>
+          <a:ln w="0">
+            <a:noFill/>
+          </a:ln>
+        </p:spPr>
+        <p:txBody>
+          <a:bodyPr>
+            <a:noAutofit/>
+          </a:bodyPr>
+          <a:lstStyle/>
+          <a:p>
+            <a:pPr algn="r">
+              <a:defRPr sz="900">
+                <a:solidFill>
+                  <a:srgbClr val="FFFFFF"/>
+                </a:solidFill>
+                <a:latin typeface="Arial"/>
+                <a:ea typeface="Arial"/>
+                <a:cs typeface="Arial"/>
+              </a:defRPr>
+            </a:pPr>
+            <a:r>
+              <a:rPr sz="900">
+                <a:solidFill>
+                  <a:srgbClr val="FFFFFF"/>
+                </a:solidFill>
+                <a:latin typeface="Arial"/>
+                <a:ea typeface="Arial"/>
+                <a:cs typeface="Arial"/>
+              </a:rPr>
+              <a:t>WEST VIRGINIA UNIVERSITY</a:t>
             </a:r>
           </a:p>
         </p:txBody>

--- a/assets/lessons/lectures/astronomy/dark-matter-2018.pptx
+++ b/assets/lessons/lectures/astronomy/dark-matter-2018.pptx
@@ -7467,7 +7467,7 @@
                 <a:ea typeface="Arial"/>
                 <a:cs typeface="Arial"/>
               </a:rPr>
-              <a:t>wvurail.org/dspira</a:t>
+              <a:t>rail.wvu.edu/dspira</a:t>
             </a:r>
           </a:p>
         </p:txBody>
